--- a/test/generator/baseline/gen.xlsx.to.pptx.pptx
+++ b/test/generator/baseline/gen.xlsx.to.pptx.pptx
@@ -155,7 +155,8 @@
             <a:tbl>
               <a:tblPr firstRow="1"/>
               <a:tblGrid>
-                <a:gridCol w="8229600"/>
+                <a:gridCol w="4114800"/>
+                <a:gridCol w="4114800"/>
               </a:tblGrid>
               <a:tr h="334818">
                 <a:tc>
@@ -201,6 +202,35 @@
                     </a:lnB>
                   </a:tcPr>
                 </a:tc>
+                <a:tc>
+                  <a:txBody>
+                    <a:bodyPr/>
+                    <a:lstStyle/>
+                    <a:p/>
+                  </a:txBody>
+                  <a:tcPr>
+                    <a:lnL w="9525">
+                      <a:solidFill>
+                        <a:srgbClr val="BFBFBF"/>
+                      </a:solidFill>
+                    </a:lnL>
+                    <a:lnR w="9525">
+                      <a:solidFill>
+                        <a:srgbClr val="BFBFBF"/>
+                      </a:solidFill>
+                    </a:lnR>
+                    <a:lnT w="9525">
+                      <a:solidFill>
+                        <a:srgbClr val="BFBFBF"/>
+                      </a:solidFill>
+                    </a:lnT>
+                    <a:lnB w="9525">
+                      <a:solidFill>
+                        <a:srgbClr val="BFBFBF"/>
+                      </a:solidFill>
+                    </a:lnB>
+                  </a:tcPr>
+                </a:tc>
               </a:tr>
               <a:tr h="334818">
                 <a:tc>
@@ -258,6 +288,35 @@
                     </a:lnB>
                   </a:tcPr>
                 </a:tc>
+                <a:tc>
+                  <a:txBody>
+                    <a:bodyPr/>
+                    <a:lstStyle/>
+                    <a:p/>
+                  </a:txBody>
+                  <a:tcPr>
+                    <a:lnL w="9525">
+                      <a:solidFill>
+                        <a:srgbClr val="BFBFBF"/>
+                      </a:solidFill>
+                    </a:lnL>
+                    <a:lnR w="9525">
+                      <a:solidFill>
+                        <a:srgbClr val="BFBFBF"/>
+                      </a:solidFill>
+                    </a:lnR>
+                    <a:lnT w="9525">
+                      <a:solidFill>
+                        <a:srgbClr val="BFBFBF"/>
+                      </a:solidFill>
+                    </a:lnT>
+                    <a:lnB w="9525">
+                      <a:solidFill>
+                        <a:srgbClr val="BFBFBF"/>
+                      </a:solidFill>
+                    </a:lnB>
+                  </a:tcPr>
+                </a:tc>
               </a:tr>
               <a:tr h="334818">
                 <a:tc>
@@ -300,6 +359,35 @@
                     </a:lnB>
                   </a:tcPr>
                 </a:tc>
+                <a:tc>
+                  <a:txBody>
+                    <a:bodyPr/>
+                    <a:lstStyle/>
+                    <a:p/>
+                  </a:txBody>
+                  <a:tcPr>
+                    <a:lnL w="9525">
+                      <a:solidFill>
+                        <a:srgbClr val="BFBFBF"/>
+                      </a:solidFill>
+                    </a:lnL>
+                    <a:lnR w="9525">
+                      <a:solidFill>
+                        <a:srgbClr val="BFBFBF"/>
+                      </a:solidFill>
+                    </a:lnR>
+                    <a:lnT w="9525">
+                      <a:solidFill>
+                        <a:srgbClr val="BFBFBF"/>
+                      </a:solidFill>
+                    </a:lnT>
+                    <a:lnB w="9525">
+                      <a:solidFill>
+                        <a:srgbClr val="BFBFBF"/>
+                      </a:solidFill>
+                    </a:lnB>
+                  </a:tcPr>
+                </a:tc>
               </a:tr>
               <a:tr h="334818">
                 <a:tc>
@@ -378,12 +466,70 @@
                     </a:lnB>
                   </a:tcPr>
                 </a:tc>
+                <a:tc>
+                  <a:txBody>
+                    <a:bodyPr/>
+                    <a:lstStyle/>
+                    <a:p/>
+                  </a:txBody>
+                  <a:tcPr>
+                    <a:lnL w="9525">
+                      <a:solidFill>
+                        <a:srgbClr val="BFBFBF"/>
+                      </a:solidFill>
+                    </a:lnL>
+                    <a:lnR w="9525">
+                      <a:solidFill>
+                        <a:srgbClr val="BFBFBF"/>
+                      </a:solidFill>
+                    </a:lnR>
+                    <a:lnT w="9525">
+                      <a:solidFill>
+                        <a:srgbClr val="BFBFBF"/>
+                      </a:solidFill>
+                    </a:lnT>
+                    <a:lnB w="9525">
+                      <a:solidFill>
+                        <a:srgbClr val="BFBFBF"/>
+                      </a:solidFill>
+                    </a:lnB>
+                  </a:tcPr>
+                </a:tc>
               </a:tr>
               <a:tr h="334818">
                 <a:tc>
                   <a:txBody>
                     <a:bodyPr/>
                     <a:lstStyle/>
+                    <a:p/>
+                  </a:txBody>
+                  <a:tcPr>
+                    <a:lnL w="9525">
+                      <a:solidFill>
+                        <a:srgbClr val="BFBFBF"/>
+                      </a:solidFill>
+                    </a:lnL>
+                    <a:lnR w="9525">
+                      <a:solidFill>
+                        <a:srgbClr val="BFBFBF"/>
+                      </a:solidFill>
+                    </a:lnR>
+                    <a:lnT w="9525">
+                      <a:solidFill>
+                        <a:srgbClr val="BFBFBF"/>
+                      </a:solidFill>
+                    </a:lnT>
+                    <a:lnB w="9525">
+                      <a:solidFill>
+                        <a:srgbClr val="BFBFBF"/>
+                      </a:solidFill>
+                    </a:lnB>
+                  </a:tcPr>
+                </a:tc>
+                <a:tc>
+                  <a:txBody>
+                    <a:bodyPr/>
+                    <a:lstStyle/>
                     <a:p>
                       <a:pPr>
                         <a:buNone/>
@@ -426,6 +572,35 @@
                   <a:txBody>
                     <a:bodyPr/>
                     <a:lstStyle/>
+                    <a:p/>
+                  </a:txBody>
+                  <a:tcPr>
+                    <a:lnL w="9525">
+                      <a:solidFill>
+                        <a:srgbClr val="BFBFBF"/>
+                      </a:solidFill>
+                    </a:lnL>
+                    <a:lnR w="9525">
+                      <a:solidFill>
+                        <a:srgbClr val="BFBFBF"/>
+                      </a:solidFill>
+                    </a:lnR>
+                    <a:lnT w="9525">
+                      <a:solidFill>
+                        <a:srgbClr val="BFBFBF"/>
+                      </a:solidFill>
+                    </a:lnT>
+                    <a:lnB w="9525">
+                      <a:solidFill>
+                        <a:srgbClr val="BFBFBF"/>
+                      </a:solidFill>
+                    </a:lnB>
+                  </a:tcPr>
+                </a:tc>
+                <a:tc>
+                  <a:txBody>
+                    <a:bodyPr/>
+                    <a:lstStyle/>
                     <a:p>
                       <a:pPr>
                         <a:buNone/>
@@ -468,6 +643,35 @@
                   <a:txBody>
                     <a:bodyPr/>
                     <a:lstStyle/>
+                    <a:p/>
+                  </a:txBody>
+                  <a:tcPr>
+                    <a:lnL w="9525">
+                      <a:solidFill>
+                        <a:srgbClr val="BFBFBF"/>
+                      </a:solidFill>
+                    </a:lnL>
+                    <a:lnR w="9525">
+                      <a:solidFill>
+                        <a:srgbClr val="BFBFBF"/>
+                      </a:solidFill>
+                    </a:lnR>
+                    <a:lnT w="9525">
+                      <a:solidFill>
+                        <a:srgbClr val="BFBFBF"/>
+                      </a:solidFill>
+                    </a:lnT>
+                    <a:lnB w="9525">
+                      <a:solidFill>
+                        <a:srgbClr val="BFBFBF"/>
+                      </a:solidFill>
+                    </a:lnB>
+                  </a:tcPr>
+                </a:tc>
+                <a:tc>
+                  <a:txBody>
+                    <a:bodyPr/>
+                    <a:lstStyle/>
                     <a:p>
                       <a:pPr>
                         <a:buNone/>
@@ -510,6 +714,35 @@
                   <a:txBody>
                     <a:bodyPr/>
                     <a:lstStyle/>
+                    <a:p/>
+                  </a:txBody>
+                  <a:tcPr>
+                    <a:lnL w="9525">
+                      <a:solidFill>
+                        <a:srgbClr val="BFBFBF"/>
+                      </a:solidFill>
+                    </a:lnL>
+                    <a:lnR w="9525">
+                      <a:solidFill>
+                        <a:srgbClr val="BFBFBF"/>
+                      </a:solidFill>
+                    </a:lnR>
+                    <a:lnT w="9525">
+                      <a:solidFill>
+                        <a:srgbClr val="BFBFBF"/>
+                      </a:solidFill>
+                    </a:lnT>
+                    <a:lnB w="9525">
+                      <a:solidFill>
+                        <a:srgbClr val="BFBFBF"/>
+                      </a:solidFill>
+                    </a:lnB>
+                  </a:tcPr>
+                </a:tc>
+                <a:tc>
+                  <a:txBody>
+                    <a:bodyPr/>
+                    <a:lstStyle/>
                     <a:p>
                       <a:pPr>
                         <a:buNone/>
@@ -552,6 +785,35 @@
                   <a:txBody>
                     <a:bodyPr/>
                     <a:lstStyle/>
+                    <a:p/>
+                  </a:txBody>
+                  <a:tcPr>
+                    <a:lnL w="9525">
+                      <a:solidFill>
+                        <a:srgbClr val="BFBFBF"/>
+                      </a:solidFill>
+                    </a:lnL>
+                    <a:lnR w="9525">
+                      <a:solidFill>
+                        <a:srgbClr val="BFBFBF"/>
+                      </a:solidFill>
+                    </a:lnR>
+                    <a:lnT w="9525">
+                      <a:solidFill>
+                        <a:srgbClr val="BFBFBF"/>
+                      </a:solidFill>
+                    </a:lnT>
+                    <a:lnB w="9525">
+                      <a:solidFill>
+                        <a:srgbClr val="BFBFBF"/>
+                      </a:solidFill>
+                    </a:lnB>
+                  </a:tcPr>
+                </a:tc>
+                <a:tc>
+                  <a:txBody>
+                    <a:bodyPr/>
+                    <a:lstStyle/>
                     <a:p>
                       <a:pPr>
                         <a:buNone/>
@@ -594,6 +856,35 @@
                   <a:txBody>
                     <a:bodyPr/>
                     <a:lstStyle/>
+                    <a:p/>
+                  </a:txBody>
+                  <a:tcPr>
+                    <a:lnL w="9525">
+                      <a:solidFill>
+                        <a:srgbClr val="BFBFBF"/>
+                      </a:solidFill>
+                    </a:lnL>
+                    <a:lnR w="9525">
+                      <a:solidFill>
+                        <a:srgbClr val="BFBFBF"/>
+                      </a:solidFill>
+                    </a:lnR>
+                    <a:lnT w="9525">
+                      <a:solidFill>
+                        <a:srgbClr val="BFBFBF"/>
+                      </a:solidFill>
+                    </a:lnT>
+                    <a:lnB w="9525">
+                      <a:solidFill>
+                        <a:srgbClr val="BFBFBF"/>
+                      </a:solidFill>
+                    </a:lnB>
+                  </a:tcPr>
+                </a:tc>
+                <a:tc>
+                  <a:txBody>
+                    <a:bodyPr/>
+                    <a:lstStyle/>
                     <a:p>
                       <a:pPr>
                         <a:buNone/>
@@ -632,6 +923,35 @@
                 </a:tc>
               </a:tr>
               <a:tr h="334818">
+                <a:tc>
+                  <a:txBody>
+                    <a:bodyPr/>
+                    <a:lstStyle/>
+                    <a:p/>
+                  </a:txBody>
+                  <a:tcPr>
+                    <a:lnL w="9525">
+                      <a:solidFill>
+                        <a:srgbClr val="BFBFBF"/>
+                      </a:solidFill>
+                    </a:lnL>
+                    <a:lnR w="9525">
+                      <a:solidFill>
+                        <a:srgbClr val="BFBFBF"/>
+                      </a:solidFill>
+                    </a:lnR>
+                    <a:lnT w="9525">
+                      <a:solidFill>
+                        <a:srgbClr val="BFBFBF"/>
+                      </a:solidFill>
+                    </a:lnT>
+                    <a:lnB w="9525">
+                      <a:solidFill>
+                        <a:srgbClr val="BFBFBF"/>
+                      </a:solidFill>
+                    </a:lnB>
+                  </a:tcPr>
+                </a:tc>
                 <a:tc>
                   <a:txBody>
                     <a:bodyPr/>
@@ -6394,10 +6714,12 @@
             <a:tbl>
               <a:tblPr firstRow="1"/>
               <a:tblGrid>
-                <a:gridCol w="1870364"/>
-                <a:gridCol w="1496291"/>
-                <a:gridCol w="3366655"/>
-                <a:gridCol w="1496291"/>
+                <a:gridCol w="914400"/>
+                <a:gridCol w="609600"/>
+                <a:gridCol w="1524000"/>
+                <a:gridCol w="1219200"/>
+                <a:gridCol w="2743200"/>
+                <a:gridCol w="1219200"/>
               </a:tblGrid>
               <a:tr h="613833">
                 <a:tc>
@@ -6530,12 +6852,128 @@
                     </a:lnB>
                   </a:tcPr>
                 </a:tc>
+                <a:tc>
+                  <a:txBody>
+                    <a:bodyPr/>
+                    <a:lstStyle/>
+                    <a:p/>
+                  </a:txBody>
+                  <a:tcPr>
+                    <a:lnL w="9525">
+                      <a:solidFill>
+                        <a:srgbClr val="BFBFBF"/>
+                      </a:solidFill>
+                    </a:lnL>
+                    <a:lnR w="9525">
+                      <a:solidFill>
+                        <a:srgbClr val="BFBFBF"/>
+                      </a:solidFill>
+                    </a:lnR>
+                    <a:lnT w="9525">
+                      <a:solidFill>
+                        <a:srgbClr val="BFBFBF"/>
+                      </a:solidFill>
+                    </a:lnT>
+                    <a:lnB w="9525">
+                      <a:solidFill>
+                        <a:srgbClr val="BFBFBF"/>
+                      </a:solidFill>
+                    </a:lnB>
+                  </a:tcPr>
+                </a:tc>
+                <a:tc>
+                  <a:txBody>
+                    <a:bodyPr/>
+                    <a:lstStyle/>
+                    <a:p/>
+                  </a:txBody>
+                  <a:tcPr>
+                    <a:lnL w="9525">
+                      <a:solidFill>
+                        <a:srgbClr val="BFBFBF"/>
+                      </a:solidFill>
+                    </a:lnL>
+                    <a:lnR w="9525">
+                      <a:solidFill>
+                        <a:srgbClr val="BFBFBF"/>
+                      </a:solidFill>
+                    </a:lnR>
+                    <a:lnT w="9525">
+                      <a:solidFill>
+                        <a:srgbClr val="BFBFBF"/>
+                      </a:solidFill>
+                    </a:lnT>
+                    <a:lnB w="9525">
+                      <a:solidFill>
+                        <a:srgbClr val="BFBFBF"/>
+                      </a:solidFill>
+                    </a:lnB>
+                  </a:tcPr>
+                </a:tc>
               </a:tr>
               <a:tr h="613833">
                 <a:tc>
                   <a:txBody>
                     <a:bodyPr/>
                     <a:lstStyle/>
+                    <a:p/>
+                  </a:txBody>
+                  <a:tcPr>
+                    <a:lnL w="9525">
+                      <a:solidFill>
+                        <a:srgbClr val="BFBFBF"/>
+                      </a:solidFill>
+                    </a:lnL>
+                    <a:lnR w="9525">
+                      <a:solidFill>
+                        <a:srgbClr val="BFBFBF"/>
+                      </a:solidFill>
+                    </a:lnR>
+                    <a:lnT w="9525">
+                      <a:solidFill>
+                        <a:srgbClr val="BFBFBF"/>
+                      </a:solidFill>
+                    </a:lnT>
+                    <a:lnB w="9525">
+                      <a:solidFill>
+                        <a:srgbClr val="BFBFBF"/>
+                      </a:solidFill>
+                    </a:lnB>
+                  </a:tcPr>
+                </a:tc>
+                <a:tc>
+                  <a:txBody>
+                    <a:bodyPr/>
+                    <a:lstStyle/>
+                    <a:p/>
+                  </a:txBody>
+                  <a:tcPr>
+                    <a:lnL w="9525">
+                      <a:solidFill>
+                        <a:srgbClr val="BFBFBF"/>
+                      </a:solidFill>
+                    </a:lnL>
+                    <a:lnR w="9525">
+                      <a:solidFill>
+                        <a:srgbClr val="BFBFBF"/>
+                      </a:solidFill>
+                    </a:lnR>
+                    <a:lnT w="9525">
+                      <a:solidFill>
+                        <a:srgbClr val="BFBFBF"/>
+                      </a:solidFill>
+                    </a:lnT>
+                    <a:lnB w="9525">
+                      <a:solidFill>
+                        <a:srgbClr val="BFBFBF"/>
+                      </a:solidFill>
+                    </a:lnB>
+                  </a:tcPr>
+                </a:tc>
+                <a:tc>
+                  <a:txBody>
+                    <a:bodyPr/>
+                    <a:lstStyle/>
                     <a:p>
                       <a:pPr>
                         <a:buNone/>
@@ -6710,6 +7148,64 @@
                   <a:txBody>
                     <a:bodyPr/>
                     <a:lstStyle/>
+                    <a:p/>
+                  </a:txBody>
+                  <a:tcPr>
+                    <a:lnL w="9525">
+                      <a:solidFill>
+                        <a:srgbClr val="BFBFBF"/>
+                      </a:solidFill>
+                    </a:lnL>
+                    <a:lnR w="9525">
+                      <a:solidFill>
+                        <a:srgbClr val="BFBFBF"/>
+                      </a:solidFill>
+                    </a:lnR>
+                    <a:lnT w="9525">
+                      <a:solidFill>
+                        <a:srgbClr val="BFBFBF"/>
+                      </a:solidFill>
+                    </a:lnT>
+                    <a:lnB w="9525">
+                      <a:solidFill>
+                        <a:srgbClr val="BFBFBF"/>
+                      </a:solidFill>
+                    </a:lnB>
+                  </a:tcPr>
+                </a:tc>
+                <a:tc>
+                  <a:txBody>
+                    <a:bodyPr/>
+                    <a:lstStyle/>
+                    <a:p/>
+                  </a:txBody>
+                  <a:tcPr>
+                    <a:lnL w="9525">
+                      <a:solidFill>
+                        <a:srgbClr val="BFBFBF"/>
+                      </a:solidFill>
+                    </a:lnL>
+                    <a:lnR w="9525">
+                      <a:solidFill>
+                        <a:srgbClr val="BFBFBF"/>
+                      </a:solidFill>
+                    </a:lnR>
+                    <a:lnT w="9525">
+                      <a:solidFill>
+                        <a:srgbClr val="BFBFBF"/>
+                      </a:solidFill>
+                    </a:lnT>
+                    <a:lnB w="9525">
+                      <a:solidFill>
+                        <a:srgbClr val="BFBFBF"/>
+                      </a:solidFill>
+                    </a:lnB>
+                  </a:tcPr>
+                </a:tc>
+                <a:tc>
+                  <a:txBody>
+                    <a:bodyPr/>
+                    <a:lstStyle/>
                     <a:p>
                       <a:pPr>
                         <a:buNone/>
@@ -6884,6 +7380,64 @@
                   <a:txBody>
                     <a:bodyPr/>
                     <a:lstStyle/>
+                    <a:p/>
+                  </a:txBody>
+                  <a:tcPr>
+                    <a:lnL w="9525">
+                      <a:solidFill>
+                        <a:srgbClr val="BFBFBF"/>
+                      </a:solidFill>
+                    </a:lnL>
+                    <a:lnR w="9525">
+                      <a:solidFill>
+                        <a:srgbClr val="BFBFBF"/>
+                      </a:solidFill>
+                    </a:lnR>
+                    <a:lnT w="9525">
+                      <a:solidFill>
+                        <a:srgbClr val="BFBFBF"/>
+                      </a:solidFill>
+                    </a:lnT>
+                    <a:lnB w="9525">
+                      <a:solidFill>
+                        <a:srgbClr val="BFBFBF"/>
+                      </a:solidFill>
+                    </a:lnB>
+                  </a:tcPr>
+                </a:tc>
+                <a:tc>
+                  <a:txBody>
+                    <a:bodyPr/>
+                    <a:lstStyle/>
+                    <a:p/>
+                  </a:txBody>
+                  <a:tcPr>
+                    <a:lnL w="9525">
+                      <a:solidFill>
+                        <a:srgbClr val="BFBFBF"/>
+                      </a:solidFill>
+                    </a:lnL>
+                    <a:lnR w="9525">
+                      <a:solidFill>
+                        <a:srgbClr val="BFBFBF"/>
+                      </a:solidFill>
+                    </a:lnR>
+                    <a:lnT w="9525">
+                      <a:solidFill>
+                        <a:srgbClr val="BFBFBF"/>
+                      </a:solidFill>
+                    </a:lnT>
+                    <a:lnB w="9525">
+                      <a:solidFill>
+                        <a:srgbClr val="BFBFBF"/>
+                      </a:solidFill>
+                    </a:lnB>
+                  </a:tcPr>
+                </a:tc>
+                <a:tc>
+                  <a:txBody>
+                    <a:bodyPr/>
+                    <a:lstStyle/>
                     <a:p>
                       <a:pPr>
                         <a:buNone/>
@@ -7058,6 +7612,64 @@
                   <a:txBody>
                     <a:bodyPr/>
                     <a:lstStyle/>
+                    <a:p/>
+                  </a:txBody>
+                  <a:tcPr>
+                    <a:lnL w="9525">
+                      <a:solidFill>
+                        <a:srgbClr val="BFBFBF"/>
+                      </a:solidFill>
+                    </a:lnL>
+                    <a:lnR w="9525">
+                      <a:solidFill>
+                        <a:srgbClr val="BFBFBF"/>
+                      </a:solidFill>
+                    </a:lnR>
+                    <a:lnT w="9525">
+                      <a:solidFill>
+                        <a:srgbClr val="BFBFBF"/>
+                      </a:solidFill>
+                    </a:lnT>
+                    <a:lnB w="9525">
+                      <a:solidFill>
+                        <a:srgbClr val="BFBFBF"/>
+                      </a:solidFill>
+                    </a:lnB>
+                  </a:tcPr>
+                </a:tc>
+                <a:tc>
+                  <a:txBody>
+                    <a:bodyPr/>
+                    <a:lstStyle/>
+                    <a:p/>
+                  </a:txBody>
+                  <a:tcPr>
+                    <a:lnL w="9525">
+                      <a:solidFill>
+                        <a:srgbClr val="BFBFBF"/>
+                      </a:solidFill>
+                    </a:lnL>
+                    <a:lnR w="9525">
+                      <a:solidFill>
+                        <a:srgbClr val="BFBFBF"/>
+                      </a:solidFill>
+                    </a:lnR>
+                    <a:lnT w="9525">
+                      <a:solidFill>
+                        <a:srgbClr val="BFBFBF"/>
+                      </a:solidFill>
+                    </a:lnT>
+                    <a:lnB w="9525">
+                      <a:solidFill>
+                        <a:srgbClr val="BFBFBF"/>
+                      </a:solidFill>
+                    </a:lnB>
+                  </a:tcPr>
+                </a:tc>
+                <a:tc>
+                  <a:txBody>
+                    <a:bodyPr/>
+                    <a:lstStyle/>
                     <a:p>
                       <a:pPr>
                         <a:buNone/>
@@ -7228,6 +7840,64 @@
                 </a:tc>
               </a:tr>
               <a:tr h="613833">
+                <a:tc>
+                  <a:txBody>
+                    <a:bodyPr/>
+                    <a:lstStyle/>
+                    <a:p/>
+                  </a:txBody>
+                  <a:tcPr>
+                    <a:lnL w="9525">
+                      <a:solidFill>
+                        <a:srgbClr val="BFBFBF"/>
+                      </a:solidFill>
+                    </a:lnL>
+                    <a:lnR w="9525">
+                      <a:solidFill>
+                        <a:srgbClr val="BFBFBF"/>
+                      </a:solidFill>
+                    </a:lnR>
+                    <a:lnT w="9525">
+                      <a:solidFill>
+                        <a:srgbClr val="BFBFBF"/>
+                      </a:solidFill>
+                    </a:lnT>
+                    <a:lnB w="9525">
+                      <a:solidFill>
+                        <a:srgbClr val="BFBFBF"/>
+                      </a:solidFill>
+                    </a:lnB>
+                  </a:tcPr>
+                </a:tc>
+                <a:tc>
+                  <a:txBody>
+                    <a:bodyPr/>
+                    <a:lstStyle/>
+                    <a:p/>
+                  </a:txBody>
+                  <a:tcPr>
+                    <a:lnL w="9525">
+                      <a:solidFill>
+                        <a:srgbClr val="BFBFBF"/>
+                      </a:solidFill>
+                    </a:lnL>
+                    <a:lnR w="9525">
+                      <a:solidFill>
+                        <a:srgbClr val="BFBFBF"/>
+                      </a:solidFill>
+                    </a:lnR>
+                    <a:lnT w="9525">
+                      <a:solidFill>
+                        <a:srgbClr val="BFBFBF"/>
+                      </a:solidFill>
+                    </a:lnT>
+                    <a:lnB w="9525">
+                      <a:solidFill>
+                        <a:srgbClr val="BFBFBF"/>
+                      </a:solidFill>
+                    </a:lnB>
+                  </a:tcPr>
+                </a:tc>
                 <a:tc>
                   <a:txBody>
                     <a:bodyPr/>
@@ -8336,7 +9006,8 @@
             <a:tbl>
               <a:tblPr firstRow="1"/>
               <a:tblGrid>
-                <a:gridCol w="8229600"/>
+                <a:gridCol w="4114800"/>
+                <a:gridCol w="4114800"/>
               </a:tblGrid>
               <a:tr h="613833">
                 <a:tc>
@@ -8382,12 +9053,70 @@
                     </a:lnB>
                   </a:tcPr>
                 </a:tc>
+                <a:tc>
+                  <a:txBody>
+                    <a:bodyPr/>
+                    <a:lstStyle/>
+                    <a:p/>
+                  </a:txBody>
+                  <a:tcPr>
+                    <a:lnL w="9525">
+                      <a:solidFill>
+                        <a:srgbClr val="BFBFBF"/>
+                      </a:solidFill>
+                    </a:lnL>
+                    <a:lnR w="9525">
+                      <a:solidFill>
+                        <a:srgbClr val="BFBFBF"/>
+                      </a:solidFill>
+                    </a:lnR>
+                    <a:lnT w="9525">
+                      <a:solidFill>
+                        <a:srgbClr val="BFBFBF"/>
+                      </a:solidFill>
+                    </a:lnT>
+                    <a:lnB w="9525">
+                      <a:solidFill>
+                        <a:srgbClr val="BFBFBF"/>
+                      </a:solidFill>
+                    </a:lnB>
+                  </a:tcPr>
+                </a:tc>
               </a:tr>
               <a:tr h="613833">
                 <a:tc>
                   <a:txBody>
                     <a:bodyPr/>
                     <a:lstStyle/>
+                    <a:p/>
+                  </a:txBody>
+                  <a:tcPr>
+                    <a:lnL w="9525">
+                      <a:solidFill>
+                        <a:srgbClr val="BFBFBF"/>
+                      </a:solidFill>
+                    </a:lnL>
+                    <a:lnR w="9525">
+                      <a:solidFill>
+                        <a:srgbClr val="BFBFBF"/>
+                      </a:solidFill>
+                    </a:lnR>
+                    <a:lnT w="9525">
+                      <a:solidFill>
+                        <a:srgbClr val="BFBFBF"/>
+                      </a:solidFill>
+                    </a:lnT>
+                    <a:lnB w="9525">
+                      <a:solidFill>
+                        <a:srgbClr val="BFBFBF"/>
+                      </a:solidFill>
+                    </a:lnB>
+                  </a:tcPr>
+                </a:tc>
+                <a:tc>
+                  <a:txBody>
+                    <a:bodyPr/>
+                    <a:lstStyle/>
                     <a:p>
                       <a:pPr>
                         <a:buNone/>
@@ -8430,6 +9159,35 @@
                   <a:txBody>
                     <a:bodyPr/>
                     <a:lstStyle/>
+                    <a:p/>
+                  </a:txBody>
+                  <a:tcPr>
+                    <a:lnL w="9525">
+                      <a:solidFill>
+                        <a:srgbClr val="BFBFBF"/>
+                      </a:solidFill>
+                    </a:lnL>
+                    <a:lnR w="9525">
+                      <a:solidFill>
+                        <a:srgbClr val="BFBFBF"/>
+                      </a:solidFill>
+                    </a:lnR>
+                    <a:lnT w="9525">
+                      <a:solidFill>
+                        <a:srgbClr val="BFBFBF"/>
+                      </a:solidFill>
+                    </a:lnT>
+                    <a:lnB w="9525">
+                      <a:solidFill>
+                        <a:srgbClr val="BFBFBF"/>
+                      </a:solidFill>
+                    </a:lnB>
+                  </a:tcPr>
+                </a:tc>
+                <a:tc>
+                  <a:txBody>
+                    <a:bodyPr/>
+                    <a:lstStyle/>
                     <a:p>
                       <a:pPr>
                         <a:buNone/>
@@ -8472,6 +9230,35 @@
                   <a:txBody>
                     <a:bodyPr/>
                     <a:lstStyle/>
+                    <a:p/>
+                  </a:txBody>
+                  <a:tcPr>
+                    <a:lnL w="9525">
+                      <a:solidFill>
+                        <a:srgbClr val="BFBFBF"/>
+                      </a:solidFill>
+                    </a:lnL>
+                    <a:lnR w="9525">
+                      <a:solidFill>
+                        <a:srgbClr val="BFBFBF"/>
+                      </a:solidFill>
+                    </a:lnR>
+                    <a:lnT w="9525">
+                      <a:solidFill>
+                        <a:srgbClr val="BFBFBF"/>
+                      </a:solidFill>
+                    </a:lnT>
+                    <a:lnB w="9525">
+                      <a:solidFill>
+                        <a:srgbClr val="BFBFBF"/>
+                      </a:solidFill>
+                    </a:lnB>
+                  </a:tcPr>
+                </a:tc>
+                <a:tc>
+                  <a:txBody>
+                    <a:bodyPr/>
+                    <a:lstStyle/>
                     <a:p>
                       <a:pPr>
                         <a:buNone/>
@@ -8514,6 +9301,35 @@
                   <a:txBody>
                     <a:bodyPr/>
                     <a:lstStyle/>
+                    <a:p/>
+                  </a:txBody>
+                  <a:tcPr>
+                    <a:lnL w="9525">
+                      <a:solidFill>
+                        <a:srgbClr val="BFBFBF"/>
+                      </a:solidFill>
+                    </a:lnL>
+                    <a:lnR w="9525">
+                      <a:solidFill>
+                        <a:srgbClr val="BFBFBF"/>
+                      </a:solidFill>
+                    </a:lnR>
+                    <a:lnT w="9525">
+                      <a:solidFill>
+                        <a:srgbClr val="BFBFBF"/>
+                      </a:solidFill>
+                    </a:lnT>
+                    <a:lnB w="9525">
+                      <a:solidFill>
+                        <a:srgbClr val="BFBFBF"/>
+                      </a:solidFill>
+                    </a:lnB>
+                  </a:tcPr>
+                </a:tc>
+                <a:tc>
+                  <a:txBody>
+                    <a:bodyPr/>
+                    <a:lstStyle/>
                     <a:p>
                       <a:pPr>
                         <a:buNone/>
@@ -8552,6 +9368,35 @@
                 </a:tc>
               </a:tr>
               <a:tr h="613833">
+                <a:tc>
+                  <a:txBody>
+                    <a:bodyPr/>
+                    <a:lstStyle/>
+                    <a:p/>
+                  </a:txBody>
+                  <a:tcPr>
+                    <a:lnL w="9525">
+                      <a:solidFill>
+                        <a:srgbClr val="BFBFBF"/>
+                      </a:solidFill>
+                    </a:lnL>
+                    <a:lnR w="9525">
+                      <a:solidFill>
+                        <a:srgbClr val="BFBFBF"/>
+                      </a:solidFill>
+                    </a:lnR>
+                    <a:lnT w="9525">
+                      <a:solidFill>
+                        <a:srgbClr val="BFBFBF"/>
+                      </a:solidFill>
+                    </a:lnT>
+                    <a:lnB w="9525">
+                      <a:solidFill>
+                        <a:srgbClr val="BFBFBF"/>
+                      </a:solidFill>
+                    </a:lnB>
+                  </a:tcPr>
+                </a:tc>
                 <a:tc>
                   <a:txBody>
                     <a:bodyPr/>
@@ -15439,6 +16284,35 @@
                   <a:txBody>
                     <a:bodyPr/>
                     <a:lstStyle/>
+                    <a:p/>
+                  </a:txBody>
+                  <a:tcPr>
+                    <a:lnL w="9525">
+                      <a:solidFill>
+                        <a:srgbClr val="BFBFBF"/>
+                      </a:solidFill>
+                    </a:lnL>
+                    <a:lnR w="9525">
+                      <a:solidFill>
+                        <a:srgbClr val="BFBFBF"/>
+                      </a:solidFill>
+                    </a:lnR>
+                    <a:lnT w="9525">
+                      <a:solidFill>
+                        <a:srgbClr val="BFBFBF"/>
+                      </a:solidFill>
+                    </a:lnT>
+                    <a:lnB w="9525">
+                      <a:solidFill>
+                        <a:srgbClr val="BFBFBF"/>
+                      </a:solidFill>
+                    </a:lnB>
+                  </a:tcPr>
+                </a:tc>
+                <a:tc>
+                  <a:txBody>
+                    <a:bodyPr/>
+                    <a:lstStyle/>
                     <a:p>
                       <a:pPr>
                         <a:buNone/>
@@ -15451,35 +16325,6 @@
                       </a:r>
                       <a:endParaRPr lang="en-US" sz="1200" dirty="0"/>
                     </a:p>
-                  </a:txBody>
-                  <a:tcPr>
-                    <a:lnL w="9525">
-                      <a:solidFill>
-                        <a:srgbClr val="BFBFBF"/>
-                      </a:solidFill>
-                    </a:lnL>
-                    <a:lnR w="9525">
-                      <a:solidFill>
-                        <a:srgbClr val="BFBFBF"/>
-                      </a:solidFill>
-                    </a:lnR>
-                    <a:lnT w="9525">
-                      <a:solidFill>
-                        <a:srgbClr val="BFBFBF"/>
-                      </a:solidFill>
-                    </a:lnT>
-                    <a:lnB w="9525">
-                      <a:solidFill>
-                        <a:srgbClr val="BFBFBF"/>
-                      </a:solidFill>
-                    </a:lnB>
-                  </a:tcPr>
-                </a:tc>
-                <a:tc>
-                  <a:txBody>
-                    <a:bodyPr/>
-                    <a:lstStyle/>
-                    <a:p/>
                   </a:txBody>
                   <a:tcPr>
                     <a:lnL w="9525">

--- a/test/generator/baseline/gen.xlsx.to.pptx.pptx
+++ b/test/generator/baseline/gen.xlsx.to.pptx.pptx
@@ -23,6 +23,7 @@
     <p:sldId id="271" r:id="rId17"/>
     <p:sldId id="272" r:id="rId18"/>
     <p:sldId id="273" r:id="rId19"/>
+    <p:sldId id="274" r:id="rId20"/>
   </p:sldIdLst>
   <p:sldSz cx="9144000" cy="5143500"/>
   <p:notesSz cx="6858000" cy="9144000"/>
@@ -4111,7 +4112,7 @@
       </p:sp>
       <p:pic>
         <p:nvPicPr>
-          <p:cNvPr id="3" name="Picture 3"/>
+          <p:cNvPr id="3" name="Picture 3" descr="165 Inspirational Quotes To Keep You Motivated In Life"/>
           <p:cNvPicPr>
             <a:picLocks noChangeAspect="1"/>
           </p:cNvPicPr>
@@ -4188,885 +4189,36 @@
             </a:pPr>
             <a:r>
               <a:rPr lang="en-US" sz="2800" b="1" dirty="0"/>
-              <a:t>Sheet8</a:t>
+              <a:t>Sheet7</a:t>
             </a:r>
             <a:endParaRPr lang="en-US" sz="2800" dirty="0"/>
           </a:p>
         </p:txBody>
       </p:sp>
-      <p:graphicFrame>
-        <p:nvGraphicFramePr>
-          <p:cNvPr id="3" name="Table 3"/>
-          <p:cNvGraphicFramePr>
-            <a:graphicFrameLocks noGrp="1"/>
-          </p:cNvGraphicFramePr>
+      <p:pic>
+        <p:nvPicPr>
+          <p:cNvPr id="3" name="Picture 3" descr="165 Inspirational Quotes To Keep You Motivated In Life"/>
+          <p:cNvPicPr>
+            <a:picLocks noChangeAspect="1"/>
+          </p:cNvPicPr>
           <p:nvPr/>
-        </p:nvGraphicFramePr>
-        <p:xfrm>
-          <a:off x="457200" y="1143000"/>
-          <a:ext cx="8229600" cy="3683000"/>
-        </p:xfrm>
-        <a:graphic>
-          <a:graphicData uri="http://schemas.openxmlformats.org/drawingml/2006/table">
-            <a:tbl>
-              <a:tblPr firstRow="1"/>
-              <a:tblGrid>
-                <a:gridCol w="4114800"/>
-                <a:gridCol w="4114800"/>
-              </a:tblGrid>
-              <a:tr h="334818">
-                <a:tc>
-                  <a:txBody>
-                    <a:bodyPr/>
-                    <a:lstStyle/>
-                    <a:p>
-                      <a:pPr>
-                        <a:buNone/>
-                      </a:pPr>
-                      <a:r>
-                        <a:rPr lang="en-US" sz="1400" b="1" dirty="0">
-                          <a:solidFill>
-                            <a:srgbClr val="365F91"/>
-                          </a:solidFill>
-                          <a:latin typeface="Ubuntu"/>
-                        </a:rPr>
-                        <a:t>Lists </a:t>
-                      </a:r>
-                      <a:endParaRPr lang="en-US" sz="1400" dirty="0"/>
-                    </a:p>
-                  </a:txBody>
-                  <a:tcPr>
-                    <a:lnL w="9525">
-                      <a:solidFill>
-                        <a:srgbClr val="BFBFBF"/>
-                      </a:solidFill>
-                    </a:lnL>
-                    <a:lnR w="9525">
-                      <a:solidFill>
-                        <a:srgbClr val="BFBFBF"/>
-                      </a:solidFill>
-                    </a:lnR>
-                    <a:lnT w="9525">
-                      <a:solidFill>
-                        <a:srgbClr val="BFBFBF"/>
-                      </a:solidFill>
-                    </a:lnT>
-                    <a:lnB w="9525">
-                      <a:solidFill>
-                        <a:srgbClr val="BFBFBF"/>
-                      </a:solidFill>
-                    </a:lnB>
-                  </a:tcPr>
-                </a:tc>
-                <a:tc>
-                  <a:txBody>
-                    <a:bodyPr/>
-                    <a:lstStyle/>
-                    <a:p/>
-                  </a:txBody>
-                  <a:tcPr>
-                    <a:lnL w="9525">
-                      <a:solidFill>
-                        <a:srgbClr val="BFBFBF"/>
-                      </a:solidFill>
-                    </a:lnL>
-                    <a:lnR w="9525">
-                      <a:solidFill>
-                        <a:srgbClr val="BFBFBF"/>
-                      </a:solidFill>
-                    </a:lnR>
-                    <a:lnT w="9525">
-                      <a:solidFill>
-                        <a:srgbClr val="BFBFBF"/>
-                      </a:solidFill>
-                    </a:lnT>
-                    <a:lnB w="9525">
-                      <a:solidFill>
-                        <a:srgbClr val="BFBFBF"/>
-                      </a:solidFill>
-                    </a:lnB>
-                  </a:tcPr>
-                </a:tc>
-              </a:tr>
-              <a:tr h="334818">
-                <a:tc>
-                  <a:txBody>
-                    <a:bodyPr/>
-                    <a:lstStyle/>
-                    <a:p>
-                      <a:pPr>
-                        <a:buNone/>
-                      </a:pPr>
-                      <a:r>
-                        <a:rPr lang="en-US" sz="1200" dirty="0">
-                          <a:latin typeface="Ubuntu"/>
-                        </a:rPr>
-                        <a:t>All types of lists are supported by the conversion, with the exception of lists that use fancy bullets, these get converted to regular bullets. </a:t>
-                      </a:r>
-                      <a:endParaRPr lang="en-US" sz="1200" dirty="0"/>
-                    </a:p>
-                  </a:txBody>
-                  <a:tcPr>
-                    <a:lnL w="9525">
-                      <a:solidFill>
-                        <a:srgbClr val="BFBFBF"/>
-                      </a:solidFill>
-                    </a:lnL>
-                    <a:lnR w="9525">
-                      <a:solidFill>
-                        <a:srgbClr val="BFBFBF"/>
-                      </a:solidFill>
-                    </a:lnR>
-                    <a:lnT w="9525">
-                      <a:solidFill>
-                        <a:srgbClr val="BFBFBF"/>
-                      </a:solidFill>
-                    </a:lnT>
-                    <a:lnB w="9525">
-                      <a:solidFill>
-                        <a:srgbClr val="BFBFBF"/>
-                      </a:solidFill>
-                    </a:lnB>
-                  </a:tcPr>
-                </a:tc>
-                <a:tc>
-                  <a:txBody>
-                    <a:bodyPr/>
-                    <a:lstStyle/>
-                    <a:p/>
-                  </a:txBody>
-                  <a:tcPr>
-                    <a:lnL w="9525">
-                      <a:solidFill>
-                        <a:srgbClr val="BFBFBF"/>
-                      </a:solidFill>
-                    </a:lnL>
-                    <a:lnR w="9525">
-                      <a:solidFill>
-                        <a:srgbClr val="BFBFBF"/>
-                      </a:solidFill>
-                    </a:lnR>
-                    <a:lnT w="9525">
-                      <a:solidFill>
-                        <a:srgbClr val="BFBFBF"/>
-                      </a:solidFill>
-                    </a:lnT>
-                    <a:lnB w="9525">
-                      <a:solidFill>
-                        <a:srgbClr val="BFBFBF"/>
-                      </a:solidFill>
-                    </a:lnB>
-                  </a:tcPr>
-                </a:tc>
-              </a:tr>
-              <a:tr h="334818">
-                <a:tc>
-                  <a:txBody>
-                    <a:bodyPr/>
-                    <a:lstStyle/>
-                    <a:p>
-                      <a:pPr>
-                        <a:buNone/>
-                      </a:pPr>
-                      <a:r>
-                        <a:rPr lang="en-US" sz="1300" b="1" dirty="0">
-                          <a:solidFill>
-                            <a:srgbClr val="4F81BD"/>
-                          </a:solidFill>
-                          <a:latin typeface="Ubuntu"/>
-                        </a:rPr>
-                        <a:t>Bulleted List </a:t>
-                      </a:r>
-                      <a:endParaRPr lang="en-US" sz="1300" dirty="0"/>
-                    </a:p>
-                  </a:txBody>
-                  <a:tcPr>
-                    <a:lnL w="9525">
-                      <a:solidFill>
-                        <a:srgbClr val="BFBFBF"/>
-                      </a:solidFill>
-                    </a:lnL>
-                    <a:lnR w="9525">
-                      <a:solidFill>
-                        <a:srgbClr val="BFBFBF"/>
-                      </a:solidFill>
-                    </a:lnR>
-                    <a:lnT w="9525">
-                      <a:solidFill>
-                        <a:srgbClr val="BFBFBF"/>
-                      </a:solidFill>
-                    </a:lnT>
-                    <a:lnB w="9525">
-                      <a:solidFill>
-                        <a:srgbClr val="BFBFBF"/>
-                      </a:solidFill>
-                    </a:lnB>
-                  </a:tcPr>
-                </a:tc>
-                <a:tc>
-                  <a:txBody>
-                    <a:bodyPr/>
-                    <a:lstStyle/>
-                    <a:p/>
-                  </a:txBody>
-                  <a:tcPr>
-                    <a:lnL w="9525">
-                      <a:solidFill>
-                        <a:srgbClr val="BFBFBF"/>
-                      </a:solidFill>
-                    </a:lnL>
-                    <a:lnR w="9525">
-                      <a:solidFill>
-                        <a:srgbClr val="BFBFBF"/>
-                      </a:solidFill>
-                    </a:lnR>
-                    <a:lnT w="9525">
-                      <a:solidFill>
-                        <a:srgbClr val="BFBFBF"/>
-                      </a:solidFill>
-                    </a:lnT>
-                    <a:lnB w="9525">
-                      <a:solidFill>
-                        <a:srgbClr val="BFBFBF"/>
-                      </a:solidFill>
-                    </a:lnB>
-                  </a:tcPr>
-                </a:tc>
-              </a:tr>
-              <a:tr h="334818">
-                <a:tc>
-                  <a:txBody>
-                    <a:bodyPr/>
-                    <a:lstStyle/>
-                    <a:p>
-                      <a:pPr>
-                        <a:buNone/>
-                      </a:pPr>
-                      <a:r>
-                        <a:rPr lang="en-US" sz="1200" dirty="0">
-                          <a:latin typeface="Ubuntu"/>
-                        </a:rPr>
-                        <a:t>One </a:t>
-                      </a:r>
-                      <a:endParaRPr lang="en-US" sz="1200" dirty="0"/>
-                    </a:p>
-                  </a:txBody>
-                  <a:tcPr>
-                    <a:lnL w="9525">
-                      <a:solidFill>
-                        <a:srgbClr val="BFBFBF"/>
-                      </a:solidFill>
-                    </a:lnL>
-                    <a:lnR w="9525">
-                      <a:solidFill>
-                        <a:srgbClr val="BFBFBF"/>
-                      </a:solidFill>
-                    </a:lnR>
-                    <a:lnT w="9525">
-                      <a:solidFill>
-                        <a:srgbClr val="BFBFBF"/>
-                      </a:solidFill>
-                    </a:lnT>
-                    <a:lnB w="9525">
-                      <a:solidFill>
-                        <a:srgbClr val="BFBFBF"/>
-                      </a:solidFill>
-                    </a:lnB>
-                  </a:tcPr>
-                </a:tc>
-                <a:tc>
-                  <a:txBody>
-                    <a:bodyPr/>
-                    <a:lstStyle/>
-                    <a:p/>
-                  </a:txBody>
-                  <a:tcPr>
-                    <a:lnL w="9525">
-                      <a:solidFill>
-                        <a:srgbClr val="BFBFBF"/>
-                      </a:solidFill>
-                    </a:lnL>
-                    <a:lnR w="9525">
-                      <a:solidFill>
-                        <a:srgbClr val="BFBFBF"/>
-                      </a:solidFill>
-                    </a:lnR>
-                    <a:lnT w="9525">
-                      <a:solidFill>
-                        <a:srgbClr val="BFBFBF"/>
-                      </a:solidFill>
-                    </a:lnT>
-                    <a:lnB w="9525">
-                      <a:solidFill>
-                        <a:srgbClr val="BFBFBF"/>
-                      </a:solidFill>
-                    </a:lnB>
-                  </a:tcPr>
-                </a:tc>
-              </a:tr>
-              <a:tr h="334818">
-                <a:tc>
-                  <a:txBody>
-                    <a:bodyPr/>
-                    <a:lstStyle/>
-                    <a:p>
-                      <a:pPr>
-                        <a:buNone/>
-                      </a:pPr>
-                      <a:r>
-                        <a:rPr lang="en-US" sz="1200" dirty="0">
-                          <a:latin typeface="Ubuntu"/>
-                        </a:rPr>
-                        <a:t>Two </a:t>
-                      </a:r>
-                      <a:endParaRPr lang="en-US" sz="1200" dirty="0"/>
-                    </a:p>
-                  </a:txBody>
-                  <a:tcPr>
-                    <a:lnL w="9525">
-                      <a:solidFill>
-                        <a:srgbClr val="BFBFBF"/>
-                      </a:solidFill>
-                    </a:lnL>
-                    <a:lnR w="9525">
-                      <a:solidFill>
-                        <a:srgbClr val="BFBFBF"/>
-                      </a:solidFill>
-                    </a:lnR>
-                    <a:lnT w="9525">
-                      <a:solidFill>
-                        <a:srgbClr val="BFBFBF"/>
-                      </a:solidFill>
-                    </a:lnT>
-                    <a:lnB w="9525">
-                      <a:solidFill>
-                        <a:srgbClr val="BFBFBF"/>
-                      </a:solidFill>
-                    </a:lnB>
-                  </a:tcPr>
-                </a:tc>
-                <a:tc>
-                  <a:txBody>
-                    <a:bodyPr/>
-                    <a:lstStyle/>
-                    <a:p/>
-                  </a:txBody>
-                  <a:tcPr>
-                    <a:lnL w="9525">
-                      <a:solidFill>
-                        <a:srgbClr val="BFBFBF"/>
-                      </a:solidFill>
-                    </a:lnL>
-                    <a:lnR w="9525">
-                      <a:solidFill>
-                        <a:srgbClr val="BFBFBF"/>
-                      </a:solidFill>
-                    </a:lnR>
-                    <a:lnT w="9525">
-                      <a:solidFill>
-                        <a:srgbClr val="BFBFBF"/>
-                      </a:solidFill>
-                    </a:lnT>
-                    <a:lnB w="9525">
-                      <a:solidFill>
-                        <a:srgbClr val="BFBFBF"/>
-                      </a:solidFill>
-                    </a:lnB>
-                  </a:tcPr>
-                </a:tc>
-              </a:tr>
-              <a:tr h="334818">
-                <a:tc>
-                  <a:txBody>
-                    <a:bodyPr/>
-                    <a:lstStyle/>
-                    <a:p>
-                      <a:pPr>
-                        <a:buNone/>
-                      </a:pPr>
-                      <a:r>
-                        <a:rPr lang="en-US" sz="1300" b="1" dirty="0">
-                          <a:solidFill>
-                            <a:srgbClr val="4F81BD"/>
-                          </a:solidFill>
-                          <a:latin typeface="Ubuntu"/>
-                        </a:rPr>
-                        <a:t>Numbered List </a:t>
-                      </a:r>
-                      <a:endParaRPr lang="en-US" sz="1300" dirty="0"/>
-                    </a:p>
-                  </a:txBody>
-                  <a:tcPr>
-                    <a:lnL w="9525">
-                      <a:solidFill>
-                        <a:srgbClr val="BFBFBF"/>
-                      </a:solidFill>
-                    </a:lnL>
-                    <a:lnR w="9525">
-                      <a:solidFill>
-                        <a:srgbClr val="BFBFBF"/>
-                      </a:solidFill>
-                    </a:lnR>
-                    <a:lnT w="9525">
-                      <a:solidFill>
-                        <a:srgbClr val="BFBFBF"/>
-                      </a:solidFill>
-                    </a:lnT>
-                    <a:lnB w="9525">
-                      <a:solidFill>
-                        <a:srgbClr val="BFBFBF"/>
-                      </a:solidFill>
-                    </a:lnB>
-                  </a:tcPr>
-                </a:tc>
-                <a:tc>
-                  <a:txBody>
-                    <a:bodyPr/>
-                    <a:lstStyle/>
-                    <a:p/>
-                  </a:txBody>
-                  <a:tcPr>
-                    <a:lnL w="9525">
-                      <a:solidFill>
-                        <a:srgbClr val="BFBFBF"/>
-                      </a:solidFill>
-                    </a:lnL>
-                    <a:lnR w="9525">
-                      <a:solidFill>
-                        <a:srgbClr val="BFBFBF"/>
-                      </a:solidFill>
-                    </a:lnR>
-                    <a:lnT w="9525">
-                      <a:solidFill>
-                        <a:srgbClr val="BFBFBF"/>
-                      </a:solidFill>
-                    </a:lnT>
-                    <a:lnB w="9525">
-                      <a:solidFill>
-                        <a:srgbClr val="BFBFBF"/>
-                      </a:solidFill>
-                    </a:lnB>
-                  </a:tcPr>
-                </a:tc>
-              </a:tr>
-              <a:tr h="334818">
-                <a:tc>
-                  <a:txBody>
-                    <a:bodyPr/>
-                    <a:lstStyle/>
-                    <a:p>
-                      <a:pPr>
-                        <a:buNone/>
-                      </a:pPr>
-                      <a:r>
-                        <a:rPr lang="en-US" sz="1200" dirty="0">
-                          <a:solidFill>
-                            <a:srgbClr val="000000"/>
-                          </a:solidFill>
-                          <a:latin typeface="Ubuntu"/>
-                        </a:rPr>
-                        <a:t>1</a:t>
-                      </a:r>
-                      <a:endParaRPr lang="en-US" sz="1200" dirty="0"/>
-                    </a:p>
-                  </a:txBody>
-                  <a:tcPr>
-                    <a:lnL w="9525">
-                      <a:solidFill>
-                        <a:srgbClr val="BFBFBF"/>
-                      </a:solidFill>
-                    </a:lnL>
-                    <a:lnR w="9525">
-                      <a:solidFill>
-                        <a:srgbClr val="BFBFBF"/>
-                      </a:solidFill>
-                    </a:lnR>
-                    <a:lnT w="9525">
-                      <a:solidFill>
-                        <a:srgbClr val="BFBFBF"/>
-                      </a:solidFill>
-                    </a:lnT>
-                    <a:lnB w="9525">
-                      <a:solidFill>
-                        <a:srgbClr val="BFBFBF"/>
-                      </a:solidFill>
-                    </a:lnB>
-                  </a:tcPr>
-                </a:tc>
-                <a:tc>
-                  <a:txBody>
-                    <a:bodyPr/>
-                    <a:lstStyle/>
-                    <a:p>
-                      <a:pPr>
-                        <a:buNone/>
-                      </a:pPr>
-                      <a:r>
-                        <a:rPr lang="en-US" sz="1200" dirty="0">
-                          <a:latin typeface="Ubuntu"/>
-                        </a:rPr>
-                        <a:t>One, with a very long line to demonstrate that the hanging indent for the list is working correctly </a:t>
-                      </a:r>
-                      <a:endParaRPr lang="en-US" sz="1200" dirty="0"/>
-                    </a:p>
-                  </a:txBody>
-                  <a:tcPr>
-                    <a:lnL w="9525">
-                      <a:solidFill>
-                        <a:srgbClr val="BFBFBF"/>
-                      </a:solidFill>
-                    </a:lnL>
-                    <a:lnR w="9525">
-                      <a:solidFill>
-                        <a:srgbClr val="BFBFBF"/>
-                      </a:solidFill>
-                    </a:lnR>
-                    <a:lnT w="9525">
-                      <a:solidFill>
-                        <a:srgbClr val="BFBFBF"/>
-                      </a:solidFill>
-                    </a:lnT>
-                    <a:lnB w="9525">
-                      <a:solidFill>
-                        <a:srgbClr val="BFBFBF"/>
-                      </a:solidFill>
-                    </a:lnB>
-                  </a:tcPr>
-                </a:tc>
-              </a:tr>
-              <a:tr h="334818">
-                <a:tc>
-                  <a:txBody>
-                    <a:bodyPr/>
-                    <a:lstStyle/>
-                    <a:p>
-                      <a:pPr>
-                        <a:buNone/>
-                      </a:pPr>
-                      <a:r>
-                        <a:rPr lang="en-US" sz="1200" dirty="0">
-                          <a:solidFill>
-                            <a:srgbClr val="000000"/>
-                          </a:solidFill>
-                          <a:latin typeface="Ubuntu"/>
-                        </a:rPr>
-                        <a:t>2</a:t>
-                      </a:r>
-                      <a:endParaRPr lang="en-US" sz="1200" dirty="0"/>
-                    </a:p>
-                  </a:txBody>
-                  <a:tcPr>
-                    <a:lnL w="9525">
-                      <a:solidFill>
-                        <a:srgbClr val="BFBFBF"/>
-                      </a:solidFill>
-                    </a:lnL>
-                    <a:lnR w="9525">
-                      <a:solidFill>
-                        <a:srgbClr val="BFBFBF"/>
-                      </a:solidFill>
-                    </a:lnR>
-                    <a:lnT w="9525">
-                      <a:solidFill>
-                        <a:srgbClr val="BFBFBF"/>
-                      </a:solidFill>
-                    </a:lnT>
-                    <a:lnB w="9525">
-                      <a:solidFill>
-                        <a:srgbClr val="BFBFBF"/>
-                      </a:solidFill>
-                    </a:lnB>
-                  </a:tcPr>
-                </a:tc>
-                <a:tc>
-                  <a:txBody>
-                    <a:bodyPr/>
-                    <a:lstStyle/>
-                    <a:p>
-                      <a:pPr>
-                        <a:buNone/>
-                      </a:pPr>
-                      <a:r>
-                        <a:rPr lang="en-US" sz="1200" dirty="0">
-                          <a:latin typeface="Ubuntu"/>
-                        </a:rPr>
-                        <a:t>Two </a:t>
-                      </a:r>
-                      <a:endParaRPr lang="en-US" sz="1200" dirty="0"/>
-                    </a:p>
-                  </a:txBody>
-                  <a:tcPr>
-                    <a:lnL w="9525">
-                      <a:solidFill>
-                        <a:srgbClr val="BFBFBF"/>
-                      </a:solidFill>
-                    </a:lnL>
-                    <a:lnR w="9525">
-                      <a:solidFill>
-                        <a:srgbClr val="BFBFBF"/>
-                      </a:solidFill>
-                    </a:lnR>
-                    <a:lnT w="9525">
-                      <a:solidFill>
-                        <a:srgbClr val="BFBFBF"/>
-                      </a:solidFill>
-                    </a:lnT>
-                    <a:lnB w="9525">
-                      <a:solidFill>
-                        <a:srgbClr val="BFBFBF"/>
-                      </a:solidFill>
-                    </a:lnB>
-                  </a:tcPr>
-                </a:tc>
-              </a:tr>
-              <a:tr h="334818">
-                <a:tc>
-                  <a:txBody>
-                    <a:bodyPr/>
-                    <a:lstStyle/>
-                    <a:p>
-                      <a:pPr>
-                        <a:buNone/>
-                      </a:pPr>
-                      <a:r>
-                        <a:rPr lang="en-US" sz="1300" b="1" dirty="0">
-                          <a:solidFill>
-                            <a:srgbClr val="4F81BD"/>
-                          </a:solidFill>
-                          <a:latin typeface="Ubuntu"/>
-                        </a:rPr>
-                        <a:t>Multi-level Lists </a:t>
-                      </a:r>
-                      <a:endParaRPr lang="en-US" sz="1300" dirty="0"/>
-                    </a:p>
-                  </a:txBody>
-                  <a:tcPr>
-                    <a:lnL w="9525">
-                      <a:solidFill>
-                        <a:srgbClr val="BFBFBF"/>
-                      </a:solidFill>
-                    </a:lnL>
-                    <a:lnR w="9525">
-                      <a:solidFill>
-                        <a:srgbClr val="BFBFBF"/>
-                      </a:solidFill>
-                    </a:lnR>
-                    <a:lnT w="9525">
-                      <a:solidFill>
-                        <a:srgbClr val="BFBFBF"/>
-                      </a:solidFill>
-                    </a:lnT>
-                    <a:lnB w="9525">
-                      <a:solidFill>
-                        <a:srgbClr val="BFBFBF"/>
-                      </a:solidFill>
-                    </a:lnB>
-                  </a:tcPr>
-                </a:tc>
-                <a:tc>
-                  <a:txBody>
-                    <a:bodyPr/>
-                    <a:lstStyle/>
-                    <a:p/>
-                  </a:txBody>
-                  <a:tcPr>
-                    <a:lnL w="9525">
-                      <a:solidFill>
-                        <a:srgbClr val="BFBFBF"/>
-                      </a:solidFill>
-                    </a:lnL>
-                    <a:lnR w="9525">
-                      <a:solidFill>
-                        <a:srgbClr val="BFBFBF"/>
-                      </a:solidFill>
-                    </a:lnR>
-                    <a:lnT w="9525">
-                      <a:solidFill>
-                        <a:srgbClr val="BFBFBF"/>
-                      </a:solidFill>
-                    </a:lnT>
-                    <a:lnB w="9525">
-                      <a:solidFill>
-                        <a:srgbClr val="BFBFBF"/>
-                      </a:solidFill>
-                    </a:lnB>
-                  </a:tcPr>
-                </a:tc>
-              </a:tr>
-              <a:tr h="334818">
-                <a:tc>
-                  <a:txBody>
-                    <a:bodyPr/>
-                    <a:lstStyle/>
-                    <a:p>
-                      <a:pPr>
-                        <a:buNone/>
-                      </a:pPr>
-                      <a:r>
-                        <a:rPr lang="en-US" sz="1200" dirty="0">
-                          <a:solidFill>
-                            <a:srgbClr val="000000"/>
-                          </a:solidFill>
-                          <a:latin typeface="Ubuntu"/>
-                        </a:rPr>
-                        <a:t>1</a:t>
-                      </a:r>
-                      <a:endParaRPr lang="en-US" sz="1200" dirty="0"/>
-                    </a:p>
-                  </a:txBody>
-                  <a:tcPr>
-                    <a:lnL w="9525">
-                      <a:solidFill>
-                        <a:srgbClr val="BFBFBF"/>
-                      </a:solidFill>
-                    </a:lnL>
-                    <a:lnR w="9525">
-                      <a:solidFill>
-                        <a:srgbClr val="BFBFBF"/>
-                      </a:solidFill>
-                    </a:lnR>
-                    <a:lnT w="9525">
-                      <a:solidFill>
-                        <a:srgbClr val="BFBFBF"/>
-                      </a:solidFill>
-                    </a:lnT>
-                    <a:lnB w="9525">
-                      <a:solidFill>
-                        <a:srgbClr val="BFBFBF"/>
-                      </a:solidFill>
-                    </a:lnB>
-                  </a:tcPr>
-                </a:tc>
-                <a:tc>
-                  <a:txBody>
-                    <a:bodyPr/>
-                    <a:lstStyle/>
-                    <a:p>
-                      <a:pPr>
-                        <a:buNone/>
-                      </a:pPr>
-                      <a:r>
-                        <a:rPr lang="en-US" sz="1200" dirty="0">
-                          <a:latin typeface="Ubuntu"/>
-                        </a:rPr>
-                        <a:t>One </a:t>
-                      </a:r>
-                      <a:endParaRPr lang="en-US" sz="1200" dirty="0"/>
-                    </a:p>
-                  </a:txBody>
-                  <a:tcPr>
-                    <a:lnL w="9525">
-                      <a:solidFill>
-                        <a:srgbClr val="BFBFBF"/>
-                      </a:solidFill>
-                    </a:lnL>
-                    <a:lnR w="9525">
-                      <a:solidFill>
-                        <a:srgbClr val="BFBFBF"/>
-                      </a:solidFill>
-                    </a:lnR>
-                    <a:lnT w="9525">
-                      <a:solidFill>
-                        <a:srgbClr val="BFBFBF"/>
-                      </a:solidFill>
-                    </a:lnT>
-                    <a:lnB w="9525">
-                      <a:solidFill>
-                        <a:srgbClr val="BFBFBF"/>
-                      </a:solidFill>
-                    </a:lnB>
-                  </a:tcPr>
-                </a:tc>
-              </a:tr>
-              <a:tr h="334818">
-                <a:tc>
-                  <a:txBody>
-                    <a:bodyPr/>
-                    <a:lstStyle/>
-                    <a:p>
-                      <a:pPr>
-                        <a:buNone/>
-                      </a:pPr>
-                      <a:r>
-                        <a:rPr lang="en-US" sz="1200" dirty="0">
-                          <a:solidFill>
-                            <a:srgbClr val="000000"/>
-                          </a:solidFill>
-                          <a:latin typeface="Ubuntu"/>
-                        </a:rPr>
-                        <a:t>1</a:t>
-                      </a:r>
-                      <a:endParaRPr lang="en-US" sz="1200" dirty="0"/>
-                    </a:p>
-                  </a:txBody>
-                  <a:tcPr>
-                    <a:lnL w="9525">
-                      <a:solidFill>
-                        <a:srgbClr val="BFBFBF"/>
-                      </a:solidFill>
-                    </a:lnL>
-                    <a:lnR w="9525">
-                      <a:solidFill>
-                        <a:srgbClr val="BFBFBF"/>
-                      </a:solidFill>
-                    </a:lnR>
-                    <a:lnT w="9525">
-                      <a:solidFill>
-                        <a:srgbClr val="BFBFBF"/>
-                      </a:solidFill>
-                    </a:lnT>
-                    <a:lnB w="9525">
-                      <a:solidFill>
-                        <a:srgbClr val="BFBFBF"/>
-                      </a:solidFill>
-                    </a:lnB>
-                  </a:tcPr>
-                </a:tc>
-                <a:tc>
-                  <a:txBody>
-                    <a:bodyPr/>
-                    <a:lstStyle/>
-                    <a:p>
-                      <a:pPr>
-                        <a:buNone/>
-                      </a:pPr>
-                      <a:r>
-                        <a:rPr lang="en-US" sz="1200" dirty="0">
-                          <a:latin typeface="Ubuntu"/>
-                        </a:rPr>
-                        <a:t>Two </a:t>
-                      </a:r>
-                      <a:endParaRPr lang="en-US" sz="1200" dirty="0"/>
-                    </a:p>
-                  </a:txBody>
-                  <a:tcPr>
-                    <a:lnL w="9525">
-                      <a:solidFill>
-                        <a:srgbClr val="BFBFBF"/>
-                      </a:solidFill>
-                    </a:lnL>
-                    <a:lnR w="9525">
-                      <a:solidFill>
-                        <a:srgbClr val="BFBFBF"/>
-                      </a:solidFill>
-                    </a:lnR>
-                    <a:lnT w="9525">
-                      <a:solidFill>
-                        <a:srgbClr val="BFBFBF"/>
-                      </a:solidFill>
-                    </a:lnT>
-                    <a:lnB w="9525">
-                      <a:solidFill>
-                        <a:srgbClr val="BFBFBF"/>
-                      </a:solidFill>
-                    </a:lnB>
-                  </a:tcPr>
-                </a:tc>
-              </a:tr>
-            </a:tbl>
-          </a:graphicData>
-        </a:graphic>
-      </p:graphicFrame>
+        </p:nvPicPr>
+        <p:blipFill>
+          <a:blip r:embed="rId2"/>
+          <a:stretch>
+            <a:fillRect/>
+          </a:stretch>
+        </p:blipFill>
+        <p:spPr>
+          <a:xfrm>
+            <a:off x="2730500" y="1143000"/>
+            <a:ext cx="3683000" cy="3683000"/>
+          </a:xfrm>
+          <a:prstGeom prst="rect">
+            <a:avLst/>
+          </a:prstGeom>
+        </p:spPr>
+      </p:pic>
     </p:spTree>
   </p:cSld>
   <p:clrMapOvr>
@@ -5233,55 +4385,41 @@
                       </a:pPr>
                       <a:r>
                         <a:rPr lang="en-US" sz="1200" dirty="0">
-                          <a:solidFill>
-                            <a:srgbClr val="000000"/>
-                          </a:solidFill>
-                          <a:latin typeface="Ubuntu"/>
-                        </a:rPr>
-                        <a:t>1</a:t>
-                      </a:r>
-                      <a:endParaRPr lang="en-US" sz="1200" dirty="0"/>
-                    </a:p>
-                  </a:txBody>
-                  <a:tcPr>
-                    <a:lnL w="9525">
-                      <a:solidFill>
-                        <a:srgbClr val="BFBFBF"/>
-                      </a:solidFill>
-                    </a:lnL>
-                    <a:lnR w="9525">
-                      <a:solidFill>
-                        <a:srgbClr val="BFBFBF"/>
-                      </a:solidFill>
-                    </a:lnR>
-                    <a:lnT w="9525">
-                      <a:solidFill>
-                        <a:srgbClr val="BFBFBF"/>
-                      </a:solidFill>
-                    </a:lnT>
-                    <a:lnB w="9525">
-                      <a:solidFill>
-                        <a:srgbClr val="BFBFBF"/>
-                      </a:solidFill>
-                    </a:lnB>
-                  </a:tcPr>
-                </a:tc>
-                <a:tc>
-                  <a:txBody>
-                    <a:bodyPr/>
-                    <a:lstStyle/>
-                    <a:p>
-                      <a:pPr>
-                        <a:buNone/>
-                      </a:pPr>
-                      <a:r>
-                        <a:rPr lang="en-US" sz="1200" dirty="0">
-                          <a:latin typeface="Ubuntu"/>
-                        </a:rPr>
-                        <a:t>Three </a:t>
-                      </a:r>
-                      <a:endParaRPr lang="en-US" sz="1200" dirty="0"/>
-                    </a:p>
+                          <a:latin typeface="Ubuntu"/>
+                        </a:rPr>
+                        <a:t>All types of lists are supported by the conversion, with the exception of lists that use fancy bullets, these get converted to regular bullets. </a:t>
+                      </a:r>
+                      <a:endParaRPr lang="en-US" sz="1200" dirty="0"/>
+                    </a:p>
+                  </a:txBody>
+                  <a:tcPr>
+                    <a:lnL w="9525">
+                      <a:solidFill>
+                        <a:srgbClr val="BFBFBF"/>
+                      </a:solidFill>
+                    </a:lnL>
+                    <a:lnR w="9525">
+                      <a:solidFill>
+                        <a:srgbClr val="BFBFBF"/>
+                      </a:solidFill>
+                    </a:lnR>
+                    <a:lnT w="9525">
+                      <a:solidFill>
+                        <a:srgbClr val="BFBFBF"/>
+                      </a:solidFill>
+                    </a:lnT>
+                    <a:lnB w="9525">
+                      <a:solidFill>
+                        <a:srgbClr val="BFBFBF"/>
+                      </a:solidFill>
+                    </a:lnB>
+                  </a:tcPr>
+                </a:tc>
+                <a:tc>
+                  <a:txBody>
+                    <a:bodyPr/>
+                    <a:lstStyle/>
+                    <a:p/>
                   </a:txBody>
                   <a:tcPr>
                     <a:lnL w="9525">
@@ -5317,56 +4455,45 @@
                         <a:buNone/>
                       </a:pPr>
                       <a:r>
-                        <a:rPr lang="en-US" sz="1200" dirty="0">
-                          <a:solidFill>
-                            <a:srgbClr val="000000"/>
-                          </a:solidFill>
-                          <a:latin typeface="Ubuntu"/>
-                        </a:rPr>
-                        <a:t>2</a:t>
-                      </a:r>
-                      <a:endParaRPr lang="en-US" sz="1200" dirty="0"/>
-                    </a:p>
-                  </a:txBody>
-                  <a:tcPr>
-                    <a:lnL w="9525">
-                      <a:solidFill>
-                        <a:srgbClr val="BFBFBF"/>
-                      </a:solidFill>
-                    </a:lnL>
-                    <a:lnR w="9525">
-                      <a:solidFill>
-                        <a:srgbClr val="BFBFBF"/>
-                      </a:solidFill>
-                    </a:lnR>
-                    <a:lnT w="9525">
-                      <a:solidFill>
-                        <a:srgbClr val="BFBFBF"/>
-                      </a:solidFill>
-                    </a:lnT>
-                    <a:lnB w="9525">
-                      <a:solidFill>
-                        <a:srgbClr val="BFBFBF"/>
-                      </a:solidFill>
-                    </a:lnB>
-                  </a:tcPr>
-                </a:tc>
-                <a:tc>
-                  <a:txBody>
-                    <a:bodyPr/>
-                    <a:lstStyle/>
-                    <a:p>
-                      <a:pPr>
-                        <a:buNone/>
-                      </a:pPr>
-                      <a:r>
-                        <a:rPr lang="en-US" sz="1200" dirty="0">
-                          <a:latin typeface="Ubuntu"/>
-                        </a:rPr>
-                        <a:t>Four with a very long line to demonstrate that the hanging indent for the list is working correctly. </a:t>
-                      </a:r>
-                      <a:endParaRPr lang="en-US" sz="1200" dirty="0"/>
-                    </a:p>
+                        <a:rPr lang="en-US" sz="1300" b="1" dirty="0">
+                          <a:solidFill>
+                            <a:srgbClr val="4F81BD"/>
+                          </a:solidFill>
+                          <a:latin typeface="Ubuntu"/>
+                        </a:rPr>
+                        <a:t>Bulleted List </a:t>
+                      </a:r>
+                      <a:endParaRPr lang="en-US" sz="1300" dirty="0"/>
+                    </a:p>
+                  </a:txBody>
+                  <a:tcPr>
+                    <a:lnL w="9525">
+                      <a:solidFill>
+                        <a:srgbClr val="BFBFBF"/>
+                      </a:solidFill>
+                    </a:lnL>
+                    <a:lnR w="9525">
+                      <a:solidFill>
+                        <a:srgbClr val="BFBFBF"/>
+                      </a:solidFill>
+                    </a:lnR>
+                    <a:lnT w="9525">
+                      <a:solidFill>
+                        <a:srgbClr val="BFBFBF"/>
+                      </a:solidFill>
+                    </a:lnT>
+                    <a:lnB w="9525">
+                      <a:solidFill>
+                        <a:srgbClr val="BFBFBF"/>
+                      </a:solidFill>
+                    </a:lnB>
+                  </a:tcPr>
+                </a:tc>
+                <a:tc>
+                  <a:txBody>
+                    <a:bodyPr/>
+                    <a:lstStyle/>
+                    <a:p/>
                   </a:txBody>
                   <a:tcPr>
                     <a:lnL w="9525">
@@ -5403,55 +4530,41 @@
                       </a:pPr>
                       <a:r>
                         <a:rPr lang="en-US" sz="1200" dirty="0">
-                          <a:solidFill>
-                            <a:srgbClr val="000000"/>
-                          </a:solidFill>
-                          <a:latin typeface="Ubuntu"/>
-                        </a:rPr>
-                        <a:t>3</a:t>
-                      </a:r>
-                      <a:endParaRPr lang="en-US" sz="1200" dirty="0"/>
-                    </a:p>
-                  </a:txBody>
-                  <a:tcPr>
-                    <a:lnL w="9525">
-                      <a:solidFill>
-                        <a:srgbClr val="BFBFBF"/>
-                      </a:solidFill>
-                    </a:lnL>
-                    <a:lnR w="9525">
-                      <a:solidFill>
-                        <a:srgbClr val="BFBFBF"/>
-                      </a:solidFill>
-                    </a:lnR>
-                    <a:lnT w="9525">
-                      <a:solidFill>
-                        <a:srgbClr val="BFBFBF"/>
-                      </a:solidFill>
-                    </a:lnT>
-                    <a:lnB w="9525">
-                      <a:solidFill>
-                        <a:srgbClr val="BFBFBF"/>
-                      </a:solidFill>
-                    </a:lnB>
-                  </a:tcPr>
-                </a:tc>
-                <a:tc>
-                  <a:txBody>
-                    <a:bodyPr/>
-                    <a:lstStyle/>
-                    <a:p>
-                      <a:pPr>
-                        <a:buNone/>
-                      </a:pPr>
-                      <a:r>
-                        <a:rPr lang="en-US" sz="1200" dirty="0">
-                          <a:latin typeface="Ubuntu"/>
-                        </a:rPr>
-                        <a:t>Five </a:t>
-                      </a:r>
-                      <a:endParaRPr lang="en-US" sz="1200" dirty="0"/>
-                    </a:p>
+                          <a:latin typeface="Ubuntu"/>
+                        </a:rPr>
+                        <a:t>One </a:t>
+                      </a:r>
+                      <a:endParaRPr lang="en-US" sz="1200" dirty="0"/>
+                    </a:p>
+                  </a:txBody>
+                  <a:tcPr>
+                    <a:lnL w="9525">
+                      <a:solidFill>
+                        <a:srgbClr val="BFBFBF"/>
+                      </a:solidFill>
+                    </a:lnL>
+                    <a:lnR w="9525">
+                      <a:solidFill>
+                        <a:srgbClr val="BFBFBF"/>
+                      </a:solidFill>
+                    </a:lnR>
+                    <a:lnT w="9525">
+                      <a:solidFill>
+                        <a:srgbClr val="BFBFBF"/>
+                      </a:solidFill>
+                    </a:lnT>
+                    <a:lnB w="9525">
+                      <a:solidFill>
+                        <a:srgbClr val="BFBFBF"/>
+                      </a:solidFill>
+                    </a:lnB>
+                  </a:tcPr>
+                </a:tc>
+                <a:tc>
+                  <a:txBody>
+                    <a:bodyPr/>
+                    <a:lstStyle/>
+                    <a:p/>
                   </a:txBody>
                   <a:tcPr>
                     <a:lnL w="9525">
@@ -5488,55 +4601,41 @@
                       </a:pPr>
                       <a:r>
                         <a:rPr lang="en-US" sz="1200" dirty="0">
-                          <a:solidFill>
-                            <a:srgbClr val="000000"/>
-                          </a:solidFill>
-                          <a:latin typeface="Ubuntu"/>
-                        </a:rPr>
-                        <a:t>2</a:t>
-                      </a:r>
-                      <a:endParaRPr lang="en-US" sz="1200" dirty="0"/>
-                    </a:p>
-                  </a:txBody>
-                  <a:tcPr>
-                    <a:lnL w="9525">
-                      <a:solidFill>
-                        <a:srgbClr val="BFBFBF"/>
-                      </a:solidFill>
-                    </a:lnL>
-                    <a:lnR w="9525">
-                      <a:solidFill>
-                        <a:srgbClr val="BFBFBF"/>
-                      </a:solidFill>
-                    </a:lnR>
-                    <a:lnT w="9525">
-                      <a:solidFill>
-                        <a:srgbClr val="BFBFBF"/>
-                      </a:solidFill>
-                    </a:lnT>
-                    <a:lnB w="9525">
-                      <a:solidFill>
-                        <a:srgbClr val="BFBFBF"/>
-                      </a:solidFill>
-                    </a:lnB>
-                  </a:tcPr>
-                </a:tc>
-                <a:tc>
-                  <a:txBody>
-                    <a:bodyPr/>
-                    <a:lstStyle/>
-                    <a:p>
-                      <a:pPr>
-                        <a:buNone/>
-                      </a:pPr>
-                      <a:r>
-                        <a:rPr lang="en-US" sz="1200" dirty="0">
-                          <a:latin typeface="Ubuntu"/>
-                        </a:rPr>
-                        <a:t>Six </a:t>
-                      </a:r>
-                      <a:endParaRPr lang="en-US" sz="1200" dirty="0"/>
-                    </a:p>
+                          <a:latin typeface="Ubuntu"/>
+                        </a:rPr>
+                        <a:t>Two </a:t>
+                      </a:r>
+                      <a:endParaRPr lang="en-US" sz="1200" dirty="0"/>
+                    </a:p>
+                  </a:txBody>
+                  <a:tcPr>
+                    <a:lnL w="9525">
+                      <a:solidFill>
+                        <a:srgbClr val="BFBFBF"/>
+                      </a:solidFill>
+                    </a:lnL>
+                    <a:lnR w="9525">
+                      <a:solidFill>
+                        <a:srgbClr val="BFBFBF"/>
+                      </a:solidFill>
+                    </a:lnR>
+                    <a:lnT w="9525">
+                      <a:solidFill>
+                        <a:srgbClr val="BFBFBF"/>
+                      </a:solidFill>
+                    </a:lnT>
+                    <a:lnB w="9525">
+                      <a:solidFill>
+                        <a:srgbClr val="BFBFBF"/>
+                      </a:solidFill>
+                    </a:lnB>
+                  </a:tcPr>
+                </a:tc>
+                <a:tc>
+                  <a:txBody>
+                    <a:bodyPr/>
+                    <a:lstStyle/>
+                    <a:p/>
                   </a:txBody>
                   <a:tcPr>
                     <a:lnL w="9525">
@@ -5572,12 +4671,15 @@
                         <a:buNone/>
                       </a:pPr>
                       <a:r>
-                        <a:rPr lang="en-US" sz="1200" dirty="0">
-                          <a:latin typeface="Ubuntu"/>
-                        </a:rPr>
-                        <a:t>A Multi-level list with bullets: </a:t>
-                      </a:r>
-                      <a:endParaRPr lang="en-US" sz="1200" dirty="0"/>
+                        <a:rPr lang="en-US" sz="1300" b="1" dirty="0">
+                          <a:solidFill>
+                            <a:srgbClr val="4F81BD"/>
+                          </a:solidFill>
+                          <a:latin typeface="Ubuntu"/>
+                        </a:rPr>
+                        <a:t>Numbered List </a:t>
+                      </a:r>
+                      <a:endParaRPr lang="en-US" sz="1300" dirty="0"/>
                     </a:p>
                   </a:txBody>
                   <a:tcPr>
@@ -5644,41 +4746,55 @@
                       </a:pPr>
                       <a:r>
                         <a:rPr lang="en-US" sz="1200" dirty="0">
-                          <a:latin typeface="Ubuntu"/>
-                        </a:rPr>
-                        <a:t>One </a:t>
-                      </a:r>
-                      <a:endParaRPr lang="en-US" sz="1200" dirty="0"/>
-                    </a:p>
-                  </a:txBody>
-                  <a:tcPr>
-                    <a:lnL w="9525">
-                      <a:solidFill>
-                        <a:srgbClr val="BFBFBF"/>
-                      </a:solidFill>
-                    </a:lnL>
-                    <a:lnR w="9525">
-                      <a:solidFill>
-                        <a:srgbClr val="BFBFBF"/>
-                      </a:solidFill>
-                    </a:lnR>
-                    <a:lnT w="9525">
-                      <a:solidFill>
-                        <a:srgbClr val="BFBFBF"/>
-                      </a:solidFill>
-                    </a:lnT>
-                    <a:lnB w="9525">
-                      <a:solidFill>
-                        <a:srgbClr val="BFBFBF"/>
-                      </a:solidFill>
-                    </a:lnB>
-                  </a:tcPr>
-                </a:tc>
-                <a:tc>
-                  <a:txBody>
-                    <a:bodyPr/>
-                    <a:lstStyle/>
-                    <a:p/>
+                          <a:solidFill>
+                            <a:srgbClr val="000000"/>
+                          </a:solidFill>
+                          <a:latin typeface="Ubuntu"/>
+                        </a:rPr>
+                        <a:t>1</a:t>
+                      </a:r>
+                      <a:endParaRPr lang="en-US" sz="1200" dirty="0"/>
+                    </a:p>
+                  </a:txBody>
+                  <a:tcPr>
+                    <a:lnL w="9525">
+                      <a:solidFill>
+                        <a:srgbClr val="BFBFBF"/>
+                      </a:solidFill>
+                    </a:lnL>
+                    <a:lnR w="9525">
+                      <a:solidFill>
+                        <a:srgbClr val="BFBFBF"/>
+                      </a:solidFill>
+                    </a:lnR>
+                    <a:lnT w="9525">
+                      <a:solidFill>
+                        <a:srgbClr val="BFBFBF"/>
+                      </a:solidFill>
+                    </a:lnT>
+                    <a:lnB w="9525">
+                      <a:solidFill>
+                        <a:srgbClr val="BFBFBF"/>
+                      </a:solidFill>
+                    </a:lnB>
+                  </a:tcPr>
+                </a:tc>
+                <a:tc>
+                  <a:txBody>
+                    <a:bodyPr/>
+                    <a:lstStyle/>
+                    <a:p>
+                      <a:pPr>
+                        <a:buNone/>
+                      </a:pPr>
+                      <a:r>
+                        <a:rPr lang="en-US" sz="1200" dirty="0">
+                          <a:latin typeface="Ubuntu"/>
+                        </a:rPr>
+                        <a:t>One, with a very long line to demonstrate that the hanging indent for the list is working correctly </a:t>
+                      </a:r>
+                      <a:endParaRPr lang="en-US" sz="1200" dirty="0"/>
+                    </a:p>
                   </a:txBody>
                   <a:tcPr>
                     <a:lnL w="9525">
@@ -5715,41 +4831,55 @@
                       </a:pPr>
                       <a:r>
                         <a:rPr lang="en-US" sz="1200" dirty="0">
+                          <a:solidFill>
+                            <a:srgbClr val="000000"/>
+                          </a:solidFill>
+                          <a:latin typeface="Ubuntu"/>
+                        </a:rPr>
+                        <a:t>2</a:t>
+                      </a:r>
+                      <a:endParaRPr lang="en-US" sz="1200" dirty="0"/>
+                    </a:p>
+                  </a:txBody>
+                  <a:tcPr>
+                    <a:lnL w="9525">
+                      <a:solidFill>
+                        <a:srgbClr val="BFBFBF"/>
+                      </a:solidFill>
+                    </a:lnL>
+                    <a:lnR w="9525">
+                      <a:solidFill>
+                        <a:srgbClr val="BFBFBF"/>
+                      </a:solidFill>
+                    </a:lnR>
+                    <a:lnT w="9525">
+                      <a:solidFill>
+                        <a:srgbClr val="BFBFBF"/>
+                      </a:solidFill>
+                    </a:lnT>
+                    <a:lnB w="9525">
+                      <a:solidFill>
+                        <a:srgbClr val="BFBFBF"/>
+                      </a:solidFill>
+                    </a:lnB>
+                  </a:tcPr>
+                </a:tc>
+                <a:tc>
+                  <a:txBody>
+                    <a:bodyPr/>
+                    <a:lstStyle/>
+                    <a:p>
+                      <a:pPr>
+                        <a:buNone/>
+                      </a:pPr>
+                      <a:r>
+                        <a:rPr lang="en-US" sz="1200" dirty="0">
                           <a:latin typeface="Ubuntu"/>
                         </a:rPr>
                         <a:t>Two </a:t>
                       </a:r>
                       <a:endParaRPr lang="en-US" sz="1200" dirty="0"/>
                     </a:p>
-                  </a:txBody>
-                  <a:tcPr>
-                    <a:lnL w="9525">
-                      <a:solidFill>
-                        <a:srgbClr val="BFBFBF"/>
-                      </a:solidFill>
-                    </a:lnL>
-                    <a:lnR w="9525">
-                      <a:solidFill>
-                        <a:srgbClr val="BFBFBF"/>
-                      </a:solidFill>
-                    </a:lnR>
-                    <a:lnT w="9525">
-                      <a:solidFill>
-                        <a:srgbClr val="BFBFBF"/>
-                      </a:solidFill>
-                    </a:lnT>
-                    <a:lnB w="9525">
-                      <a:solidFill>
-                        <a:srgbClr val="BFBFBF"/>
-                      </a:solidFill>
-                    </a:lnB>
-                  </a:tcPr>
-                </a:tc>
-                <a:tc>
-                  <a:txBody>
-                    <a:bodyPr/>
-                    <a:lstStyle/>
-                    <a:p/>
                   </a:txBody>
                   <a:tcPr>
                     <a:lnL w="9525">
@@ -5785,12 +4915,15 @@
                         <a:buNone/>
                       </a:pPr>
                       <a:r>
-                        <a:rPr lang="en-US" sz="1200" dirty="0">
-                          <a:latin typeface="Ubuntu"/>
-                        </a:rPr>
-                        <a:t>This bullet uses an image as the bullet item </a:t>
-                      </a:r>
-                      <a:endParaRPr lang="en-US" sz="1200" dirty="0"/>
+                        <a:rPr lang="en-US" sz="1300" b="1" dirty="0">
+                          <a:solidFill>
+                            <a:srgbClr val="4F81BD"/>
+                          </a:solidFill>
+                          <a:latin typeface="Ubuntu"/>
+                        </a:rPr>
+                        <a:t>Multi-level Lists </a:t>
+                      </a:r>
+                      <a:endParaRPr lang="en-US" sz="1300" dirty="0"/>
                     </a:p>
                   </a:txBody>
                   <a:tcPr>
@@ -5857,41 +4990,55 @@
                       </a:pPr>
                       <a:r>
                         <a:rPr lang="en-US" sz="1200" dirty="0">
-                          <a:latin typeface="Ubuntu"/>
-                        </a:rPr>
-                        <a:t>Four </a:t>
-                      </a:r>
-                      <a:endParaRPr lang="en-US" sz="1200" dirty="0"/>
-                    </a:p>
-                  </a:txBody>
-                  <a:tcPr>
-                    <a:lnL w="9525">
-                      <a:solidFill>
-                        <a:srgbClr val="BFBFBF"/>
-                      </a:solidFill>
-                    </a:lnL>
-                    <a:lnR w="9525">
-                      <a:solidFill>
-                        <a:srgbClr val="BFBFBF"/>
-                      </a:solidFill>
-                    </a:lnR>
-                    <a:lnT w="9525">
-                      <a:solidFill>
-                        <a:srgbClr val="BFBFBF"/>
-                      </a:solidFill>
-                    </a:lnT>
-                    <a:lnB w="9525">
-                      <a:solidFill>
-                        <a:srgbClr val="BFBFBF"/>
-                      </a:solidFill>
-                    </a:lnB>
-                  </a:tcPr>
-                </a:tc>
-                <a:tc>
-                  <a:txBody>
-                    <a:bodyPr/>
-                    <a:lstStyle/>
-                    <a:p/>
+                          <a:solidFill>
+                            <a:srgbClr val="000000"/>
+                          </a:solidFill>
+                          <a:latin typeface="Ubuntu"/>
+                        </a:rPr>
+                        <a:t>1</a:t>
+                      </a:r>
+                      <a:endParaRPr lang="en-US" sz="1200" dirty="0"/>
+                    </a:p>
+                  </a:txBody>
+                  <a:tcPr>
+                    <a:lnL w="9525">
+                      <a:solidFill>
+                        <a:srgbClr val="BFBFBF"/>
+                      </a:solidFill>
+                    </a:lnL>
+                    <a:lnR w="9525">
+                      <a:solidFill>
+                        <a:srgbClr val="BFBFBF"/>
+                      </a:solidFill>
+                    </a:lnR>
+                    <a:lnT w="9525">
+                      <a:solidFill>
+                        <a:srgbClr val="BFBFBF"/>
+                      </a:solidFill>
+                    </a:lnT>
+                    <a:lnB w="9525">
+                      <a:solidFill>
+                        <a:srgbClr val="BFBFBF"/>
+                      </a:solidFill>
+                    </a:lnB>
+                  </a:tcPr>
+                </a:tc>
+                <a:tc>
+                  <a:txBody>
+                    <a:bodyPr/>
+                    <a:lstStyle/>
+                    <a:p>
+                      <a:pPr>
+                        <a:buNone/>
+                      </a:pPr>
+                      <a:r>
+                        <a:rPr lang="en-US" sz="1200" dirty="0">
+                          <a:latin typeface="Ubuntu"/>
+                        </a:rPr>
+                        <a:t>One </a:t>
+                      </a:r>
+                      <a:endParaRPr lang="en-US" sz="1200" dirty="0"/>
+                    </a:p>
                   </a:txBody>
                   <a:tcPr>
                     <a:lnL w="9525">
@@ -5928,41 +5075,55 @@
                       </a:pPr>
                       <a:r>
                         <a:rPr lang="en-US" sz="1200" dirty="0">
-                          <a:latin typeface="Ubuntu"/>
-                        </a:rPr>
-                        <a:t>Five </a:t>
-                      </a:r>
-                      <a:endParaRPr lang="en-US" sz="1200" dirty="0"/>
-                    </a:p>
-                  </a:txBody>
-                  <a:tcPr>
-                    <a:lnL w="9525">
-                      <a:solidFill>
-                        <a:srgbClr val="BFBFBF"/>
-                      </a:solidFill>
-                    </a:lnL>
-                    <a:lnR w="9525">
-                      <a:solidFill>
-                        <a:srgbClr val="BFBFBF"/>
-                      </a:solidFill>
-                    </a:lnR>
-                    <a:lnT w="9525">
-                      <a:solidFill>
-                        <a:srgbClr val="BFBFBF"/>
-                      </a:solidFill>
-                    </a:lnT>
-                    <a:lnB w="9525">
-                      <a:solidFill>
-                        <a:srgbClr val="BFBFBF"/>
-                      </a:solidFill>
-                    </a:lnB>
-                  </a:tcPr>
-                </a:tc>
-                <a:tc>
-                  <a:txBody>
-                    <a:bodyPr/>
-                    <a:lstStyle/>
-                    <a:p/>
+                          <a:solidFill>
+                            <a:srgbClr val="000000"/>
+                          </a:solidFill>
+                          <a:latin typeface="Ubuntu"/>
+                        </a:rPr>
+                        <a:t>1</a:t>
+                      </a:r>
+                      <a:endParaRPr lang="en-US" sz="1200" dirty="0"/>
+                    </a:p>
+                  </a:txBody>
+                  <a:tcPr>
+                    <a:lnL w="9525">
+                      <a:solidFill>
+                        <a:srgbClr val="BFBFBF"/>
+                      </a:solidFill>
+                    </a:lnL>
+                    <a:lnR w="9525">
+                      <a:solidFill>
+                        <a:srgbClr val="BFBFBF"/>
+                      </a:solidFill>
+                    </a:lnR>
+                    <a:lnT w="9525">
+                      <a:solidFill>
+                        <a:srgbClr val="BFBFBF"/>
+                      </a:solidFill>
+                    </a:lnT>
+                    <a:lnB w="9525">
+                      <a:solidFill>
+                        <a:srgbClr val="BFBFBF"/>
+                      </a:solidFill>
+                    </a:lnB>
+                  </a:tcPr>
+                </a:tc>
+                <a:tc>
+                  <a:txBody>
+                    <a:bodyPr/>
+                    <a:lstStyle/>
+                    <a:p>
+                      <a:pPr>
+                        <a:buNone/>
+                      </a:pPr>
+                      <a:r>
+                        <a:rPr lang="en-US" sz="1200" dirty="0">
+                          <a:latin typeface="Ubuntu"/>
+                        </a:rPr>
+                        <a:t>Two </a:t>
+                      </a:r>
+                      <a:endParaRPr lang="en-US" sz="1200" dirty="0"/>
+                    </a:p>
                   </a:txBody>
                   <a:tcPr>
                     <a:lnL w="9525">
@@ -6073,7 +5234,7 @@
                 <a:gridCol w="4114800"/>
                 <a:gridCol w="4114800"/>
               </a:tblGrid>
-              <a:tr h="526143">
+              <a:tr h="334818">
                 <a:tc>
                   <a:txBody>
                     <a:bodyPr/>
@@ -6147,25 +5308,362 @@
                   </a:tcPr>
                 </a:tc>
               </a:tr>
-              <a:tr h="526143">
-                <a:tc>
-                  <a:txBody>
-                    <a:bodyPr/>
-                    <a:lstStyle/>
-                    <a:p>
-                      <a:pPr>
-                        <a:buNone/>
-                      </a:pPr>
-                      <a:r>
-                        <a:rPr lang="en-US" sz="1300" b="1" dirty="0">
-                          <a:solidFill>
-                            <a:srgbClr val="4F81BD"/>
-                          </a:solidFill>
-                          <a:latin typeface="Ubuntu"/>
-                        </a:rPr>
-                        <a:t>Continued Lists </a:t>
-                      </a:r>
-                      <a:endParaRPr lang="en-US" sz="1300" dirty="0"/>
+              <a:tr h="334818">
+                <a:tc>
+                  <a:txBody>
+                    <a:bodyPr/>
+                    <a:lstStyle/>
+                    <a:p>
+                      <a:pPr>
+                        <a:buNone/>
+                      </a:pPr>
+                      <a:r>
+                        <a:rPr lang="en-US" sz="1200" dirty="0">
+                          <a:solidFill>
+                            <a:srgbClr val="000000"/>
+                          </a:solidFill>
+                          <a:latin typeface="Ubuntu"/>
+                        </a:rPr>
+                        <a:t>1</a:t>
+                      </a:r>
+                      <a:endParaRPr lang="en-US" sz="1200" dirty="0"/>
+                    </a:p>
+                  </a:txBody>
+                  <a:tcPr>
+                    <a:lnL w="9525">
+                      <a:solidFill>
+                        <a:srgbClr val="BFBFBF"/>
+                      </a:solidFill>
+                    </a:lnL>
+                    <a:lnR w="9525">
+                      <a:solidFill>
+                        <a:srgbClr val="BFBFBF"/>
+                      </a:solidFill>
+                    </a:lnR>
+                    <a:lnT w="9525">
+                      <a:solidFill>
+                        <a:srgbClr val="BFBFBF"/>
+                      </a:solidFill>
+                    </a:lnT>
+                    <a:lnB w="9525">
+                      <a:solidFill>
+                        <a:srgbClr val="BFBFBF"/>
+                      </a:solidFill>
+                    </a:lnB>
+                  </a:tcPr>
+                </a:tc>
+                <a:tc>
+                  <a:txBody>
+                    <a:bodyPr/>
+                    <a:lstStyle/>
+                    <a:p>
+                      <a:pPr>
+                        <a:buNone/>
+                      </a:pPr>
+                      <a:r>
+                        <a:rPr lang="en-US" sz="1200" dirty="0">
+                          <a:latin typeface="Ubuntu"/>
+                        </a:rPr>
+                        <a:t>Three </a:t>
+                      </a:r>
+                      <a:endParaRPr lang="en-US" sz="1200" dirty="0"/>
+                    </a:p>
+                  </a:txBody>
+                  <a:tcPr>
+                    <a:lnL w="9525">
+                      <a:solidFill>
+                        <a:srgbClr val="BFBFBF"/>
+                      </a:solidFill>
+                    </a:lnL>
+                    <a:lnR w="9525">
+                      <a:solidFill>
+                        <a:srgbClr val="BFBFBF"/>
+                      </a:solidFill>
+                    </a:lnR>
+                    <a:lnT w="9525">
+                      <a:solidFill>
+                        <a:srgbClr val="BFBFBF"/>
+                      </a:solidFill>
+                    </a:lnT>
+                    <a:lnB w="9525">
+                      <a:solidFill>
+                        <a:srgbClr val="BFBFBF"/>
+                      </a:solidFill>
+                    </a:lnB>
+                  </a:tcPr>
+                </a:tc>
+              </a:tr>
+              <a:tr h="334818">
+                <a:tc>
+                  <a:txBody>
+                    <a:bodyPr/>
+                    <a:lstStyle/>
+                    <a:p>
+                      <a:pPr>
+                        <a:buNone/>
+                      </a:pPr>
+                      <a:r>
+                        <a:rPr lang="en-US" sz="1200" dirty="0">
+                          <a:solidFill>
+                            <a:srgbClr val="000000"/>
+                          </a:solidFill>
+                          <a:latin typeface="Ubuntu"/>
+                        </a:rPr>
+                        <a:t>2</a:t>
+                      </a:r>
+                      <a:endParaRPr lang="en-US" sz="1200" dirty="0"/>
+                    </a:p>
+                  </a:txBody>
+                  <a:tcPr>
+                    <a:lnL w="9525">
+                      <a:solidFill>
+                        <a:srgbClr val="BFBFBF"/>
+                      </a:solidFill>
+                    </a:lnL>
+                    <a:lnR w="9525">
+                      <a:solidFill>
+                        <a:srgbClr val="BFBFBF"/>
+                      </a:solidFill>
+                    </a:lnR>
+                    <a:lnT w="9525">
+                      <a:solidFill>
+                        <a:srgbClr val="BFBFBF"/>
+                      </a:solidFill>
+                    </a:lnT>
+                    <a:lnB w="9525">
+                      <a:solidFill>
+                        <a:srgbClr val="BFBFBF"/>
+                      </a:solidFill>
+                    </a:lnB>
+                  </a:tcPr>
+                </a:tc>
+                <a:tc>
+                  <a:txBody>
+                    <a:bodyPr/>
+                    <a:lstStyle/>
+                    <a:p>
+                      <a:pPr>
+                        <a:buNone/>
+                      </a:pPr>
+                      <a:r>
+                        <a:rPr lang="en-US" sz="1200" dirty="0">
+                          <a:latin typeface="Ubuntu"/>
+                        </a:rPr>
+                        <a:t>Four with a very long line to demonstrate that the hanging indent for the list is working correctly. </a:t>
+                      </a:r>
+                      <a:endParaRPr lang="en-US" sz="1200" dirty="0"/>
+                    </a:p>
+                  </a:txBody>
+                  <a:tcPr>
+                    <a:lnL w="9525">
+                      <a:solidFill>
+                        <a:srgbClr val="BFBFBF"/>
+                      </a:solidFill>
+                    </a:lnL>
+                    <a:lnR w="9525">
+                      <a:solidFill>
+                        <a:srgbClr val="BFBFBF"/>
+                      </a:solidFill>
+                    </a:lnR>
+                    <a:lnT w="9525">
+                      <a:solidFill>
+                        <a:srgbClr val="BFBFBF"/>
+                      </a:solidFill>
+                    </a:lnT>
+                    <a:lnB w="9525">
+                      <a:solidFill>
+                        <a:srgbClr val="BFBFBF"/>
+                      </a:solidFill>
+                    </a:lnB>
+                  </a:tcPr>
+                </a:tc>
+              </a:tr>
+              <a:tr h="334818">
+                <a:tc>
+                  <a:txBody>
+                    <a:bodyPr/>
+                    <a:lstStyle/>
+                    <a:p>
+                      <a:pPr>
+                        <a:buNone/>
+                      </a:pPr>
+                      <a:r>
+                        <a:rPr lang="en-US" sz="1200" dirty="0">
+                          <a:solidFill>
+                            <a:srgbClr val="000000"/>
+                          </a:solidFill>
+                          <a:latin typeface="Ubuntu"/>
+                        </a:rPr>
+                        <a:t>3</a:t>
+                      </a:r>
+                      <a:endParaRPr lang="en-US" sz="1200" dirty="0"/>
+                    </a:p>
+                  </a:txBody>
+                  <a:tcPr>
+                    <a:lnL w="9525">
+                      <a:solidFill>
+                        <a:srgbClr val="BFBFBF"/>
+                      </a:solidFill>
+                    </a:lnL>
+                    <a:lnR w="9525">
+                      <a:solidFill>
+                        <a:srgbClr val="BFBFBF"/>
+                      </a:solidFill>
+                    </a:lnR>
+                    <a:lnT w="9525">
+                      <a:solidFill>
+                        <a:srgbClr val="BFBFBF"/>
+                      </a:solidFill>
+                    </a:lnT>
+                    <a:lnB w="9525">
+                      <a:solidFill>
+                        <a:srgbClr val="BFBFBF"/>
+                      </a:solidFill>
+                    </a:lnB>
+                  </a:tcPr>
+                </a:tc>
+                <a:tc>
+                  <a:txBody>
+                    <a:bodyPr/>
+                    <a:lstStyle/>
+                    <a:p>
+                      <a:pPr>
+                        <a:buNone/>
+                      </a:pPr>
+                      <a:r>
+                        <a:rPr lang="en-US" sz="1200" dirty="0">
+                          <a:latin typeface="Ubuntu"/>
+                        </a:rPr>
+                        <a:t>Five </a:t>
+                      </a:r>
+                      <a:endParaRPr lang="en-US" sz="1200" dirty="0"/>
+                    </a:p>
+                  </a:txBody>
+                  <a:tcPr>
+                    <a:lnL w="9525">
+                      <a:solidFill>
+                        <a:srgbClr val="BFBFBF"/>
+                      </a:solidFill>
+                    </a:lnL>
+                    <a:lnR w="9525">
+                      <a:solidFill>
+                        <a:srgbClr val="BFBFBF"/>
+                      </a:solidFill>
+                    </a:lnR>
+                    <a:lnT w="9525">
+                      <a:solidFill>
+                        <a:srgbClr val="BFBFBF"/>
+                      </a:solidFill>
+                    </a:lnT>
+                    <a:lnB w="9525">
+                      <a:solidFill>
+                        <a:srgbClr val="BFBFBF"/>
+                      </a:solidFill>
+                    </a:lnB>
+                  </a:tcPr>
+                </a:tc>
+              </a:tr>
+              <a:tr h="334818">
+                <a:tc>
+                  <a:txBody>
+                    <a:bodyPr/>
+                    <a:lstStyle/>
+                    <a:p>
+                      <a:pPr>
+                        <a:buNone/>
+                      </a:pPr>
+                      <a:r>
+                        <a:rPr lang="en-US" sz="1200" dirty="0">
+                          <a:solidFill>
+                            <a:srgbClr val="000000"/>
+                          </a:solidFill>
+                          <a:latin typeface="Ubuntu"/>
+                        </a:rPr>
+                        <a:t>2</a:t>
+                      </a:r>
+                      <a:endParaRPr lang="en-US" sz="1200" dirty="0"/>
+                    </a:p>
+                  </a:txBody>
+                  <a:tcPr>
+                    <a:lnL w="9525">
+                      <a:solidFill>
+                        <a:srgbClr val="BFBFBF"/>
+                      </a:solidFill>
+                    </a:lnL>
+                    <a:lnR w="9525">
+                      <a:solidFill>
+                        <a:srgbClr val="BFBFBF"/>
+                      </a:solidFill>
+                    </a:lnR>
+                    <a:lnT w="9525">
+                      <a:solidFill>
+                        <a:srgbClr val="BFBFBF"/>
+                      </a:solidFill>
+                    </a:lnT>
+                    <a:lnB w="9525">
+                      <a:solidFill>
+                        <a:srgbClr val="BFBFBF"/>
+                      </a:solidFill>
+                    </a:lnB>
+                  </a:tcPr>
+                </a:tc>
+                <a:tc>
+                  <a:txBody>
+                    <a:bodyPr/>
+                    <a:lstStyle/>
+                    <a:p>
+                      <a:pPr>
+                        <a:buNone/>
+                      </a:pPr>
+                      <a:r>
+                        <a:rPr lang="en-US" sz="1200" dirty="0">
+                          <a:latin typeface="Ubuntu"/>
+                        </a:rPr>
+                        <a:t>Six </a:t>
+                      </a:r>
+                      <a:endParaRPr lang="en-US" sz="1200" dirty="0"/>
+                    </a:p>
+                  </a:txBody>
+                  <a:tcPr>
+                    <a:lnL w="9525">
+                      <a:solidFill>
+                        <a:srgbClr val="BFBFBF"/>
+                      </a:solidFill>
+                    </a:lnL>
+                    <a:lnR w="9525">
+                      <a:solidFill>
+                        <a:srgbClr val="BFBFBF"/>
+                      </a:solidFill>
+                    </a:lnR>
+                    <a:lnT w="9525">
+                      <a:solidFill>
+                        <a:srgbClr val="BFBFBF"/>
+                      </a:solidFill>
+                    </a:lnT>
+                    <a:lnB w="9525">
+                      <a:solidFill>
+                        <a:srgbClr val="BFBFBF"/>
+                      </a:solidFill>
+                    </a:lnB>
+                  </a:tcPr>
+                </a:tc>
+              </a:tr>
+              <a:tr h="334818">
+                <a:tc>
+                  <a:txBody>
+                    <a:bodyPr/>
+                    <a:lstStyle/>
+                    <a:p>
+                      <a:pPr>
+                        <a:buNone/>
+                      </a:pPr>
+                      <a:r>
+                        <a:rPr lang="en-US" sz="1200" dirty="0">
+                          <a:latin typeface="Ubuntu"/>
+                        </a:rPr>
+                        <a:t>A Multi-level list with bullets: </a:t>
+                      </a:r>
+                      <a:endParaRPr lang="en-US" sz="1200" dirty="0"/>
                     </a:p>
                   </a:txBody>
                   <a:tcPr>
@@ -6221,50 +5719,7 @@
                   </a:tcPr>
                 </a:tc>
               </a:tr>
-              <a:tr h="526143">
-                <a:tc>
-                  <a:txBody>
-                    <a:bodyPr/>
-                    <a:lstStyle/>
-                    <a:p>
-                      <a:pPr>
-                        <a:buNone/>
-                      </a:pPr>
-                      <a:r>
-                        <a:rPr lang="en-US" sz="1200" dirty="0">
-                          <a:solidFill>
-                            <a:srgbClr val="000000"/>
-                          </a:solidFill>
-                          <a:latin typeface="Ubuntu"/>
-                        </a:rPr>
-                        <a:t>i</a:t>
-                      </a:r>
-                      <a:endParaRPr lang="en-US" sz="1200" dirty="0"/>
-                    </a:p>
-                  </a:txBody>
-                  <a:tcPr>
-                    <a:lnL w="9525">
-                      <a:solidFill>
-                        <a:srgbClr val="BFBFBF"/>
-                      </a:solidFill>
-                    </a:lnL>
-                    <a:lnR w="9525">
-                      <a:solidFill>
-                        <a:srgbClr val="BFBFBF"/>
-                      </a:solidFill>
-                    </a:lnR>
-                    <a:lnT w="9525">
-                      <a:solidFill>
-                        <a:srgbClr val="BFBFBF"/>
-                      </a:solidFill>
-                    </a:lnT>
-                    <a:lnB w="9525">
-                      <a:solidFill>
-                        <a:srgbClr val="BFBFBF"/>
-                      </a:solidFill>
-                    </a:lnB>
-                  </a:tcPr>
-                </a:tc>
+              <a:tr h="334818">
                 <a:tc>
                   <a:txBody>
                     <a:bodyPr/>
@@ -6305,51 +5760,37 @@
                     </a:lnB>
                   </a:tcPr>
                 </a:tc>
+                <a:tc>
+                  <a:txBody>
+                    <a:bodyPr/>
+                    <a:lstStyle/>
+                    <a:p/>
+                  </a:txBody>
+                  <a:tcPr>
+                    <a:lnL w="9525">
+                      <a:solidFill>
+                        <a:srgbClr val="BFBFBF"/>
+                      </a:solidFill>
+                    </a:lnL>
+                    <a:lnR w="9525">
+                      <a:solidFill>
+                        <a:srgbClr val="BFBFBF"/>
+                      </a:solidFill>
+                    </a:lnR>
+                    <a:lnT w="9525">
+                      <a:solidFill>
+                        <a:srgbClr val="BFBFBF"/>
+                      </a:solidFill>
+                    </a:lnT>
+                    <a:lnB w="9525">
+                      <a:solidFill>
+                        <a:srgbClr val="BFBFBF"/>
+                      </a:solidFill>
+                    </a:lnB>
+                  </a:tcPr>
+                </a:tc>
               </a:tr>
-              <a:tr h="526143">
-                <a:tc>
-                  <a:txBody>
-                    <a:bodyPr/>
-                    <a:lstStyle/>
-                    <a:p>
-                      <a:pPr>
-                        <a:buNone/>
-                      </a:pPr>
-                      <a:r>
-                        <a:rPr lang="en-US" sz="1200" dirty="0">
-                          <a:solidFill>
-                            <a:srgbClr val="000000"/>
-                          </a:solidFill>
-                          <a:latin typeface="Ubuntu"/>
-                        </a:rPr>
-                        <a:t>ii</a:t>
-                      </a:r>
-                      <a:endParaRPr lang="en-US" sz="1200" dirty="0"/>
-                    </a:p>
-                  </a:txBody>
-                  <a:tcPr>
-                    <a:lnL w="9525">
-                      <a:solidFill>
-                        <a:srgbClr val="BFBFBF"/>
-                      </a:solidFill>
-                    </a:lnL>
-                    <a:lnR w="9525">
-                      <a:solidFill>
-                        <a:srgbClr val="BFBFBF"/>
-                      </a:solidFill>
-                    </a:lnR>
-                    <a:lnT w="9525">
-                      <a:solidFill>
-                        <a:srgbClr val="BFBFBF"/>
-                      </a:solidFill>
-                    </a:lnT>
-                    <a:lnB w="9525">
-                      <a:solidFill>
-                        <a:srgbClr val="BFBFBF"/>
-                      </a:solidFill>
-                    </a:lnB>
-                  </a:tcPr>
-                </a:tc>
+              <a:tr h="334818">
                 <a:tc>
                   <a:txBody>
                     <a:bodyPr/>
@@ -6390,21 +5831,50 @@
                     </a:lnB>
                   </a:tcPr>
                 </a:tc>
+                <a:tc>
+                  <a:txBody>
+                    <a:bodyPr/>
+                    <a:lstStyle/>
+                    <a:p/>
+                  </a:txBody>
+                  <a:tcPr>
+                    <a:lnL w="9525">
+                      <a:solidFill>
+                        <a:srgbClr val="BFBFBF"/>
+                      </a:solidFill>
+                    </a:lnL>
+                    <a:lnR w="9525">
+                      <a:solidFill>
+                        <a:srgbClr val="BFBFBF"/>
+                      </a:solidFill>
+                    </a:lnR>
+                    <a:lnT w="9525">
+                      <a:solidFill>
+                        <a:srgbClr val="BFBFBF"/>
+                      </a:solidFill>
+                    </a:lnT>
+                    <a:lnB w="9525">
+                      <a:solidFill>
+                        <a:srgbClr val="BFBFBF"/>
+                      </a:solidFill>
+                    </a:lnB>
+                  </a:tcPr>
+                </a:tc>
               </a:tr>
-              <a:tr h="526143">
-                <a:tc>
-                  <a:txBody>
-                    <a:bodyPr/>
-                    <a:lstStyle/>
-                    <a:p>
-                      <a:pPr>
-                        <a:buNone/>
-                      </a:pPr>
-                      <a:r>
-                        <a:rPr lang="en-US" sz="1200" dirty="0">
-                          <a:latin typeface="Ubuntu"/>
-                        </a:rPr>
-                        <a:t>An interruption in our regularly scheduled listing, for this essential and very relevant public service announcement. </a:t>
+              <a:tr h="334818">
+                <a:tc>
+                  <a:txBody>
+                    <a:bodyPr/>
+                    <a:lstStyle/>
+                    <a:p>
+                      <a:pPr>
+                        <a:buNone/>
+                      </a:pPr>
+                      <a:r>
+                        <a:rPr lang="en-US" sz="1200" dirty="0">
+                          <a:latin typeface="Ubuntu"/>
+                        </a:rPr>
+                        <a:t>This bullet uses an image as the bullet item </a:t>
                       </a:r>
                       <a:endParaRPr lang="en-US" sz="1200" dirty="0"/>
                     </a:p>
@@ -6462,66 +5932,52 @@
                   </a:tcPr>
                 </a:tc>
               </a:tr>
-              <a:tr h="526143">
-                <a:tc>
-                  <a:txBody>
-                    <a:bodyPr/>
-                    <a:lstStyle/>
-                    <a:p>
-                      <a:pPr>
-                        <a:buNone/>
-                      </a:pPr>
-                      <a:r>
-                        <a:rPr lang="en-US" sz="1200" dirty="0">
-                          <a:solidFill>
-                            <a:srgbClr val="000000"/>
-                          </a:solidFill>
-                          <a:latin typeface="Ubuntu"/>
-                        </a:rPr>
-                        <a:t>iii</a:t>
-                      </a:r>
-                      <a:endParaRPr lang="en-US" sz="1200" dirty="0"/>
-                    </a:p>
-                  </a:txBody>
-                  <a:tcPr>
-                    <a:lnL w="9525">
-                      <a:solidFill>
-                        <a:srgbClr val="BFBFBF"/>
-                      </a:solidFill>
-                    </a:lnL>
-                    <a:lnR w="9525">
-                      <a:solidFill>
-                        <a:srgbClr val="BFBFBF"/>
-                      </a:solidFill>
-                    </a:lnR>
-                    <a:lnT w="9525">
-                      <a:solidFill>
-                        <a:srgbClr val="BFBFBF"/>
-                      </a:solidFill>
-                    </a:lnT>
-                    <a:lnB w="9525">
-                      <a:solidFill>
-                        <a:srgbClr val="BFBFBF"/>
-                      </a:solidFill>
-                    </a:lnB>
-                  </a:tcPr>
-                </a:tc>
-                <a:tc>
-                  <a:txBody>
-                    <a:bodyPr/>
-                    <a:lstStyle/>
-                    <a:p>
-                      <a:pPr>
-                        <a:buNone/>
-                      </a:pPr>
-                      <a:r>
-                        <a:rPr lang="en-US" sz="1200" dirty="0">
-                          <a:latin typeface="Ubuntu"/>
-                        </a:rPr>
-                        <a:t>We now resume our normal programming </a:t>
-                      </a:r>
-                      <a:endParaRPr lang="en-US" sz="1200" dirty="0"/>
-                    </a:p>
+              <a:tr h="334818">
+                <a:tc>
+                  <a:txBody>
+                    <a:bodyPr/>
+                    <a:lstStyle/>
+                    <a:p>
+                      <a:pPr>
+                        <a:buNone/>
+                      </a:pPr>
+                      <a:r>
+                        <a:rPr lang="en-US" sz="1200" dirty="0">
+                          <a:latin typeface="Ubuntu"/>
+                        </a:rPr>
+                        <a:t>Four </a:t>
+                      </a:r>
+                      <a:endParaRPr lang="en-US" sz="1200" dirty="0"/>
+                    </a:p>
+                  </a:txBody>
+                  <a:tcPr>
+                    <a:lnL w="9525">
+                      <a:solidFill>
+                        <a:srgbClr val="BFBFBF"/>
+                      </a:solidFill>
+                    </a:lnL>
+                    <a:lnR w="9525">
+                      <a:solidFill>
+                        <a:srgbClr val="BFBFBF"/>
+                      </a:solidFill>
+                    </a:lnR>
+                    <a:lnT w="9525">
+                      <a:solidFill>
+                        <a:srgbClr val="BFBFBF"/>
+                      </a:solidFill>
+                    </a:lnT>
+                    <a:lnB w="9525">
+                      <a:solidFill>
+                        <a:srgbClr val="BFBFBF"/>
+                      </a:solidFill>
+                    </a:lnB>
+                  </a:tcPr>
+                </a:tc>
+                <a:tc>
+                  <a:txBody>
+                    <a:bodyPr/>
+                    <a:lstStyle/>
+                    <a:p/>
                   </a:txBody>
                   <a:tcPr>
                     <a:lnL w="9525">
@@ -6547,66 +6003,52 @@
                   </a:tcPr>
                 </a:tc>
               </a:tr>
-              <a:tr h="526143">
-                <a:tc>
-                  <a:txBody>
-                    <a:bodyPr/>
-                    <a:lstStyle/>
-                    <a:p>
-                      <a:pPr>
-                        <a:buNone/>
-                      </a:pPr>
-                      <a:r>
-                        <a:rPr lang="en-US" sz="1200" dirty="0">
-                          <a:solidFill>
-                            <a:srgbClr val="000000"/>
-                          </a:solidFill>
-                          <a:latin typeface="Ubuntu"/>
-                        </a:rPr>
-                        <a:t>iv</a:t>
-                      </a:r>
-                      <a:endParaRPr lang="en-US" sz="1200" dirty="0"/>
-                    </a:p>
-                  </a:txBody>
-                  <a:tcPr>
-                    <a:lnL w="9525">
-                      <a:solidFill>
-                        <a:srgbClr val="BFBFBF"/>
-                      </a:solidFill>
-                    </a:lnL>
-                    <a:lnR w="9525">
-                      <a:solidFill>
-                        <a:srgbClr val="BFBFBF"/>
-                      </a:solidFill>
-                    </a:lnR>
-                    <a:lnT w="9525">
-                      <a:solidFill>
-                        <a:srgbClr val="BFBFBF"/>
-                      </a:solidFill>
-                    </a:lnT>
-                    <a:lnB w="9525">
-                      <a:solidFill>
-                        <a:srgbClr val="BFBFBF"/>
-                      </a:solidFill>
-                    </a:lnB>
-                  </a:tcPr>
-                </a:tc>
-                <a:tc>
-                  <a:txBody>
-                    <a:bodyPr/>
-                    <a:lstStyle/>
-                    <a:p>
-                      <a:pPr>
-                        <a:buNone/>
-                      </a:pPr>
-                      <a:r>
-                        <a:rPr lang="en-US" sz="1200" dirty="0">
-                          <a:latin typeface="Ubuntu"/>
-                        </a:rPr>
-                        <a:t>Four </a:t>
-                      </a:r>
-                      <a:endParaRPr lang="en-US" sz="1200" dirty="0"/>
-                    </a:p>
+              <a:tr h="334818">
+                <a:tc>
+                  <a:txBody>
+                    <a:bodyPr/>
+                    <a:lstStyle/>
+                    <a:p>
+                      <a:pPr>
+                        <a:buNone/>
+                      </a:pPr>
+                      <a:r>
+                        <a:rPr lang="en-US" sz="1200" dirty="0">
+                          <a:latin typeface="Ubuntu"/>
+                        </a:rPr>
+                        <a:t>Five </a:t>
+                      </a:r>
+                      <a:endParaRPr lang="en-US" sz="1200" dirty="0"/>
+                    </a:p>
+                  </a:txBody>
+                  <a:tcPr>
+                    <a:lnL w="9525">
+                      <a:solidFill>
+                        <a:srgbClr val="BFBFBF"/>
+                      </a:solidFill>
+                    </a:lnL>
+                    <a:lnR w="9525">
+                      <a:solidFill>
+                        <a:srgbClr val="BFBFBF"/>
+                      </a:solidFill>
+                    </a:lnR>
+                    <a:lnT w="9525">
+                      <a:solidFill>
+                        <a:srgbClr val="BFBFBF"/>
+                      </a:solidFill>
+                    </a:lnT>
+                    <a:lnB w="9525">
+                      <a:solidFill>
+                        <a:srgbClr val="BFBFBF"/>
+                      </a:solidFill>
+                    </a:lnB>
+                  </a:tcPr>
+                </a:tc>
+                <a:tc>
+                  <a:txBody>
+                    <a:bodyPr/>
+                    <a:lstStyle/>
+                    <a:p/>
                   </a:txBody>
                   <a:tcPr>
                     <a:lnL w="9525">
@@ -6645,6 +6087,650 @@
 </file>
 
 <file path=ppt/slides/slide17.xml><?xml version="1.0" encoding="utf-8"?>
+<p:sld xmlns:a="http://schemas.openxmlformats.org/drawingml/2006/main" xmlns:r="http://schemas.openxmlformats.org/officeDocument/2006/relationships" xmlns:p="http://schemas.openxmlformats.org/presentationml/2006/main">
+  <p:cSld>
+    <p:spTree>
+      <p:nvGrpSpPr>
+        <p:cNvPr id="1" name=""/>
+        <p:cNvGrpSpPr/>
+        <p:nvPr/>
+      </p:nvGrpSpPr>
+      <p:grpSpPr>
+        <a:xfrm>
+          <a:off x="0" y="0"/>
+          <a:ext cx="0" cy="0"/>
+          <a:chOff x="0" y="0"/>
+          <a:chExt cx="0" cy="0"/>
+        </a:xfrm>
+      </p:grpSpPr>
+      <p:sp>
+        <p:nvSpPr>
+          <p:cNvPr id="2" name="Title 2"/>
+          <p:cNvSpPr txBox="1"/>
+          <p:nvPr/>
+        </p:nvSpPr>
+        <p:spPr>
+          <a:xfrm>
+            <a:off x="457200" y="279400"/>
+            <a:ext cx="8229600" cy="711200"/>
+          </a:xfrm>
+          <a:prstGeom prst="rect">
+            <a:avLst/>
+          </a:prstGeom>
+          <a:noFill/>
+          <a:ln>
+            <a:noFill/>
+          </a:ln>
+        </p:spPr>
+        <p:txBody>
+          <a:bodyPr wrap="square" anchor="b" rtlCol="0">
+            <a:normAutofit/>
+          </a:bodyPr>
+          <a:lstStyle/>
+          <a:p>
+            <a:pPr>
+              <a:buNone/>
+            </a:pPr>
+            <a:r>
+              <a:rPr lang="en-US" sz="2800" b="1" dirty="0"/>
+              <a:t>Sheet8</a:t>
+            </a:r>
+            <a:endParaRPr lang="en-US" sz="2800" dirty="0"/>
+          </a:p>
+        </p:txBody>
+      </p:sp>
+      <p:graphicFrame>
+        <p:nvGraphicFramePr>
+          <p:cNvPr id="3" name="Table 3"/>
+          <p:cNvGraphicFramePr>
+            <a:graphicFrameLocks noGrp="1"/>
+          </p:cNvGraphicFramePr>
+          <p:nvPr/>
+        </p:nvGraphicFramePr>
+        <p:xfrm>
+          <a:off x="457200" y="1143000"/>
+          <a:ext cx="8229600" cy="3683000"/>
+        </p:xfrm>
+        <a:graphic>
+          <a:graphicData uri="http://schemas.openxmlformats.org/drawingml/2006/table">
+            <a:tbl>
+              <a:tblPr firstRow="1"/>
+              <a:tblGrid>
+                <a:gridCol w="4114800"/>
+                <a:gridCol w="4114800"/>
+              </a:tblGrid>
+              <a:tr h="526143">
+                <a:tc>
+                  <a:txBody>
+                    <a:bodyPr/>
+                    <a:lstStyle/>
+                    <a:p>
+                      <a:pPr>
+                        <a:buNone/>
+                      </a:pPr>
+                      <a:r>
+                        <a:rPr lang="en-US" sz="1400" b="1" dirty="0">
+                          <a:solidFill>
+                            <a:srgbClr val="365F91"/>
+                          </a:solidFill>
+                          <a:latin typeface="Ubuntu"/>
+                        </a:rPr>
+                        <a:t>Lists </a:t>
+                      </a:r>
+                      <a:endParaRPr lang="en-US" sz="1400" dirty="0"/>
+                    </a:p>
+                  </a:txBody>
+                  <a:tcPr>
+                    <a:lnL w="9525">
+                      <a:solidFill>
+                        <a:srgbClr val="BFBFBF"/>
+                      </a:solidFill>
+                    </a:lnL>
+                    <a:lnR w="9525">
+                      <a:solidFill>
+                        <a:srgbClr val="BFBFBF"/>
+                      </a:solidFill>
+                    </a:lnR>
+                    <a:lnT w="9525">
+                      <a:solidFill>
+                        <a:srgbClr val="BFBFBF"/>
+                      </a:solidFill>
+                    </a:lnT>
+                    <a:lnB w="9525">
+                      <a:solidFill>
+                        <a:srgbClr val="BFBFBF"/>
+                      </a:solidFill>
+                    </a:lnB>
+                  </a:tcPr>
+                </a:tc>
+                <a:tc>
+                  <a:txBody>
+                    <a:bodyPr/>
+                    <a:lstStyle/>
+                    <a:p/>
+                  </a:txBody>
+                  <a:tcPr>
+                    <a:lnL w="9525">
+                      <a:solidFill>
+                        <a:srgbClr val="BFBFBF"/>
+                      </a:solidFill>
+                    </a:lnL>
+                    <a:lnR w="9525">
+                      <a:solidFill>
+                        <a:srgbClr val="BFBFBF"/>
+                      </a:solidFill>
+                    </a:lnR>
+                    <a:lnT w="9525">
+                      <a:solidFill>
+                        <a:srgbClr val="BFBFBF"/>
+                      </a:solidFill>
+                    </a:lnT>
+                    <a:lnB w="9525">
+                      <a:solidFill>
+                        <a:srgbClr val="BFBFBF"/>
+                      </a:solidFill>
+                    </a:lnB>
+                  </a:tcPr>
+                </a:tc>
+              </a:tr>
+              <a:tr h="526143">
+                <a:tc>
+                  <a:txBody>
+                    <a:bodyPr/>
+                    <a:lstStyle/>
+                    <a:p>
+                      <a:pPr>
+                        <a:buNone/>
+                      </a:pPr>
+                      <a:r>
+                        <a:rPr lang="en-US" sz="1300" b="1" dirty="0">
+                          <a:solidFill>
+                            <a:srgbClr val="4F81BD"/>
+                          </a:solidFill>
+                          <a:latin typeface="Ubuntu"/>
+                        </a:rPr>
+                        <a:t>Continued Lists </a:t>
+                      </a:r>
+                      <a:endParaRPr lang="en-US" sz="1300" dirty="0"/>
+                    </a:p>
+                  </a:txBody>
+                  <a:tcPr>
+                    <a:lnL w="9525">
+                      <a:solidFill>
+                        <a:srgbClr val="BFBFBF"/>
+                      </a:solidFill>
+                    </a:lnL>
+                    <a:lnR w="9525">
+                      <a:solidFill>
+                        <a:srgbClr val="BFBFBF"/>
+                      </a:solidFill>
+                    </a:lnR>
+                    <a:lnT w="9525">
+                      <a:solidFill>
+                        <a:srgbClr val="BFBFBF"/>
+                      </a:solidFill>
+                    </a:lnT>
+                    <a:lnB w="9525">
+                      <a:solidFill>
+                        <a:srgbClr val="BFBFBF"/>
+                      </a:solidFill>
+                    </a:lnB>
+                  </a:tcPr>
+                </a:tc>
+                <a:tc>
+                  <a:txBody>
+                    <a:bodyPr/>
+                    <a:lstStyle/>
+                    <a:p/>
+                  </a:txBody>
+                  <a:tcPr>
+                    <a:lnL w="9525">
+                      <a:solidFill>
+                        <a:srgbClr val="BFBFBF"/>
+                      </a:solidFill>
+                    </a:lnL>
+                    <a:lnR w="9525">
+                      <a:solidFill>
+                        <a:srgbClr val="BFBFBF"/>
+                      </a:solidFill>
+                    </a:lnR>
+                    <a:lnT w="9525">
+                      <a:solidFill>
+                        <a:srgbClr val="BFBFBF"/>
+                      </a:solidFill>
+                    </a:lnT>
+                    <a:lnB w="9525">
+                      <a:solidFill>
+                        <a:srgbClr val="BFBFBF"/>
+                      </a:solidFill>
+                    </a:lnB>
+                  </a:tcPr>
+                </a:tc>
+              </a:tr>
+              <a:tr h="526143">
+                <a:tc>
+                  <a:txBody>
+                    <a:bodyPr/>
+                    <a:lstStyle/>
+                    <a:p>
+                      <a:pPr>
+                        <a:buNone/>
+                      </a:pPr>
+                      <a:r>
+                        <a:rPr lang="en-US" sz="1200" dirty="0">
+                          <a:solidFill>
+                            <a:srgbClr val="000000"/>
+                          </a:solidFill>
+                          <a:latin typeface="Ubuntu"/>
+                        </a:rPr>
+                        <a:t>i</a:t>
+                      </a:r>
+                      <a:endParaRPr lang="en-US" sz="1200" dirty="0"/>
+                    </a:p>
+                  </a:txBody>
+                  <a:tcPr>
+                    <a:lnL w="9525">
+                      <a:solidFill>
+                        <a:srgbClr val="BFBFBF"/>
+                      </a:solidFill>
+                    </a:lnL>
+                    <a:lnR w="9525">
+                      <a:solidFill>
+                        <a:srgbClr val="BFBFBF"/>
+                      </a:solidFill>
+                    </a:lnR>
+                    <a:lnT w="9525">
+                      <a:solidFill>
+                        <a:srgbClr val="BFBFBF"/>
+                      </a:solidFill>
+                    </a:lnT>
+                    <a:lnB w="9525">
+                      <a:solidFill>
+                        <a:srgbClr val="BFBFBF"/>
+                      </a:solidFill>
+                    </a:lnB>
+                  </a:tcPr>
+                </a:tc>
+                <a:tc>
+                  <a:txBody>
+                    <a:bodyPr/>
+                    <a:lstStyle/>
+                    <a:p>
+                      <a:pPr>
+                        <a:buNone/>
+                      </a:pPr>
+                      <a:r>
+                        <a:rPr lang="en-US" sz="1200" dirty="0">
+                          <a:latin typeface="Ubuntu"/>
+                        </a:rPr>
+                        <a:t>One </a:t>
+                      </a:r>
+                      <a:endParaRPr lang="en-US" sz="1200" dirty="0"/>
+                    </a:p>
+                  </a:txBody>
+                  <a:tcPr>
+                    <a:lnL w="9525">
+                      <a:solidFill>
+                        <a:srgbClr val="BFBFBF"/>
+                      </a:solidFill>
+                    </a:lnL>
+                    <a:lnR w="9525">
+                      <a:solidFill>
+                        <a:srgbClr val="BFBFBF"/>
+                      </a:solidFill>
+                    </a:lnR>
+                    <a:lnT w="9525">
+                      <a:solidFill>
+                        <a:srgbClr val="BFBFBF"/>
+                      </a:solidFill>
+                    </a:lnT>
+                    <a:lnB w="9525">
+                      <a:solidFill>
+                        <a:srgbClr val="BFBFBF"/>
+                      </a:solidFill>
+                    </a:lnB>
+                  </a:tcPr>
+                </a:tc>
+              </a:tr>
+              <a:tr h="526143">
+                <a:tc>
+                  <a:txBody>
+                    <a:bodyPr/>
+                    <a:lstStyle/>
+                    <a:p>
+                      <a:pPr>
+                        <a:buNone/>
+                      </a:pPr>
+                      <a:r>
+                        <a:rPr lang="en-US" sz="1200" dirty="0">
+                          <a:solidFill>
+                            <a:srgbClr val="000000"/>
+                          </a:solidFill>
+                          <a:latin typeface="Ubuntu"/>
+                        </a:rPr>
+                        <a:t>ii</a:t>
+                      </a:r>
+                      <a:endParaRPr lang="en-US" sz="1200" dirty="0"/>
+                    </a:p>
+                  </a:txBody>
+                  <a:tcPr>
+                    <a:lnL w="9525">
+                      <a:solidFill>
+                        <a:srgbClr val="BFBFBF"/>
+                      </a:solidFill>
+                    </a:lnL>
+                    <a:lnR w="9525">
+                      <a:solidFill>
+                        <a:srgbClr val="BFBFBF"/>
+                      </a:solidFill>
+                    </a:lnR>
+                    <a:lnT w="9525">
+                      <a:solidFill>
+                        <a:srgbClr val="BFBFBF"/>
+                      </a:solidFill>
+                    </a:lnT>
+                    <a:lnB w="9525">
+                      <a:solidFill>
+                        <a:srgbClr val="BFBFBF"/>
+                      </a:solidFill>
+                    </a:lnB>
+                  </a:tcPr>
+                </a:tc>
+                <a:tc>
+                  <a:txBody>
+                    <a:bodyPr/>
+                    <a:lstStyle/>
+                    <a:p>
+                      <a:pPr>
+                        <a:buNone/>
+                      </a:pPr>
+                      <a:r>
+                        <a:rPr lang="en-US" sz="1200" dirty="0">
+                          <a:latin typeface="Ubuntu"/>
+                        </a:rPr>
+                        <a:t>Two </a:t>
+                      </a:r>
+                      <a:endParaRPr lang="en-US" sz="1200" dirty="0"/>
+                    </a:p>
+                  </a:txBody>
+                  <a:tcPr>
+                    <a:lnL w="9525">
+                      <a:solidFill>
+                        <a:srgbClr val="BFBFBF"/>
+                      </a:solidFill>
+                    </a:lnL>
+                    <a:lnR w="9525">
+                      <a:solidFill>
+                        <a:srgbClr val="BFBFBF"/>
+                      </a:solidFill>
+                    </a:lnR>
+                    <a:lnT w="9525">
+                      <a:solidFill>
+                        <a:srgbClr val="BFBFBF"/>
+                      </a:solidFill>
+                    </a:lnT>
+                    <a:lnB w="9525">
+                      <a:solidFill>
+                        <a:srgbClr val="BFBFBF"/>
+                      </a:solidFill>
+                    </a:lnB>
+                  </a:tcPr>
+                </a:tc>
+              </a:tr>
+              <a:tr h="526143">
+                <a:tc>
+                  <a:txBody>
+                    <a:bodyPr/>
+                    <a:lstStyle/>
+                    <a:p>
+                      <a:pPr>
+                        <a:buNone/>
+                      </a:pPr>
+                      <a:r>
+                        <a:rPr lang="en-US" sz="1200" dirty="0">
+                          <a:latin typeface="Ubuntu"/>
+                        </a:rPr>
+                        <a:t>An interruption in our regularly scheduled listing, for this essential and very relevant public service announcement. </a:t>
+                      </a:r>
+                      <a:endParaRPr lang="en-US" sz="1200" dirty="0"/>
+                    </a:p>
+                  </a:txBody>
+                  <a:tcPr>
+                    <a:lnL w="9525">
+                      <a:solidFill>
+                        <a:srgbClr val="BFBFBF"/>
+                      </a:solidFill>
+                    </a:lnL>
+                    <a:lnR w="9525">
+                      <a:solidFill>
+                        <a:srgbClr val="BFBFBF"/>
+                      </a:solidFill>
+                    </a:lnR>
+                    <a:lnT w="9525">
+                      <a:solidFill>
+                        <a:srgbClr val="BFBFBF"/>
+                      </a:solidFill>
+                    </a:lnT>
+                    <a:lnB w="9525">
+                      <a:solidFill>
+                        <a:srgbClr val="BFBFBF"/>
+                      </a:solidFill>
+                    </a:lnB>
+                  </a:tcPr>
+                </a:tc>
+                <a:tc>
+                  <a:txBody>
+                    <a:bodyPr/>
+                    <a:lstStyle/>
+                    <a:p/>
+                  </a:txBody>
+                  <a:tcPr>
+                    <a:lnL w="9525">
+                      <a:solidFill>
+                        <a:srgbClr val="BFBFBF"/>
+                      </a:solidFill>
+                    </a:lnL>
+                    <a:lnR w="9525">
+                      <a:solidFill>
+                        <a:srgbClr val="BFBFBF"/>
+                      </a:solidFill>
+                    </a:lnR>
+                    <a:lnT w="9525">
+                      <a:solidFill>
+                        <a:srgbClr val="BFBFBF"/>
+                      </a:solidFill>
+                    </a:lnT>
+                    <a:lnB w="9525">
+                      <a:solidFill>
+                        <a:srgbClr val="BFBFBF"/>
+                      </a:solidFill>
+                    </a:lnB>
+                  </a:tcPr>
+                </a:tc>
+              </a:tr>
+              <a:tr h="526143">
+                <a:tc>
+                  <a:txBody>
+                    <a:bodyPr/>
+                    <a:lstStyle/>
+                    <a:p>
+                      <a:pPr>
+                        <a:buNone/>
+                      </a:pPr>
+                      <a:r>
+                        <a:rPr lang="en-US" sz="1200" dirty="0">
+                          <a:solidFill>
+                            <a:srgbClr val="000000"/>
+                          </a:solidFill>
+                          <a:latin typeface="Ubuntu"/>
+                        </a:rPr>
+                        <a:t>iii</a:t>
+                      </a:r>
+                      <a:endParaRPr lang="en-US" sz="1200" dirty="0"/>
+                    </a:p>
+                  </a:txBody>
+                  <a:tcPr>
+                    <a:lnL w="9525">
+                      <a:solidFill>
+                        <a:srgbClr val="BFBFBF"/>
+                      </a:solidFill>
+                    </a:lnL>
+                    <a:lnR w="9525">
+                      <a:solidFill>
+                        <a:srgbClr val="BFBFBF"/>
+                      </a:solidFill>
+                    </a:lnR>
+                    <a:lnT w="9525">
+                      <a:solidFill>
+                        <a:srgbClr val="BFBFBF"/>
+                      </a:solidFill>
+                    </a:lnT>
+                    <a:lnB w="9525">
+                      <a:solidFill>
+                        <a:srgbClr val="BFBFBF"/>
+                      </a:solidFill>
+                    </a:lnB>
+                  </a:tcPr>
+                </a:tc>
+                <a:tc>
+                  <a:txBody>
+                    <a:bodyPr/>
+                    <a:lstStyle/>
+                    <a:p>
+                      <a:pPr>
+                        <a:buNone/>
+                      </a:pPr>
+                      <a:r>
+                        <a:rPr lang="en-US" sz="1200" dirty="0">
+                          <a:latin typeface="Ubuntu"/>
+                        </a:rPr>
+                        <a:t>We now resume our normal programming </a:t>
+                      </a:r>
+                      <a:endParaRPr lang="en-US" sz="1200" dirty="0"/>
+                    </a:p>
+                  </a:txBody>
+                  <a:tcPr>
+                    <a:lnL w="9525">
+                      <a:solidFill>
+                        <a:srgbClr val="BFBFBF"/>
+                      </a:solidFill>
+                    </a:lnL>
+                    <a:lnR w="9525">
+                      <a:solidFill>
+                        <a:srgbClr val="BFBFBF"/>
+                      </a:solidFill>
+                    </a:lnR>
+                    <a:lnT w="9525">
+                      <a:solidFill>
+                        <a:srgbClr val="BFBFBF"/>
+                      </a:solidFill>
+                    </a:lnT>
+                    <a:lnB w="9525">
+                      <a:solidFill>
+                        <a:srgbClr val="BFBFBF"/>
+                      </a:solidFill>
+                    </a:lnB>
+                  </a:tcPr>
+                </a:tc>
+              </a:tr>
+              <a:tr h="526143">
+                <a:tc>
+                  <a:txBody>
+                    <a:bodyPr/>
+                    <a:lstStyle/>
+                    <a:p>
+                      <a:pPr>
+                        <a:buNone/>
+                      </a:pPr>
+                      <a:r>
+                        <a:rPr lang="en-US" sz="1200" dirty="0">
+                          <a:solidFill>
+                            <a:srgbClr val="000000"/>
+                          </a:solidFill>
+                          <a:latin typeface="Ubuntu"/>
+                        </a:rPr>
+                        <a:t>iv</a:t>
+                      </a:r>
+                      <a:endParaRPr lang="en-US" sz="1200" dirty="0"/>
+                    </a:p>
+                  </a:txBody>
+                  <a:tcPr>
+                    <a:lnL w="9525">
+                      <a:solidFill>
+                        <a:srgbClr val="BFBFBF"/>
+                      </a:solidFill>
+                    </a:lnL>
+                    <a:lnR w="9525">
+                      <a:solidFill>
+                        <a:srgbClr val="BFBFBF"/>
+                      </a:solidFill>
+                    </a:lnR>
+                    <a:lnT w="9525">
+                      <a:solidFill>
+                        <a:srgbClr val="BFBFBF"/>
+                      </a:solidFill>
+                    </a:lnT>
+                    <a:lnB w="9525">
+                      <a:solidFill>
+                        <a:srgbClr val="BFBFBF"/>
+                      </a:solidFill>
+                    </a:lnB>
+                  </a:tcPr>
+                </a:tc>
+                <a:tc>
+                  <a:txBody>
+                    <a:bodyPr/>
+                    <a:lstStyle/>
+                    <a:p>
+                      <a:pPr>
+                        <a:buNone/>
+                      </a:pPr>
+                      <a:r>
+                        <a:rPr lang="en-US" sz="1200" dirty="0">
+                          <a:latin typeface="Ubuntu"/>
+                        </a:rPr>
+                        <a:t>Four </a:t>
+                      </a:r>
+                      <a:endParaRPr lang="en-US" sz="1200" dirty="0"/>
+                    </a:p>
+                  </a:txBody>
+                  <a:tcPr>
+                    <a:lnL w="9525">
+                      <a:solidFill>
+                        <a:srgbClr val="BFBFBF"/>
+                      </a:solidFill>
+                    </a:lnL>
+                    <a:lnR w="9525">
+                      <a:solidFill>
+                        <a:srgbClr val="BFBFBF"/>
+                      </a:solidFill>
+                    </a:lnR>
+                    <a:lnT w="9525">
+                      <a:solidFill>
+                        <a:srgbClr val="BFBFBF"/>
+                      </a:solidFill>
+                    </a:lnT>
+                    <a:lnB w="9525">
+                      <a:solidFill>
+                        <a:srgbClr val="BFBFBF"/>
+                      </a:solidFill>
+                    </a:lnB>
+                  </a:tcPr>
+                </a:tc>
+              </a:tr>
+            </a:tbl>
+          </a:graphicData>
+        </a:graphic>
+      </p:graphicFrame>
+    </p:spTree>
+  </p:cSld>
+  <p:clrMapOvr>
+    <a:masterClrMapping/>
+  </p:clrMapOvr>
+</p:sld>
+</file>
+
+<file path=ppt/slides/slide18.xml><?xml version="1.0" encoding="utf-8"?>
 <p:sld xmlns:a="http://schemas.openxmlformats.org/drawingml/2006/main" xmlns:r="http://schemas.openxmlformats.org/officeDocument/2006/relationships" xmlns:p="http://schemas.openxmlformats.org/presentationml/2006/main">
   <p:cSld>
     <p:spTree>
@@ -8083,7 +8169,7 @@
 </p:sld>
 </file>
 
-<file path=ppt/slides/slide18.xml><?xml version="1.0" encoding="utf-8"?>
+<file path=ppt/slides/slide19.xml><?xml version="1.0" encoding="utf-8"?>
 <p:sld xmlns:a="http://schemas.openxmlformats.org/drawingml/2006/main" xmlns:r="http://schemas.openxmlformats.org/officeDocument/2006/relationships" xmlns:p="http://schemas.openxmlformats.org/presentationml/2006/main">
   <p:cSld>
     <p:spTree>

--- a/test/generator/baseline/gen.xlsx.to.pptx.pptx
+++ b/test/generator/baseline/gen.xlsx.to.pptx.pptx
@@ -24,6 +24,7 @@
     <p:sldId id="272" r:id="rId18"/>
     <p:sldId id="273" r:id="rId19"/>
     <p:sldId id="274" r:id="rId20"/>
+    <p:sldId id="275" r:id="rId21"/>
   </p:sldIdLst>
   <p:sldSz cx="9144000" cy="5143500"/>
   <p:notesSz cx="6858000" cy="9144000"/>
@@ -9536,6 +9537,859 @@
 </p:sld>
 </file>
 
+<file path=ppt/slides/slide20.xml><?xml version="1.0" encoding="utf-8"?>
+<p:sld xmlns:a="http://schemas.openxmlformats.org/drawingml/2006/main" xmlns:r="http://schemas.openxmlformats.org/officeDocument/2006/relationships" xmlns:p="http://schemas.openxmlformats.org/presentationml/2006/main">
+  <p:cSld>
+    <p:spTree>
+      <p:nvGrpSpPr>
+        <p:cNvPr id="1" name=""/>
+        <p:cNvGrpSpPr/>
+        <p:nvPr/>
+      </p:nvGrpSpPr>
+      <p:grpSpPr>
+        <a:xfrm>
+          <a:off x="0" y="0"/>
+          <a:ext cx="0" cy="0"/>
+          <a:chOff x="0" y="0"/>
+          <a:chExt cx="0" cy="0"/>
+        </a:xfrm>
+      </p:grpSpPr>
+      <p:sp>
+        <p:nvSpPr>
+          <p:cNvPr id="2" name="Title 2"/>
+          <p:cNvSpPr txBox="1"/>
+          <p:nvPr/>
+        </p:nvSpPr>
+        <p:spPr>
+          <a:xfrm>
+            <a:off x="457200" y="279400"/>
+            <a:ext cx="8229600" cy="711200"/>
+          </a:xfrm>
+          <a:prstGeom prst="rect">
+            <a:avLst/>
+          </a:prstGeom>
+          <a:noFill/>
+          <a:ln>
+            <a:noFill/>
+          </a:ln>
+        </p:spPr>
+        <p:txBody>
+          <a:bodyPr wrap="square" anchor="b" rtlCol="0">
+            <a:normAutofit/>
+          </a:bodyPr>
+          <a:lstStyle/>
+          <a:p>
+            <a:pPr>
+              <a:buNone/>
+            </a:pPr>
+            <a:r>
+              <a:rPr lang="en-US" sz="2800" b="1" dirty="0"/>
+              <a:t>Chart Sheet</a:t>
+            </a:r>
+            <a:endParaRPr lang="en-US" sz="2800" dirty="0"/>
+          </a:p>
+        </p:txBody>
+      </p:sp>
+      <p:graphicFrame>
+        <p:nvGraphicFramePr>
+          <p:cNvPr id="3" name="Table 3"/>
+          <p:cNvGraphicFramePr>
+            <a:graphicFrameLocks noGrp="1"/>
+          </p:cNvGraphicFramePr>
+          <p:nvPr/>
+        </p:nvGraphicFramePr>
+        <p:xfrm>
+          <a:off x="457200" y="1143000"/>
+          <a:ext cx="8229600" cy="3683000"/>
+        </p:xfrm>
+        <a:graphic>
+          <a:graphicData uri="http://schemas.openxmlformats.org/drawingml/2006/table">
+            <a:tbl>
+              <a:tblPr firstRow="1"/>
+              <a:tblGrid>
+                <a:gridCol w="1870364"/>
+                <a:gridCol w="1496291"/>
+                <a:gridCol w="3366655"/>
+                <a:gridCol w="1496291"/>
+              </a:tblGrid>
+              <a:tr h="736600">
+                <a:tc>
+                  <a:txBody>
+                    <a:bodyPr/>
+                    <a:lstStyle/>
+                    <a:p>
+                      <a:pPr>
+                        <a:buNone/>
+                      </a:pPr>
+                      <a:endParaRPr lang="en-US" sz="1200" dirty="0"/>
+                    </a:p>
+                  </a:txBody>
+                  <a:tcPr>
+                    <a:lnL w="9525">
+                      <a:solidFill>
+                        <a:srgbClr val="BFBFBF"/>
+                      </a:solidFill>
+                    </a:lnL>
+                    <a:lnR w="9525">
+                      <a:solidFill>
+                        <a:srgbClr val="BFBFBF"/>
+                      </a:solidFill>
+                    </a:lnR>
+                    <a:lnT w="9525">
+                      <a:solidFill>
+                        <a:srgbClr val="BFBFBF"/>
+                      </a:solidFill>
+                    </a:lnT>
+                    <a:lnB w="9525">
+                      <a:solidFill>
+                        <a:srgbClr val="BFBFBF"/>
+                      </a:solidFill>
+                    </a:lnB>
+                  </a:tcPr>
+                </a:tc>
+                <a:tc>
+                  <a:txBody>
+                    <a:bodyPr/>
+                    <a:lstStyle/>
+                    <a:p>
+                      <a:pPr>
+                        <a:buNone/>
+                      </a:pPr>
+                      <a:r>
+                        <a:rPr lang="en-US" sz="1200" dirty="0"/>
+                        <a:t>Series 1</a:t>
+                      </a:r>
+                      <a:endParaRPr lang="en-US" sz="1200" dirty="0"/>
+                    </a:p>
+                  </a:txBody>
+                  <a:tcPr>
+                    <a:lnL w="9525">
+                      <a:solidFill>
+                        <a:srgbClr val="BFBFBF"/>
+                      </a:solidFill>
+                    </a:lnL>
+                    <a:lnR w="9525">
+                      <a:solidFill>
+                        <a:srgbClr val="BFBFBF"/>
+                      </a:solidFill>
+                    </a:lnR>
+                    <a:lnT w="9525">
+                      <a:solidFill>
+                        <a:srgbClr val="BFBFBF"/>
+                      </a:solidFill>
+                    </a:lnT>
+                    <a:lnB w="9525">
+                      <a:solidFill>
+                        <a:srgbClr val="BFBFBF"/>
+                      </a:solidFill>
+                    </a:lnB>
+                  </a:tcPr>
+                </a:tc>
+                <a:tc>
+                  <a:txBody>
+                    <a:bodyPr/>
+                    <a:lstStyle/>
+                    <a:p>
+                      <a:pPr>
+                        <a:buNone/>
+                      </a:pPr>
+                      <a:r>
+                        <a:rPr lang="en-US" sz="1200" dirty="0"/>
+                        <a:t>Series 2</a:t>
+                      </a:r>
+                      <a:endParaRPr lang="en-US" sz="1200" dirty="0"/>
+                    </a:p>
+                  </a:txBody>
+                  <a:tcPr>
+                    <a:lnL w="9525">
+                      <a:solidFill>
+                        <a:srgbClr val="BFBFBF"/>
+                      </a:solidFill>
+                    </a:lnL>
+                    <a:lnR w="9525">
+                      <a:solidFill>
+                        <a:srgbClr val="BFBFBF"/>
+                      </a:solidFill>
+                    </a:lnR>
+                    <a:lnT w="9525">
+                      <a:solidFill>
+                        <a:srgbClr val="BFBFBF"/>
+                      </a:solidFill>
+                    </a:lnT>
+                    <a:lnB w="9525">
+                      <a:solidFill>
+                        <a:srgbClr val="BFBFBF"/>
+                      </a:solidFill>
+                    </a:lnB>
+                  </a:tcPr>
+                </a:tc>
+                <a:tc>
+                  <a:txBody>
+                    <a:bodyPr/>
+                    <a:lstStyle/>
+                    <a:p>
+                      <a:pPr>
+                        <a:buNone/>
+                      </a:pPr>
+                      <a:r>
+                        <a:rPr lang="en-US" sz="1200" dirty="0"/>
+                        <a:t>Series 3</a:t>
+                      </a:r>
+                      <a:endParaRPr lang="en-US" sz="1200" dirty="0"/>
+                    </a:p>
+                  </a:txBody>
+                  <a:tcPr>
+                    <a:lnL w="9525">
+                      <a:solidFill>
+                        <a:srgbClr val="BFBFBF"/>
+                      </a:solidFill>
+                    </a:lnL>
+                    <a:lnR w="9525">
+                      <a:solidFill>
+                        <a:srgbClr val="BFBFBF"/>
+                      </a:solidFill>
+                    </a:lnR>
+                    <a:lnT w="9525">
+                      <a:solidFill>
+                        <a:srgbClr val="BFBFBF"/>
+                      </a:solidFill>
+                    </a:lnT>
+                    <a:lnB w="9525">
+                      <a:solidFill>
+                        <a:srgbClr val="BFBFBF"/>
+                      </a:solidFill>
+                    </a:lnB>
+                  </a:tcPr>
+                </a:tc>
+              </a:tr>
+              <a:tr h="736600">
+                <a:tc>
+                  <a:txBody>
+                    <a:bodyPr/>
+                    <a:lstStyle/>
+                    <a:p>
+                      <a:pPr>
+                        <a:buNone/>
+                      </a:pPr>
+                      <a:r>
+                        <a:rPr lang="en-US" sz="1200" dirty="0"/>
+                        <a:t>Category 1</a:t>
+                      </a:r>
+                      <a:endParaRPr lang="en-US" sz="1200" dirty="0"/>
+                    </a:p>
+                  </a:txBody>
+                  <a:tcPr>
+                    <a:lnL w="9525">
+                      <a:solidFill>
+                        <a:srgbClr val="BFBFBF"/>
+                      </a:solidFill>
+                    </a:lnL>
+                    <a:lnR w="9525">
+                      <a:solidFill>
+                        <a:srgbClr val="BFBFBF"/>
+                      </a:solidFill>
+                    </a:lnR>
+                    <a:lnT w="9525">
+                      <a:solidFill>
+                        <a:srgbClr val="BFBFBF"/>
+                      </a:solidFill>
+                    </a:lnT>
+                    <a:lnB w="9525">
+                      <a:solidFill>
+                        <a:srgbClr val="BFBFBF"/>
+                      </a:solidFill>
+                    </a:lnB>
+                  </a:tcPr>
+                </a:tc>
+                <a:tc>
+                  <a:txBody>
+                    <a:bodyPr/>
+                    <a:lstStyle/>
+                    <a:p>
+                      <a:pPr>
+                        <a:buNone/>
+                      </a:pPr>
+                      <a:r>
+                        <a:rPr lang="en-US" sz="1200" dirty="0"/>
+                        <a:t>4.3</a:t>
+                      </a:r>
+                      <a:endParaRPr lang="en-US" sz="1200" dirty="0"/>
+                    </a:p>
+                  </a:txBody>
+                  <a:tcPr>
+                    <a:lnL w="9525">
+                      <a:solidFill>
+                        <a:srgbClr val="BFBFBF"/>
+                      </a:solidFill>
+                    </a:lnL>
+                    <a:lnR w="9525">
+                      <a:solidFill>
+                        <a:srgbClr val="BFBFBF"/>
+                      </a:solidFill>
+                    </a:lnR>
+                    <a:lnT w="9525">
+                      <a:solidFill>
+                        <a:srgbClr val="BFBFBF"/>
+                      </a:solidFill>
+                    </a:lnT>
+                    <a:lnB w="9525">
+                      <a:solidFill>
+                        <a:srgbClr val="BFBFBF"/>
+                      </a:solidFill>
+                    </a:lnB>
+                  </a:tcPr>
+                </a:tc>
+                <a:tc>
+                  <a:txBody>
+                    <a:bodyPr/>
+                    <a:lstStyle/>
+                    <a:p>
+                      <a:pPr>
+                        <a:buNone/>
+                      </a:pPr>
+                      <a:r>
+                        <a:rPr lang="en-US" sz="1200" dirty="0"/>
+                        <a:t>2.4</a:t>
+                      </a:r>
+                      <a:endParaRPr lang="en-US" sz="1200" dirty="0"/>
+                    </a:p>
+                  </a:txBody>
+                  <a:tcPr>
+                    <a:lnL w="9525">
+                      <a:solidFill>
+                        <a:srgbClr val="BFBFBF"/>
+                      </a:solidFill>
+                    </a:lnL>
+                    <a:lnR w="9525">
+                      <a:solidFill>
+                        <a:srgbClr val="BFBFBF"/>
+                      </a:solidFill>
+                    </a:lnR>
+                    <a:lnT w="9525">
+                      <a:solidFill>
+                        <a:srgbClr val="BFBFBF"/>
+                      </a:solidFill>
+                    </a:lnT>
+                    <a:lnB w="9525">
+                      <a:solidFill>
+                        <a:srgbClr val="BFBFBF"/>
+                      </a:solidFill>
+                    </a:lnB>
+                  </a:tcPr>
+                </a:tc>
+                <a:tc>
+                  <a:txBody>
+                    <a:bodyPr/>
+                    <a:lstStyle/>
+                    <a:p>
+                      <a:pPr>
+                        <a:buNone/>
+                      </a:pPr>
+                      <a:r>
+                        <a:rPr lang="en-US" sz="1200" dirty="0"/>
+                        <a:t>2</a:t>
+                      </a:r>
+                      <a:endParaRPr lang="en-US" sz="1200" dirty="0"/>
+                    </a:p>
+                  </a:txBody>
+                  <a:tcPr>
+                    <a:lnL w="9525">
+                      <a:solidFill>
+                        <a:srgbClr val="BFBFBF"/>
+                      </a:solidFill>
+                    </a:lnL>
+                    <a:lnR w="9525">
+                      <a:solidFill>
+                        <a:srgbClr val="BFBFBF"/>
+                      </a:solidFill>
+                    </a:lnR>
+                    <a:lnT w="9525">
+                      <a:solidFill>
+                        <a:srgbClr val="BFBFBF"/>
+                      </a:solidFill>
+                    </a:lnT>
+                    <a:lnB w="9525">
+                      <a:solidFill>
+                        <a:srgbClr val="BFBFBF"/>
+                      </a:solidFill>
+                    </a:lnB>
+                  </a:tcPr>
+                </a:tc>
+              </a:tr>
+              <a:tr h="736600">
+                <a:tc>
+                  <a:txBody>
+                    <a:bodyPr/>
+                    <a:lstStyle/>
+                    <a:p>
+                      <a:pPr>
+                        <a:buNone/>
+                      </a:pPr>
+                      <a:r>
+                        <a:rPr lang="en-US" sz="1200" dirty="0"/>
+                        <a:t>Category 2</a:t>
+                      </a:r>
+                      <a:endParaRPr lang="en-US" sz="1200" dirty="0"/>
+                    </a:p>
+                  </a:txBody>
+                  <a:tcPr>
+                    <a:lnL w="9525">
+                      <a:solidFill>
+                        <a:srgbClr val="BFBFBF"/>
+                      </a:solidFill>
+                    </a:lnL>
+                    <a:lnR w="9525">
+                      <a:solidFill>
+                        <a:srgbClr val="BFBFBF"/>
+                      </a:solidFill>
+                    </a:lnR>
+                    <a:lnT w="9525">
+                      <a:solidFill>
+                        <a:srgbClr val="BFBFBF"/>
+                      </a:solidFill>
+                    </a:lnT>
+                    <a:lnB w="9525">
+                      <a:solidFill>
+                        <a:srgbClr val="BFBFBF"/>
+                      </a:solidFill>
+                    </a:lnB>
+                  </a:tcPr>
+                </a:tc>
+                <a:tc>
+                  <a:txBody>
+                    <a:bodyPr/>
+                    <a:lstStyle/>
+                    <a:p>
+                      <a:pPr>
+                        <a:buNone/>
+                      </a:pPr>
+                      <a:r>
+                        <a:rPr lang="en-US" sz="1200" dirty="0"/>
+                        <a:t>2.5</a:t>
+                      </a:r>
+                      <a:endParaRPr lang="en-US" sz="1200" dirty="0"/>
+                    </a:p>
+                  </a:txBody>
+                  <a:tcPr>
+                    <a:lnL w="9525">
+                      <a:solidFill>
+                        <a:srgbClr val="BFBFBF"/>
+                      </a:solidFill>
+                    </a:lnL>
+                    <a:lnR w="9525">
+                      <a:solidFill>
+                        <a:srgbClr val="BFBFBF"/>
+                      </a:solidFill>
+                    </a:lnR>
+                    <a:lnT w="9525">
+                      <a:solidFill>
+                        <a:srgbClr val="BFBFBF"/>
+                      </a:solidFill>
+                    </a:lnT>
+                    <a:lnB w="9525">
+                      <a:solidFill>
+                        <a:srgbClr val="BFBFBF"/>
+                      </a:solidFill>
+                    </a:lnB>
+                  </a:tcPr>
+                </a:tc>
+                <a:tc>
+                  <a:txBody>
+                    <a:bodyPr/>
+                    <a:lstStyle/>
+                    <a:p>
+                      <a:pPr>
+                        <a:buNone/>
+                      </a:pPr>
+                      <a:r>
+                        <a:rPr lang="en-US" sz="1200" dirty="0"/>
+                        <a:t>4.4000000000000004</a:t>
+                      </a:r>
+                      <a:endParaRPr lang="en-US" sz="1200" dirty="0"/>
+                    </a:p>
+                  </a:txBody>
+                  <a:tcPr>
+                    <a:lnL w="9525">
+                      <a:solidFill>
+                        <a:srgbClr val="BFBFBF"/>
+                      </a:solidFill>
+                    </a:lnL>
+                    <a:lnR w="9525">
+                      <a:solidFill>
+                        <a:srgbClr val="BFBFBF"/>
+                      </a:solidFill>
+                    </a:lnR>
+                    <a:lnT w="9525">
+                      <a:solidFill>
+                        <a:srgbClr val="BFBFBF"/>
+                      </a:solidFill>
+                    </a:lnT>
+                    <a:lnB w="9525">
+                      <a:solidFill>
+                        <a:srgbClr val="BFBFBF"/>
+                      </a:solidFill>
+                    </a:lnB>
+                  </a:tcPr>
+                </a:tc>
+                <a:tc>
+                  <a:txBody>
+                    <a:bodyPr/>
+                    <a:lstStyle/>
+                    <a:p>
+                      <a:pPr>
+                        <a:buNone/>
+                      </a:pPr>
+                      <a:r>
+                        <a:rPr lang="en-US" sz="1200" dirty="0"/>
+                        <a:t>2</a:t>
+                      </a:r>
+                      <a:endParaRPr lang="en-US" sz="1200" dirty="0"/>
+                    </a:p>
+                  </a:txBody>
+                  <a:tcPr>
+                    <a:lnL w="9525">
+                      <a:solidFill>
+                        <a:srgbClr val="BFBFBF"/>
+                      </a:solidFill>
+                    </a:lnL>
+                    <a:lnR w="9525">
+                      <a:solidFill>
+                        <a:srgbClr val="BFBFBF"/>
+                      </a:solidFill>
+                    </a:lnR>
+                    <a:lnT w="9525">
+                      <a:solidFill>
+                        <a:srgbClr val="BFBFBF"/>
+                      </a:solidFill>
+                    </a:lnT>
+                    <a:lnB w="9525">
+                      <a:solidFill>
+                        <a:srgbClr val="BFBFBF"/>
+                      </a:solidFill>
+                    </a:lnB>
+                  </a:tcPr>
+                </a:tc>
+              </a:tr>
+              <a:tr h="736600">
+                <a:tc>
+                  <a:txBody>
+                    <a:bodyPr/>
+                    <a:lstStyle/>
+                    <a:p>
+                      <a:pPr>
+                        <a:buNone/>
+                      </a:pPr>
+                      <a:r>
+                        <a:rPr lang="en-US" sz="1200" dirty="0"/>
+                        <a:t>Category 3</a:t>
+                      </a:r>
+                      <a:endParaRPr lang="en-US" sz="1200" dirty="0"/>
+                    </a:p>
+                  </a:txBody>
+                  <a:tcPr>
+                    <a:lnL w="9525">
+                      <a:solidFill>
+                        <a:srgbClr val="BFBFBF"/>
+                      </a:solidFill>
+                    </a:lnL>
+                    <a:lnR w="9525">
+                      <a:solidFill>
+                        <a:srgbClr val="BFBFBF"/>
+                      </a:solidFill>
+                    </a:lnR>
+                    <a:lnT w="9525">
+                      <a:solidFill>
+                        <a:srgbClr val="BFBFBF"/>
+                      </a:solidFill>
+                    </a:lnT>
+                    <a:lnB w="9525">
+                      <a:solidFill>
+                        <a:srgbClr val="BFBFBF"/>
+                      </a:solidFill>
+                    </a:lnB>
+                  </a:tcPr>
+                </a:tc>
+                <a:tc>
+                  <a:txBody>
+                    <a:bodyPr/>
+                    <a:lstStyle/>
+                    <a:p>
+                      <a:pPr>
+                        <a:buNone/>
+                      </a:pPr>
+                      <a:r>
+                        <a:rPr lang="en-US" sz="1200" dirty="0"/>
+                        <a:t>3.5</a:t>
+                      </a:r>
+                      <a:endParaRPr lang="en-US" sz="1200" dirty="0"/>
+                    </a:p>
+                  </a:txBody>
+                  <a:tcPr>
+                    <a:lnL w="9525">
+                      <a:solidFill>
+                        <a:srgbClr val="BFBFBF"/>
+                      </a:solidFill>
+                    </a:lnL>
+                    <a:lnR w="9525">
+                      <a:solidFill>
+                        <a:srgbClr val="BFBFBF"/>
+                      </a:solidFill>
+                    </a:lnR>
+                    <a:lnT w="9525">
+                      <a:solidFill>
+                        <a:srgbClr val="BFBFBF"/>
+                      </a:solidFill>
+                    </a:lnT>
+                    <a:lnB w="9525">
+                      <a:solidFill>
+                        <a:srgbClr val="BFBFBF"/>
+                      </a:solidFill>
+                    </a:lnB>
+                  </a:tcPr>
+                </a:tc>
+                <a:tc>
+                  <a:txBody>
+                    <a:bodyPr/>
+                    <a:lstStyle/>
+                    <a:p>
+                      <a:pPr>
+                        <a:buNone/>
+                      </a:pPr>
+                      <a:r>
+                        <a:rPr lang="en-US" sz="1200" dirty="0"/>
+                        <a:t>1.8</a:t>
+                      </a:r>
+                      <a:endParaRPr lang="en-US" sz="1200" dirty="0"/>
+                    </a:p>
+                  </a:txBody>
+                  <a:tcPr>
+                    <a:lnL w="9525">
+                      <a:solidFill>
+                        <a:srgbClr val="BFBFBF"/>
+                      </a:solidFill>
+                    </a:lnL>
+                    <a:lnR w="9525">
+                      <a:solidFill>
+                        <a:srgbClr val="BFBFBF"/>
+                      </a:solidFill>
+                    </a:lnR>
+                    <a:lnT w="9525">
+                      <a:solidFill>
+                        <a:srgbClr val="BFBFBF"/>
+                      </a:solidFill>
+                    </a:lnT>
+                    <a:lnB w="9525">
+                      <a:solidFill>
+                        <a:srgbClr val="BFBFBF"/>
+                      </a:solidFill>
+                    </a:lnB>
+                  </a:tcPr>
+                </a:tc>
+                <a:tc>
+                  <a:txBody>
+                    <a:bodyPr/>
+                    <a:lstStyle/>
+                    <a:p>
+                      <a:pPr>
+                        <a:buNone/>
+                      </a:pPr>
+                      <a:r>
+                        <a:rPr lang="en-US" sz="1200" dirty="0"/>
+                        <a:t>3</a:t>
+                      </a:r>
+                      <a:endParaRPr lang="en-US" sz="1200" dirty="0"/>
+                    </a:p>
+                  </a:txBody>
+                  <a:tcPr>
+                    <a:lnL w="9525">
+                      <a:solidFill>
+                        <a:srgbClr val="BFBFBF"/>
+                      </a:solidFill>
+                    </a:lnL>
+                    <a:lnR w="9525">
+                      <a:solidFill>
+                        <a:srgbClr val="BFBFBF"/>
+                      </a:solidFill>
+                    </a:lnR>
+                    <a:lnT w="9525">
+                      <a:solidFill>
+                        <a:srgbClr val="BFBFBF"/>
+                      </a:solidFill>
+                    </a:lnT>
+                    <a:lnB w="9525">
+                      <a:solidFill>
+                        <a:srgbClr val="BFBFBF"/>
+                      </a:solidFill>
+                    </a:lnB>
+                  </a:tcPr>
+                </a:tc>
+              </a:tr>
+              <a:tr h="736600">
+                <a:tc>
+                  <a:txBody>
+                    <a:bodyPr/>
+                    <a:lstStyle/>
+                    <a:p>
+                      <a:pPr>
+                        <a:buNone/>
+                      </a:pPr>
+                      <a:r>
+                        <a:rPr lang="en-US" sz="1200" dirty="0"/>
+                        <a:t>Category 4</a:t>
+                      </a:r>
+                      <a:endParaRPr lang="en-US" sz="1200" dirty="0"/>
+                    </a:p>
+                  </a:txBody>
+                  <a:tcPr>
+                    <a:lnL w="9525">
+                      <a:solidFill>
+                        <a:srgbClr val="BFBFBF"/>
+                      </a:solidFill>
+                    </a:lnL>
+                    <a:lnR w="9525">
+                      <a:solidFill>
+                        <a:srgbClr val="BFBFBF"/>
+                      </a:solidFill>
+                    </a:lnR>
+                    <a:lnT w="9525">
+                      <a:solidFill>
+                        <a:srgbClr val="BFBFBF"/>
+                      </a:solidFill>
+                    </a:lnT>
+                    <a:lnB w="9525">
+                      <a:solidFill>
+                        <a:srgbClr val="BFBFBF"/>
+                      </a:solidFill>
+                    </a:lnB>
+                  </a:tcPr>
+                </a:tc>
+                <a:tc>
+                  <a:txBody>
+                    <a:bodyPr/>
+                    <a:lstStyle/>
+                    <a:p>
+                      <a:pPr>
+                        <a:buNone/>
+                      </a:pPr>
+                      <a:r>
+                        <a:rPr lang="en-US" sz="1200" dirty="0"/>
+                        <a:t>4.5</a:t>
+                      </a:r>
+                      <a:endParaRPr lang="en-US" sz="1200" dirty="0"/>
+                    </a:p>
+                  </a:txBody>
+                  <a:tcPr>
+                    <a:lnL w="9525">
+                      <a:solidFill>
+                        <a:srgbClr val="BFBFBF"/>
+                      </a:solidFill>
+                    </a:lnL>
+                    <a:lnR w="9525">
+                      <a:solidFill>
+                        <a:srgbClr val="BFBFBF"/>
+                      </a:solidFill>
+                    </a:lnR>
+                    <a:lnT w="9525">
+                      <a:solidFill>
+                        <a:srgbClr val="BFBFBF"/>
+                      </a:solidFill>
+                    </a:lnT>
+                    <a:lnB w="9525">
+                      <a:solidFill>
+                        <a:srgbClr val="BFBFBF"/>
+                      </a:solidFill>
+                    </a:lnB>
+                  </a:tcPr>
+                </a:tc>
+                <a:tc>
+                  <a:txBody>
+                    <a:bodyPr/>
+                    <a:lstStyle/>
+                    <a:p>
+                      <a:pPr>
+                        <a:buNone/>
+                      </a:pPr>
+                      <a:r>
+                        <a:rPr lang="en-US" sz="1200" dirty="0"/>
+                        <a:t>2.8</a:t>
+                      </a:r>
+                      <a:endParaRPr lang="en-US" sz="1200" dirty="0"/>
+                    </a:p>
+                  </a:txBody>
+                  <a:tcPr>
+                    <a:lnL w="9525">
+                      <a:solidFill>
+                        <a:srgbClr val="BFBFBF"/>
+                      </a:solidFill>
+                    </a:lnL>
+                    <a:lnR w="9525">
+                      <a:solidFill>
+                        <a:srgbClr val="BFBFBF"/>
+                      </a:solidFill>
+                    </a:lnR>
+                    <a:lnT w="9525">
+                      <a:solidFill>
+                        <a:srgbClr val="BFBFBF"/>
+                      </a:solidFill>
+                    </a:lnT>
+                    <a:lnB w="9525">
+                      <a:solidFill>
+                        <a:srgbClr val="BFBFBF"/>
+                      </a:solidFill>
+                    </a:lnB>
+                  </a:tcPr>
+                </a:tc>
+                <a:tc>
+                  <a:txBody>
+                    <a:bodyPr/>
+                    <a:lstStyle/>
+                    <a:p>
+                      <a:pPr>
+                        <a:buNone/>
+                      </a:pPr>
+                      <a:r>
+                        <a:rPr lang="en-US" sz="1200" dirty="0"/>
+                        <a:t>5</a:t>
+                      </a:r>
+                      <a:endParaRPr lang="en-US" sz="1200" dirty="0"/>
+                    </a:p>
+                  </a:txBody>
+                  <a:tcPr>
+                    <a:lnL w="9525">
+                      <a:solidFill>
+                        <a:srgbClr val="BFBFBF"/>
+                      </a:solidFill>
+                    </a:lnL>
+                    <a:lnR w="9525">
+                      <a:solidFill>
+                        <a:srgbClr val="BFBFBF"/>
+                      </a:solidFill>
+                    </a:lnR>
+                    <a:lnT w="9525">
+                      <a:solidFill>
+                        <a:srgbClr val="BFBFBF"/>
+                      </a:solidFill>
+                    </a:lnT>
+                    <a:lnB w="9525">
+                      <a:solidFill>
+                        <a:srgbClr val="BFBFBF"/>
+                      </a:solidFill>
+                    </a:lnB>
+                  </a:tcPr>
+                </a:tc>
+              </a:tr>
+            </a:tbl>
+          </a:graphicData>
+        </a:graphic>
+      </p:graphicFrame>
+    </p:spTree>
+  </p:cSld>
+  <p:clrMapOvr>
+    <a:masterClrMapping/>
+  </p:clrMapOvr>
+</p:sld>
+</file>
+
 <file path=ppt/slides/slide3.xml><?xml version="1.0" encoding="utf-8"?>
 <p:sld xmlns:a="http://schemas.openxmlformats.org/drawingml/2006/main" xmlns:r="http://schemas.openxmlformats.org/officeDocument/2006/relationships" xmlns:p="http://schemas.openxmlformats.org/presentationml/2006/main">
   <p:cSld>

--- a/test/generator/baseline/gen.xlsx.to.pptx.pptx
+++ b/test/generator/baseline/gen.xlsx.to.pptx.pptx
@@ -23,8 +23,6 @@
     <p:sldId id="271" r:id="rId17"/>
     <p:sldId id="272" r:id="rId18"/>
     <p:sldId id="273" r:id="rId19"/>
-    <p:sldId id="274" r:id="rId20"/>
-    <p:sldId id="275" r:id="rId21"/>
   </p:sldIdLst>
   <p:sldSz cx="9144000" cy="5143500"/>
   <p:notesSz cx="6858000" cy="9144000"/>
@@ -4190,36 +4188,885 @@
             </a:pPr>
             <a:r>
               <a:rPr lang="en-US" sz="2800" b="1" dirty="0"/>
-              <a:t>Sheet7</a:t>
+              <a:t>Sheet8</a:t>
             </a:r>
             <a:endParaRPr lang="en-US" sz="2800" dirty="0"/>
           </a:p>
         </p:txBody>
       </p:sp>
-      <p:pic>
-        <p:nvPicPr>
-          <p:cNvPr id="3" name="Picture 3" descr="165 Inspirational Quotes To Keep You Motivated In Life"/>
-          <p:cNvPicPr>
-            <a:picLocks noChangeAspect="1"/>
-          </p:cNvPicPr>
+      <p:graphicFrame>
+        <p:nvGraphicFramePr>
+          <p:cNvPr id="3" name="Table 3"/>
+          <p:cNvGraphicFramePr>
+            <a:graphicFrameLocks noGrp="1"/>
+          </p:cNvGraphicFramePr>
           <p:nvPr/>
-        </p:nvPicPr>
-        <p:blipFill>
-          <a:blip r:embed="rId2"/>
-          <a:stretch>
-            <a:fillRect/>
-          </a:stretch>
-        </p:blipFill>
-        <p:spPr>
-          <a:xfrm>
-            <a:off x="2730500" y="1143000"/>
-            <a:ext cx="3683000" cy="3683000"/>
-          </a:xfrm>
-          <a:prstGeom prst="rect">
-            <a:avLst/>
-          </a:prstGeom>
-        </p:spPr>
-      </p:pic>
+        </p:nvGraphicFramePr>
+        <p:xfrm>
+          <a:off x="457200" y="1143000"/>
+          <a:ext cx="8229600" cy="3683000"/>
+        </p:xfrm>
+        <a:graphic>
+          <a:graphicData uri="http://schemas.openxmlformats.org/drawingml/2006/table">
+            <a:tbl>
+              <a:tblPr firstRow="1"/>
+              <a:tblGrid>
+                <a:gridCol w="4114800"/>
+                <a:gridCol w="4114800"/>
+              </a:tblGrid>
+              <a:tr h="334818">
+                <a:tc>
+                  <a:txBody>
+                    <a:bodyPr/>
+                    <a:lstStyle/>
+                    <a:p>
+                      <a:pPr>
+                        <a:buNone/>
+                      </a:pPr>
+                      <a:r>
+                        <a:rPr lang="en-US" sz="1400" b="1" dirty="0">
+                          <a:solidFill>
+                            <a:srgbClr val="365F91"/>
+                          </a:solidFill>
+                          <a:latin typeface="Ubuntu"/>
+                        </a:rPr>
+                        <a:t>Lists </a:t>
+                      </a:r>
+                      <a:endParaRPr lang="en-US" sz="1400" dirty="0"/>
+                    </a:p>
+                  </a:txBody>
+                  <a:tcPr>
+                    <a:lnL w="9525">
+                      <a:solidFill>
+                        <a:srgbClr val="BFBFBF"/>
+                      </a:solidFill>
+                    </a:lnL>
+                    <a:lnR w="9525">
+                      <a:solidFill>
+                        <a:srgbClr val="BFBFBF"/>
+                      </a:solidFill>
+                    </a:lnR>
+                    <a:lnT w="9525">
+                      <a:solidFill>
+                        <a:srgbClr val="BFBFBF"/>
+                      </a:solidFill>
+                    </a:lnT>
+                    <a:lnB w="9525">
+                      <a:solidFill>
+                        <a:srgbClr val="BFBFBF"/>
+                      </a:solidFill>
+                    </a:lnB>
+                  </a:tcPr>
+                </a:tc>
+                <a:tc>
+                  <a:txBody>
+                    <a:bodyPr/>
+                    <a:lstStyle/>
+                    <a:p/>
+                  </a:txBody>
+                  <a:tcPr>
+                    <a:lnL w="9525">
+                      <a:solidFill>
+                        <a:srgbClr val="BFBFBF"/>
+                      </a:solidFill>
+                    </a:lnL>
+                    <a:lnR w="9525">
+                      <a:solidFill>
+                        <a:srgbClr val="BFBFBF"/>
+                      </a:solidFill>
+                    </a:lnR>
+                    <a:lnT w="9525">
+                      <a:solidFill>
+                        <a:srgbClr val="BFBFBF"/>
+                      </a:solidFill>
+                    </a:lnT>
+                    <a:lnB w="9525">
+                      <a:solidFill>
+                        <a:srgbClr val="BFBFBF"/>
+                      </a:solidFill>
+                    </a:lnB>
+                  </a:tcPr>
+                </a:tc>
+              </a:tr>
+              <a:tr h="334818">
+                <a:tc>
+                  <a:txBody>
+                    <a:bodyPr/>
+                    <a:lstStyle/>
+                    <a:p>
+                      <a:pPr>
+                        <a:buNone/>
+                      </a:pPr>
+                      <a:r>
+                        <a:rPr lang="en-US" sz="1200" dirty="0">
+                          <a:latin typeface="Ubuntu"/>
+                        </a:rPr>
+                        <a:t>All types of lists are supported by the conversion, with the exception of lists that use fancy bullets, these get converted to regular bullets. </a:t>
+                      </a:r>
+                      <a:endParaRPr lang="en-US" sz="1200" dirty="0"/>
+                    </a:p>
+                  </a:txBody>
+                  <a:tcPr>
+                    <a:lnL w="9525">
+                      <a:solidFill>
+                        <a:srgbClr val="BFBFBF"/>
+                      </a:solidFill>
+                    </a:lnL>
+                    <a:lnR w="9525">
+                      <a:solidFill>
+                        <a:srgbClr val="BFBFBF"/>
+                      </a:solidFill>
+                    </a:lnR>
+                    <a:lnT w="9525">
+                      <a:solidFill>
+                        <a:srgbClr val="BFBFBF"/>
+                      </a:solidFill>
+                    </a:lnT>
+                    <a:lnB w="9525">
+                      <a:solidFill>
+                        <a:srgbClr val="BFBFBF"/>
+                      </a:solidFill>
+                    </a:lnB>
+                  </a:tcPr>
+                </a:tc>
+                <a:tc>
+                  <a:txBody>
+                    <a:bodyPr/>
+                    <a:lstStyle/>
+                    <a:p/>
+                  </a:txBody>
+                  <a:tcPr>
+                    <a:lnL w="9525">
+                      <a:solidFill>
+                        <a:srgbClr val="BFBFBF"/>
+                      </a:solidFill>
+                    </a:lnL>
+                    <a:lnR w="9525">
+                      <a:solidFill>
+                        <a:srgbClr val="BFBFBF"/>
+                      </a:solidFill>
+                    </a:lnR>
+                    <a:lnT w="9525">
+                      <a:solidFill>
+                        <a:srgbClr val="BFBFBF"/>
+                      </a:solidFill>
+                    </a:lnT>
+                    <a:lnB w="9525">
+                      <a:solidFill>
+                        <a:srgbClr val="BFBFBF"/>
+                      </a:solidFill>
+                    </a:lnB>
+                  </a:tcPr>
+                </a:tc>
+              </a:tr>
+              <a:tr h="334818">
+                <a:tc>
+                  <a:txBody>
+                    <a:bodyPr/>
+                    <a:lstStyle/>
+                    <a:p>
+                      <a:pPr>
+                        <a:buNone/>
+                      </a:pPr>
+                      <a:r>
+                        <a:rPr lang="en-US" sz="1300" b="1" dirty="0">
+                          <a:solidFill>
+                            <a:srgbClr val="4F81BD"/>
+                          </a:solidFill>
+                          <a:latin typeface="Ubuntu"/>
+                        </a:rPr>
+                        <a:t>Bulleted List </a:t>
+                      </a:r>
+                      <a:endParaRPr lang="en-US" sz="1300" dirty="0"/>
+                    </a:p>
+                  </a:txBody>
+                  <a:tcPr>
+                    <a:lnL w="9525">
+                      <a:solidFill>
+                        <a:srgbClr val="BFBFBF"/>
+                      </a:solidFill>
+                    </a:lnL>
+                    <a:lnR w="9525">
+                      <a:solidFill>
+                        <a:srgbClr val="BFBFBF"/>
+                      </a:solidFill>
+                    </a:lnR>
+                    <a:lnT w="9525">
+                      <a:solidFill>
+                        <a:srgbClr val="BFBFBF"/>
+                      </a:solidFill>
+                    </a:lnT>
+                    <a:lnB w="9525">
+                      <a:solidFill>
+                        <a:srgbClr val="BFBFBF"/>
+                      </a:solidFill>
+                    </a:lnB>
+                  </a:tcPr>
+                </a:tc>
+                <a:tc>
+                  <a:txBody>
+                    <a:bodyPr/>
+                    <a:lstStyle/>
+                    <a:p/>
+                  </a:txBody>
+                  <a:tcPr>
+                    <a:lnL w="9525">
+                      <a:solidFill>
+                        <a:srgbClr val="BFBFBF"/>
+                      </a:solidFill>
+                    </a:lnL>
+                    <a:lnR w="9525">
+                      <a:solidFill>
+                        <a:srgbClr val="BFBFBF"/>
+                      </a:solidFill>
+                    </a:lnR>
+                    <a:lnT w="9525">
+                      <a:solidFill>
+                        <a:srgbClr val="BFBFBF"/>
+                      </a:solidFill>
+                    </a:lnT>
+                    <a:lnB w="9525">
+                      <a:solidFill>
+                        <a:srgbClr val="BFBFBF"/>
+                      </a:solidFill>
+                    </a:lnB>
+                  </a:tcPr>
+                </a:tc>
+              </a:tr>
+              <a:tr h="334818">
+                <a:tc>
+                  <a:txBody>
+                    <a:bodyPr/>
+                    <a:lstStyle/>
+                    <a:p>
+                      <a:pPr>
+                        <a:buNone/>
+                      </a:pPr>
+                      <a:r>
+                        <a:rPr lang="en-US" sz="1200" dirty="0">
+                          <a:latin typeface="Ubuntu"/>
+                        </a:rPr>
+                        <a:t>One </a:t>
+                      </a:r>
+                      <a:endParaRPr lang="en-US" sz="1200" dirty="0"/>
+                    </a:p>
+                  </a:txBody>
+                  <a:tcPr>
+                    <a:lnL w="9525">
+                      <a:solidFill>
+                        <a:srgbClr val="BFBFBF"/>
+                      </a:solidFill>
+                    </a:lnL>
+                    <a:lnR w="9525">
+                      <a:solidFill>
+                        <a:srgbClr val="BFBFBF"/>
+                      </a:solidFill>
+                    </a:lnR>
+                    <a:lnT w="9525">
+                      <a:solidFill>
+                        <a:srgbClr val="BFBFBF"/>
+                      </a:solidFill>
+                    </a:lnT>
+                    <a:lnB w="9525">
+                      <a:solidFill>
+                        <a:srgbClr val="BFBFBF"/>
+                      </a:solidFill>
+                    </a:lnB>
+                  </a:tcPr>
+                </a:tc>
+                <a:tc>
+                  <a:txBody>
+                    <a:bodyPr/>
+                    <a:lstStyle/>
+                    <a:p/>
+                  </a:txBody>
+                  <a:tcPr>
+                    <a:lnL w="9525">
+                      <a:solidFill>
+                        <a:srgbClr val="BFBFBF"/>
+                      </a:solidFill>
+                    </a:lnL>
+                    <a:lnR w="9525">
+                      <a:solidFill>
+                        <a:srgbClr val="BFBFBF"/>
+                      </a:solidFill>
+                    </a:lnR>
+                    <a:lnT w="9525">
+                      <a:solidFill>
+                        <a:srgbClr val="BFBFBF"/>
+                      </a:solidFill>
+                    </a:lnT>
+                    <a:lnB w="9525">
+                      <a:solidFill>
+                        <a:srgbClr val="BFBFBF"/>
+                      </a:solidFill>
+                    </a:lnB>
+                  </a:tcPr>
+                </a:tc>
+              </a:tr>
+              <a:tr h="334818">
+                <a:tc>
+                  <a:txBody>
+                    <a:bodyPr/>
+                    <a:lstStyle/>
+                    <a:p>
+                      <a:pPr>
+                        <a:buNone/>
+                      </a:pPr>
+                      <a:r>
+                        <a:rPr lang="en-US" sz="1200" dirty="0">
+                          <a:latin typeface="Ubuntu"/>
+                        </a:rPr>
+                        <a:t>Two </a:t>
+                      </a:r>
+                      <a:endParaRPr lang="en-US" sz="1200" dirty="0"/>
+                    </a:p>
+                  </a:txBody>
+                  <a:tcPr>
+                    <a:lnL w="9525">
+                      <a:solidFill>
+                        <a:srgbClr val="BFBFBF"/>
+                      </a:solidFill>
+                    </a:lnL>
+                    <a:lnR w="9525">
+                      <a:solidFill>
+                        <a:srgbClr val="BFBFBF"/>
+                      </a:solidFill>
+                    </a:lnR>
+                    <a:lnT w="9525">
+                      <a:solidFill>
+                        <a:srgbClr val="BFBFBF"/>
+                      </a:solidFill>
+                    </a:lnT>
+                    <a:lnB w="9525">
+                      <a:solidFill>
+                        <a:srgbClr val="BFBFBF"/>
+                      </a:solidFill>
+                    </a:lnB>
+                  </a:tcPr>
+                </a:tc>
+                <a:tc>
+                  <a:txBody>
+                    <a:bodyPr/>
+                    <a:lstStyle/>
+                    <a:p/>
+                  </a:txBody>
+                  <a:tcPr>
+                    <a:lnL w="9525">
+                      <a:solidFill>
+                        <a:srgbClr val="BFBFBF"/>
+                      </a:solidFill>
+                    </a:lnL>
+                    <a:lnR w="9525">
+                      <a:solidFill>
+                        <a:srgbClr val="BFBFBF"/>
+                      </a:solidFill>
+                    </a:lnR>
+                    <a:lnT w="9525">
+                      <a:solidFill>
+                        <a:srgbClr val="BFBFBF"/>
+                      </a:solidFill>
+                    </a:lnT>
+                    <a:lnB w="9525">
+                      <a:solidFill>
+                        <a:srgbClr val="BFBFBF"/>
+                      </a:solidFill>
+                    </a:lnB>
+                  </a:tcPr>
+                </a:tc>
+              </a:tr>
+              <a:tr h="334818">
+                <a:tc>
+                  <a:txBody>
+                    <a:bodyPr/>
+                    <a:lstStyle/>
+                    <a:p>
+                      <a:pPr>
+                        <a:buNone/>
+                      </a:pPr>
+                      <a:r>
+                        <a:rPr lang="en-US" sz="1300" b="1" dirty="0">
+                          <a:solidFill>
+                            <a:srgbClr val="4F81BD"/>
+                          </a:solidFill>
+                          <a:latin typeface="Ubuntu"/>
+                        </a:rPr>
+                        <a:t>Numbered List </a:t>
+                      </a:r>
+                      <a:endParaRPr lang="en-US" sz="1300" dirty="0"/>
+                    </a:p>
+                  </a:txBody>
+                  <a:tcPr>
+                    <a:lnL w="9525">
+                      <a:solidFill>
+                        <a:srgbClr val="BFBFBF"/>
+                      </a:solidFill>
+                    </a:lnL>
+                    <a:lnR w="9525">
+                      <a:solidFill>
+                        <a:srgbClr val="BFBFBF"/>
+                      </a:solidFill>
+                    </a:lnR>
+                    <a:lnT w="9525">
+                      <a:solidFill>
+                        <a:srgbClr val="BFBFBF"/>
+                      </a:solidFill>
+                    </a:lnT>
+                    <a:lnB w="9525">
+                      <a:solidFill>
+                        <a:srgbClr val="BFBFBF"/>
+                      </a:solidFill>
+                    </a:lnB>
+                  </a:tcPr>
+                </a:tc>
+                <a:tc>
+                  <a:txBody>
+                    <a:bodyPr/>
+                    <a:lstStyle/>
+                    <a:p/>
+                  </a:txBody>
+                  <a:tcPr>
+                    <a:lnL w="9525">
+                      <a:solidFill>
+                        <a:srgbClr val="BFBFBF"/>
+                      </a:solidFill>
+                    </a:lnL>
+                    <a:lnR w="9525">
+                      <a:solidFill>
+                        <a:srgbClr val="BFBFBF"/>
+                      </a:solidFill>
+                    </a:lnR>
+                    <a:lnT w="9525">
+                      <a:solidFill>
+                        <a:srgbClr val="BFBFBF"/>
+                      </a:solidFill>
+                    </a:lnT>
+                    <a:lnB w="9525">
+                      <a:solidFill>
+                        <a:srgbClr val="BFBFBF"/>
+                      </a:solidFill>
+                    </a:lnB>
+                  </a:tcPr>
+                </a:tc>
+              </a:tr>
+              <a:tr h="334818">
+                <a:tc>
+                  <a:txBody>
+                    <a:bodyPr/>
+                    <a:lstStyle/>
+                    <a:p>
+                      <a:pPr>
+                        <a:buNone/>
+                      </a:pPr>
+                      <a:r>
+                        <a:rPr lang="en-US" sz="1200" dirty="0">
+                          <a:solidFill>
+                            <a:srgbClr val="000000"/>
+                          </a:solidFill>
+                          <a:latin typeface="Ubuntu"/>
+                        </a:rPr>
+                        <a:t>1</a:t>
+                      </a:r>
+                      <a:endParaRPr lang="en-US" sz="1200" dirty="0"/>
+                    </a:p>
+                  </a:txBody>
+                  <a:tcPr>
+                    <a:lnL w="9525">
+                      <a:solidFill>
+                        <a:srgbClr val="BFBFBF"/>
+                      </a:solidFill>
+                    </a:lnL>
+                    <a:lnR w="9525">
+                      <a:solidFill>
+                        <a:srgbClr val="BFBFBF"/>
+                      </a:solidFill>
+                    </a:lnR>
+                    <a:lnT w="9525">
+                      <a:solidFill>
+                        <a:srgbClr val="BFBFBF"/>
+                      </a:solidFill>
+                    </a:lnT>
+                    <a:lnB w="9525">
+                      <a:solidFill>
+                        <a:srgbClr val="BFBFBF"/>
+                      </a:solidFill>
+                    </a:lnB>
+                  </a:tcPr>
+                </a:tc>
+                <a:tc>
+                  <a:txBody>
+                    <a:bodyPr/>
+                    <a:lstStyle/>
+                    <a:p>
+                      <a:pPr>
+                        <a:buNone/>
+                      </a:pPr>
+                      <a:r>
+                        <a:rPr lang="en-US" sz="1200" dirty="0">
+                          <a:latin typeface="Ubuntu"/>
+                        </a:rPr>
+                        <a:t>One, with a very long line to demonstrate that the hanging indent for the list is working correctly </a:t>
+                      </a:r>
+                      <a:endParaRPr lang="en-US" sz="1200" dirty="0"/>
+                    </a:p>
+                  </a:txBody>
+                  <a:tcPr>
+                    <a:lnL w="9525">
+                      <a:solidFill>
+                        <a:srgbClr val="BFBFBF"/>
+                      </a:solidFill>
+                    </a:lnL>
+                    <a:lnR w="9525">
+                      <a:solidFill>
+                        <a:srgbClr val="BFBFBF"/>
+                      </a:solidFill>
+                    </a:lnR>
+                    <a:lnT w="9525">
+                      <a:solidFill>
+                        <a:srgbClr val="BFBFBF"/>
+                      </a:solidFill>
+                    </a:lnT>
+                    <a:lnB w="9525">
+                      <a:solidFill>
+                        <a:srgbClr val="BFBFBF"/>
+                      </a:solidFill>
+                    </a:lnB>
+                  </a:tcPr>
+                </a:tc>
+              </a:tr>
+              <a:tr h="334818">
+                <a:tc>
+                  <a:txBody>
+                    <a:bodyPr/>
+                    <a:lstStyle/>
+                    <a:p>
+                      <a:pPr>
+                        <a:buNone/>
+                      </a:pPr>
+                      <a:r>
+                        <a:rPr lang="en-US" sz="1200" dirty="0">
+                          <a:solidFill>
+                            <a:srgbClr val="000000"/>
+                          </a:solidFill>
+                          <a:latin typeface="Ubuntu"/>
+                        </a:rPr>
+                        <a:t>2</a:t>
+                      </a:r>
+                      <a:endParaRPr lang="en-US" sz="1200" dirty="0"/>
+                    </a:p>
+                  </a:txBody>
+                  <a:tcPr>
+                    <a:lnL w="9525">
+                      <a:solidFill>
+                        <a:srgbClr val="BFBFBF"/>
+                      </a:solidFill>
+                    </a:lnL>
+                    <a:lnR w="9525">
+                      <a:solidFill>
+                        <a:srgbClr val="BFBFBF"/>
+                      </a:solidFill>
+                    </a:lnR>
+                    <a:lnT w="9525">
+                      <a:solidFill>
+                        <a:srgbClr val="BFBFBF"/>
+                      </a:solidFill>
+                    </a:lnT>
+                    <a:lnB w="9525">
+                      <a:solidFill>
+                        <a:srgbClr val="BFBFBF"/>
+                      </a:solidFill>
+                    </a:lnB>
+                  </a:tcPr>
+                </a:tc>
+                <a:tc>
+                  <a:txBody>
+                    <a:bodyPr/>
+                    <a:lstStyle/>
+                    <a:p>
+                      <a:pPr>
+                        <a:buNone/>
+                      </a:pPr>
+                      <a:r>
+                        <a:rPr lang="en-US" sz="1200" dirty="0">
+                          <a:latin typeface="Ubuntu"/>
+                        </a:rPr>
+                        <a:t>Two </a:t>
+                      </a:r>
+                      <a:endParaRPr lang="en-US" sz="1200" dirty="0"/>
+                    </a:p>
+                  </a:txBody>
+                  <a:tcPr>
+                    <a:lnL w="9525">
+                      <a:solidFill>
+                        <a:srgbClr val="BFBFBF"/>
+                      </a:solidFill>
+                    </a:lnL>
+                    <a:lnR w="9525">
+                      <a:solidFill>
+                        <a:srgbClr val="BFBFBF"/>
+                      </a:solidFill>
+                    </a:lnR>
+                    <a:lnT w="9525">
+                      <a:solidFill>
+                        <a:srgbClr val="BFBFBF"/>
+                      </a:solidFill>
+                    </a:lnT>
+                    <a:lnB w="9525">
+                      <a:solidFill>
+                        <a:srgbClr val="BFBFBF"/>
+                      </a:solidFill>
+                    </a:lnB>
+                  </a:tcPr>
+                </a:tc>
+              </a:tr>
+              <a:tr h="334818">
+                <a:tc>
+                  <a:txBody>
+                    <a:bodyPr/>
+                    <a:lstStyle/>
+                    <a:p>
+                      <a:pPr>
+                        <a:buNone/>
+                      </a:pPr>
+                      <a:r>
+                        <a:rPr lang="en-US" sz="1300" b="1" dirty="0">
+                          <a:solidFill>
+                            <a:srgbClr val="4F81BD"/>
+                          </a:solidFill>
+                          <a:latin typeface="Ubuntu"/>
+                        </a:rPr>
+                        <a:t>Multi-level Lists </a:t>
+                      </a:r>
+                      <a:endParaRPr lang="en-US" sz="1300" dirty="0"/>
+                    </a:p>
+                  </a:txBody>
+                  <a:tcPr>
+                    <a:lnL w="9525">
+                      <a:solidFill>
+                        <a:srgbClr val="BFBFBF"/>
+                      </a:solidFill>
+                    </a:lnL>
+                    <a:lnR w="9525">
+                      <a:solidFill>
+                        <a:srgbClr val="BFBFBF"/>
+                      </a:solidFill>
+                    </a:lnR>
+                    <a:lnT w="9525">
+                      <a:solidFill>
+                        <a:srgbClr val="BFBFBF"/>
+                      </a:solidFill>
+                    </a:lnT>
+                    <a:lnB w="9525">
+                      <a:solidFill>
+                        <a:srgbClr val="BFBFBF"/>
+                      </a:solidFill>
+                    </a:lnB>
+                  </a:tcPr>
+                </a:tc>
+                <a:tc>
+                  <a:txBody>
+                    <a:bodyPr/>
+                    <a:lstStyle/>
+                    <a:p/>
+                  </a:txBody>
+                  <a:tcPr>
+                    <a:lnL w="9525">
+                      <a:solidFill>
+                        <a:srgbClr val="BFBFBF"/>
+                      </a:solidFill>
+                    </a:lnL>
+                    <a:lnR w="9525">
+                      <a:solidFill>
+                        <a:srgbClr val="BFBFBF"/>
+                      </a:solidFill>
+                    </a:lnR>
+                    <a:lnT w="9525">
+                      <a:solidFill>
+                        <a:srgbClr val="BFBFBF"/>
+                      </a:solidFill>
+                    </a:lnT>
+                    <a:lnB w="9525">
+                      <a:solidFill>
+                        <a:srgbClr val="BFBFBF"/>
+                      </a:solidFill>
+                    </a:lnB>
+                  </a:tcPr>
+                </a:tc>
+              </a:tr>
+              <a:tr h="334818">
+                <a:tc>
+                  <a:txBody>
+                    <a:bodyPr/>
+                    <a:lstStyle/>
+                    <a:p>
+                      <a:pPr>
+                        <a:buNone/>
+                      </a:pPr>
+                      <a:r>
+                        <a:rPr lang="en-US" sz="1200" dirty="0">
+                          <a:solidFill>
+                            <a:srgbClr val="000000"/>
+                          </a:solidFill>
+                          <a:latin typeface="Ubuntu"/>
+                        </a:rPr>
+                        <a:t>1</a:t>
+                      </a:r>
+                      <a:endParaRPr lang="en-US" sz="1200" dirty="0"/>
+                    </a:p>
+                  </a:txBody>
+                  <a:tcPr>
+                    <a:lnL w="9525">
+                      <a:solidFill>
+                        <a:srgbClr val="BFBFBF"/>
+                      </a:solidFill>
+                    </a:lnL>
+                    <a:lnR w="9525">
+                      <a:solidFill>
+                        <a:srgbClr val="BFBFBF"/>
+                      </a:solidFill>
+                    </a:lnR>
+                    <a:lnT w="9525">
+                      <a:solidFill>
+                        <a:srgbClr val="BFBFBF"/>
+                      </a:solidFill>
+                    </a:lnT>
+                    <a:lnB w="9525">
+                      <a:solidFill>
+                        <a:srgbClr val="BFBFBF"/>
+                      </a:solidFill>
+                    </a:lnB>
+                  </a:tcPr>
+                </a:tc>
+                <a:tc>
+                  <a:txBody>
+                    <a:bodyPr/>
+                    <a:lstStyle/>
+                    <a:p>
+                      <a:pPr>
+                        <a:buNone/>
+                      </a:pPr>
+                      <a:r>
+                        <a:rPr lang="en-US" sz="1200" dirty="0">
+                          <a:latin typeface="Ubuntu"/>
+                        </a:rPr>
+                        <a:t>One </a:t>
+                      </a:r>
+                      <a:endParaRPr lang="en-US" sz="1200" dirty="0"/>
+                    </a:p>
+                  </a:txBody>
+                  <a:tcPr>
+                    <a:lnL w="9525">
+                      <a:solidFill>
+                        <a:srgbClr val="BFBFBF"/>
+                      </a:solidFill>
+                    </a:lnL>
+                    <a:lnR w="9525">
+                      <a:solidFill>
+                        <a:srgbClr val="BFBFBF"/>
+                      </a:solidFill>
+                    </a:lnR>
+                    <a:lnT w="9525">
+                      <a:solidFill>
+                        <a:srgbClr val="BFBFBF"/>
+                      </a:solidFill>
+                    </a:lnT>
+                    <a:lnB w="9525">
+                      <a:solidFill>
+                        <a:srgbClr val="BFBFBF"/>
+                      </a:solidFill>
+                    </a:lnB>
+                  </a:tcPr>
+                </a:tc>
+              </a:tr>
+              <a:tr h="334818">
+                <a:tc>
+                  <a:txBody>
+                    <a:bodyPr/>
+                    <a:lstStyle/>
+                    <a:p>
+                      <a:pPr>
+                        <a:buNone/>
+                      </a:pPr>
+                      <a:r>
+                        <a:rPr lang="en-US" sz="1200" dirty="0">
+                          <a:solidFill>
+                            <a:srgbClr val="000000"/>
+                          </a:solidFill>
+                          <a:latin typeface="Ubuntu"/>
+                        </a:rPr>
+                        <a:t>1</a:t>
+                      </a:r>
+                      <a:endParaRPr lang="en-US" sz="1200" dirty="0"/>
+                    </a:p>
+                  </a:txBody>
+                  <a:tcPr>
+                    <a:lnL w="9525">
+                      <a:solidFill>
+                        <a:srgbClr val="BFBFBF"/>
+                      </a:solidFill>
+                    </a:lnL>
+                    <a:lnR w="9525">
+                      <a:solidFill>
+                        <a:srgbClr val="BFBFBF"/>
+                      </a:solidFill>
+                    </a:lnR>
+                    <a:lnT w="9525">
+                      <a:solidFill>
+                        <a:srgbClr val="BFBFBF"/>
+                      </a:solidFill>
+                    </a:lnT>
+                    <a:lnB w="9525">
+                      <a:solidFill>
+                        <a:srgbClr val="BFBFBF"/>
+                      </a:solidFill>
+                    </a:lnB>
+                  </a:tcPr>
+                </a:tc>
+                <a:tc>
+                  <a:txBody>
+                    <a:bodyPr/>
+                    <a:lstStyle/>
+                    <a:p>
+                      <a:pPr>
+                        <a:buNone/>
+                      </a:pPr>
+                      <a:r>
+                        <a:rPr lang="en-US" sz="1200" dirty="0">
+                          <a:latin typeface="Ubuntu"/>
+                        </a:rPr>
+                        <a:t>Two </a:t>
+                      </a:r>
+                      <a:endParaRPr lang="en-US" sz="1200" dirty="0"/>
+                    </a:p>
+                  </a:txBody>
+                  <a:tcPr>
+                    <a:lnL w="9525">
+                      <a:solidFill>
+                        <a:srgbClr val="BFBFBF"/>
+                      </a:solidFill>
+                    </a:lnL>
+                    <a:lnR w="9525">
+                      <a:solidFill>
+                        <a:srgbClr val="BFBFBF"/>
+                      </a:solidFill>
+                    </a:lnR>
+                    <a:lnT w="9525">
+                      <a:solidFill>
+                        <a:srgbClr val="BFBFBF"/>
+                      </a:solidFill>
+                    </a:lnT>
+                    <a:lnB w="9525">
+                      <a:solidFill>
+                        <a:srgbClr val="BFBFBF"/>
+                      </a:solidFill>
+                    </a:lnB>
+                  </a:tcPr>
+                </a:tc>
+              </a:tr>
+            </a:tbl>
+          </a:graphicData>
+        </a:graphic>
+      </p:graphicFrame>
     </p:spTree>
   </p:cSld>
   <p:clrMapOvr>
@@ -4386,41 +5233,55 @@
                       </a:pPr>
                       <a:r>
                         <a:rPr lang="en-US" sz="1200" dirty="0">
-                          <a:latin typeface="Ubuntu"/>
-                        </a:rPr>
-                        <a:t>All types of lists are supported by the conversion, with the exception of lists that use fancy bullets, these get converted to regular bullets. </a:t>
-                      </a:r>
-                      <a:endParaRPr lang="en-US" sz="1200" dirty="0"/>
-                    </a:p>
-                  </a:txBody>
-                  <a:tcPr>
-                    <a:lnL w="9525">
-                      <a:solidFill>
-                        <a:srgbClr val="BFBFBF"/>
-                      </a:solidFill>
-                    </a:lnL>
-                    <a:lnR w="9525">
-                      <a:solidFill>
-                        <a:srgbClr val="BFBFBF"/>
-                      </a:solidFill>
-                    </a:lnR>
-                    <a:lnT w="9525">
-                      <a:solidFill>
-                        <a:srgbClr val="BFBFBF"/>
-                      </a:solidFill>
-                    </a:lnT>
-                    <a:lnB w="9525">
-                      <a:solidFill>
-                        <a:srgbClr val="BFBFBF"/>
-                      </a:solidFill>
-                    </a:lnB>
-                  </a:tcPr>
-                </a:tc>
-                <a:tc>
-                  <a:txBody>
-                    <a:bodyPr/>
-                    <a:lstStyle/>
-                    <a:p/>
+                          <a:solidFill>
+                            <a:srgbClr val="000000"/>
+                          </a:solidFill>
+                          <a:latin typeface="Ubuntu"/>
+                        </a:rPr>
+                        <a:t>1</a:t>
+                      </a:r>
+                      <a:endParaRPr lang="en-US" sz="1200" dirty="0"/>
+                    </a:p>
+                  </a:txBody>
+                  <a:tcPr>
+                    <a:lnL w="9525">
+                      <a:solidFill>
+                        <a:srgbClr val="BFBFBF"/>
+                      </a:solidFill>
+                    </a:lnL>
+                    <a:lnR w="9525">
+                      <a:solidFill>
+                        <a:srgbClr val="BFBFBF"/>
+                      </a:solidFill>
+                    </a:lnR>
+                    <a:lnT w="9525">
+                      <a:solidFill>
+                        <a:srgbClr val="BFBFBF"/>
+                      </a:solidFill>
+                    </a:lnT>
+                    <a:lnB w="9525">
+                      <a:solidFill>
+                        <a:srgbClr val="BFBFBF"/>
+                      </a:solidFill>
+                    </a:lnB>
+                  </a:tcPr>
+                </a:tc>
+                <a:tc>
+                  <a:txBody>
+                    <a:bodyPr/>
+                    <a:lstStyle/>
+                    <a:p>
+                      <a:pPr>
+                        <a:buNone/>
+                      </a:pPr>
+                      <a:r>
+                        <a:rPr lang="en-US" sz="1200" dirty="0">
+                          <a:latin typeface="Ubuntu"/>
+                        </a:rPr>
+                        <a:t>Three </a:t>
+                      </a:r>
+                      <a:endParaRPr lang="en-US" sz="1200" dirty="0"/>
+                    </a:p>
                   </a:txBody>
                   <a:tcPr>
                     <a:lnL w="9525">
@@ -4456,45 +5317,56 @@
                         <a:buNone/>
                       </a:pPr>
                       <a:r>
-                        <a:rPr lang="en-US" sz="1300" b="1" dirty="0">
-                          <a:solidFill>
-                            <a:srgbClr val="4F81BD"/>
-                          </a:solidFill>
-                          <a:latin typeface="Ubuntu"/>
-                        </a:rPr>
-                        <a:t>Bulleted List </a:t>
-                      </a:r>
-                      <a:endParaRPr lang="en-US" sz="1300" dirty="0"/>
-                    </a:p>
-                  </a:txBody>
-                  <a:tcPr>
-                    <a:lnL w="9525">
-                      <a:solidFill>
-                        <a:srgbClr val="BFBFBF"/>
-                      </a:solidFill>
-                    </a:lnL>
-                    <a:lnR w="9525">
-                      <a:solidFill>
-                        <a:srgbClr val="BFBFBF"/>
-                      </a:solidFill>
-                    </a:lnR>
-                    <a:lnT w="9525">
-                      <a:solidFill>
-                        <a:srgbClr val="BFBFBF"/>
-                      </a:solidFill>
-                    </a:lnT>
-                    <a:lnB w="9525">
-                      <a:solidFill>
-                        <a:srgbClr val="BFBFBF"/>
-                      </a:solidFill>
-                    </a:lnB>
-                  </a:tcPr>
-                </a:tc>
-                <a:tc>
-                  <a:txBody>
-                    <a:bodyPr/>
-                    <a:lstStyle/>
-                    <a:p/>
+                        <a:rPr lang="en-US" sz="1200" dirty="0">
+                          <a:solidFill>
+                            <a:srgbClr val="000000"/>
+                          </a:solidFill>
+                          <a:latin typeface="Ubuntu"/>
+                        </a:rPr>
+                        <a:t>2</a:t>
+                      </a:r>
+                      <a:endParaRPr lang="en-US" sz="1200" dirty="0"/>
+                    </a:p>
+                  </a:txBody>
+                  <a:tcPr>
+                    <a:lnL w="9525">
+                      <a:solidFill>
+                        <a:srgbClr val="BFBFBF"/>
+                      </a:solidFill>
+                    </a:lnL>
+                    <a:lnR w="9525">
+                      <a:solidFill>
+                        <a:srgbClr val="BFBFBF"/>
+                      </a:solidFill>
+                    </a:lnR>
+                    <a:lnT w="9525">
+                      <a:solidFill>
+                        <a:srgbClr val="BFBFBF"/>
+                      </a:solidFill>
+                    </a:lnT>
+                    <a:lnB w="9525">
+                      <a:solidFill>
+                        <a:srgbClr val="BFBFBF"/>
+                      </a:solidFill>
+                    </a:lnB>
+                  </a:tcPr>
+                </a:tc>
+                <a:tc>
+                  <a:txBody>
+                    <a:bodyPr/>
+                    <a:lstStyle/>
+                    <a:p>
+                      <a:pPr>
+                        <a:buNone/>
+                      </a:pPr>
+                      <a:r>
+                        <a:rPr lang="en-US" sz="1200" dirty="0">
+                          <a:latin typeface="Ubuntu"/>
+                        </a:rPr>
+                        <a:t>Four with a very long line to demonstrate that the hanging indent for the list is working correctly. </a:t>
+                      </a:r>
+                      <a:endParaRPr lang="en-US" sz="1200" dirty="0"/>
+                    </a:p>
                   </a:txBody>
                   <a:tcPr>
                     <a:lnL w="9525">
@@ -4531,41 +5403,55 @@
                       </a:pPr>
                       <a:r>
                         <a:rPr lang="en-US" sz="1200" dirty="0">
-                          <a:latin typeface="Ubuntu"/>
-                        </a:rPr>
-                        <a:t>One </a:t>
-                      </a:r>
-                      <a:endParaRPr lang="en-US" sz="1200" dirty="0"/>
-                    </a:p>
-                  </a:txBody>
-                  <a:tcPr>
-                    <a:lnL w="9525">
-                      <a:solidFill>
-                        <a:srgbClr val="BFBFBF"/>
-                      </a:solidFill>
-                    </a:lnL>
-                    <a:lnR w="9525">
-                      <a:solidFill>
-                        <a:srgbClr val="BFBFBF"/>
-                      </a:solidFill>
-                    </a:lnR>
-                    <a:lnT w="9525">
-                      <a:solidFill>
-                        <a:srgbClr val="BFBFBF"/>
-                      </a:solidFill>
-                    </a:lnT>
-                    <a:lnB w="9525">
-                      <a:solidFill>
-                        <a:srgbClr val="BFBFBF"/>
-                      </a:solidFill>
-                    </a:lnB>
-                  </a:tcPr>
-                </a:tc>
-                <a:tc>
-                  <a:txBody>
-                    <a:bodyPr/>
-                    <a:lstStyle/>
-                    <a:p/>
+                          <a:solidFill>
+                            <a:srgbClr val="000000"/>
+                          </a:solidFill>
+                          <a:latin typeface="Ubuntu"/>
+                        </a:rPr>
+                        <a:t>3</a:t>
+                      </a:r>
+                      <a:endParaRPr lang="en-US" sz="1200" dirty="0"/>
+                    </a:p>
+                  </a:txBody>
+                  <a:tcPr>
+                    <a:lnL w="9525">
+                      <a:solidFill>
+                        <a:srgbClr val="BFBFBF"/>
+                      </a:solidFill>
+                    </a:lnL>
+                    <a:lnR w="9525">
+                      <a:solidFill>
+                        <a:srgbClr val="BFBFBF"/>
+                      </a:solidFill>
+                    </a:lnR>
+                    <a:lnT w="9525">
+                      <a:solidFill>
+                        <a:srgbClr val="BFBFBF"/>
+                      </a:solidFill>
+                    </a:lnT>
+                    <a:lnB w="9525">
+                      <a:solidFill>
+                        <a:srgbClr val="BFBFBF"/>
+                      </a:solidFill>
+                    </a:lnB>
+                  </a:tcPr>
+                </a:tc>
+                <a:tc>
+                  <a:txBody>
+                    <a:bodyPr/>
+                    <a:lstStyle/>
+                    <a:p>
+                      <a:pPr>
+                        <a:buNone/>
+                      </a:pPr>
+                      <a:r>
+                        <a:rPr lang="en-US" sz="1200" dirty="0">
+                          <a:latin typeface="Ubuntu"/>
+                        </a:rPr>
+                        <a:t>Five </a:t>
+                      </a:r>
+                      <a:endParaRPr lang="en-US" sz="1200" dirty="0"/>
+                    </a:p>
                   </a:txBody>
                   <a:tcPr>
                     <a:lnL w="9525">
@@ -4602,41 +5488,55 @@
                       </a:pPr>
                       <a:r>
                         <a:rPr lang="en-US" sz="1200" dirty="0">
-                          <a:latin typeface="Ubuntu"/>
-                        </a:rPr>
-                        <a:t>Two </a:t>
-                      </a:r>
-                      <a:endParaRPr lang="en-US" sz="1200" dirty="0"/>
-                    </a:p>
-                  </a:txBody>
-                  <a:tcPr>
-                    <a:lnL w="9525">
-                      <a:solidFill>
-                        <a:srgbClr val="BFBFBF"/>
-                      </a:solidFill>
-                    </a:lnL>
-                    <a:lnR w="9525">
-                      <a:solidFill>
-                        <a:srgbClr val="BFBFBF"/>
-                      </a:solidFill>
-                    </a:lnR>
-                    <a:lnT w="9525">
-                      <a:solidFill>
-                        <a:srgbClr val="BFBFBF"/>
-                      </a:solidFill>
-                    </a:lnT>
-                    <a:lnB w="9525">
-                      <a:solidFill>
-                        <a:srgbClr val="BFBFBF"/>
-                      </a:solidFill>
-                    </a:lnB>
-                  </a:tcPr>
-                </a:tc>
-                <a:tc>
-                  <a:txBody>
-                    <a:bodyPr/>
-                    <a:lstStyle/>
-                    <a:p/>
+                          <a:solidFill>
+                            <a:srgbClr val="000000"/>
+                          </a:solidFill>
+                          <a:latin typeface="Ubuntu"/>
+                        </a:rPr>
+                        <a:t>2</a:t>
+                      </a:r>
+                      <a:endParaRPr lang="en-US" sz="1200" dirty="0"/>
+                    </a:p>
+                  </a:txBody>
+                  <a:tcPr>
+                    <a:lnL w="9525">
+                      <a:solidFill>
+                        <a:srgbClr val="BFBFBF"/>
+                      </a:solidFill>
+                    </a:lnL>
+                    <a:lnR w="9525">
+                      <a:solidFill>
+                        <a:srgbClr val="BFBFBF"/>
+                      </a:solidFill>
+                    </a:lnR>
+                    <a:lnT w="9525">
+                      <a:solidFill>
+                        <a:srgbClr val="BFBFBF"/>
+                      </a:solidFill>
+                    </a:lnT>
+                    <a:lnB w="9525">
+                      <a:solidFill>
+                        <a:srgbClr val="BFBFBF"/>
+                      </a:solidFill>
+                    </a:lnB>
+                  </a:tcPr>
+                </a:tc>
+                <a:tc>
+                  <a:txBody>
+                    <a:bodyPr/>
+                    <a:lstStyle/>
+                    <a:p>
+                      <a:pPr>
+                        <a:buNone/>
+                      </a:pPr>
+                      <a:r>
+                        <a:rPr lang="en-US" sz="1200" dirty="0">
+                          <a:latin typeface="Ubuntu"/>
+                        </a:rPr>
+                        <a:t>Six </a:t>
+                      </a:r>
+                      <a:endParaRPr lang="en-US" sz="1200" dirty="0"/>
+                    </a:p>
                   </a:txBody>
                   <a:tcPr>
                     <a:lnL w="9525">
@@ -4672,15 +5572,12 @@
                         <a:buNone/>
                       </a:pPr>
                       <a:r>
-                        <a:rPr lang="en-US" sz="1300" b="1" dirty="0">
-                          <a:solidFill>
-                            <a:srgbClr val="4F81BD"/>
-                          </a:solidFill>
-                          <a:latin typeface="Ubuntu"/>
-                        </a:rPr>
-                        <a:t>Numbered List </a:t>
-                      </a:r>
-                      <a:endParaRPr lang="en-US" sz="1300" dirty="0"/>
+                        <a:rPr lang="en-US" sz="1200" dirty="0">
+                          <a:latin typeface="Ubuntu"/>
+                        </a:rPr>
+                        <a:t>A Multi-level list with bullets: </a:t>
+                      </a:r>
+                      <a:endParaRPr lang="en-US" sz="1200" dirty="0"/>
                     </a:p>
                   </a:txBody>
                   <a:tcPr>
@@ -4747,55 +5644,41 @@
                       </a:pPr>
                       <a:r>
                         <a:rPr lang="en-US" sz="1200" dirty="0">
-                          <a:solidFill>
-                            <a:srgbClr val="000000"/>
-                          </a:solidFill>
-                          <a:latin typeface="Ubuntu"/>
-                        </a:rPr>
-                        <a:t>1</a:t>
-                      </a:r>
-                      <a:endParaRPr lang="en-US" sz="1200" dirty="0"/>
-                    </a:p>
-                  </a:txBody>
-                  <a:tcPr>
-                    <a:lnL w="9525">
-                      <a:solidFill>
-                        <a:srgbClr val="BFBFBF"/>
-                      </a:solidFill>
-                    </a:lnL>
-                    <a:lnR w="9525">
-                      <a:solidFill>
-                        <a:srgbClr val="BFBFBF"/>
-                      </a:solidFill>
-                    </a:lnR>
-                    <a:lnT w="9525">
-                      <a:solidFill>
-                        <a:srgbClr val="BFBFBF"/>
-                      </a:solidFill>
-                    </a:lnT>
-                    <a:lnB w="9525">
-                      <a:solidFill>
-                        <a:srgbClr val="BFBFBF"/>
-                      </a:solidFill>
-                    </a:lnB>
-                  </a:tcPr>
-                </a:tc>
-                <a:tc>
-                  <a:txBody>
-                    <a:bodyPr/>
-                    <a:lstStyle/>
-                    <a:p>
-                      <a:pPr>
-                        <a:buNone/>
-                      </a:pPr>
-                      <a:r>
-                        <a:rPr lang="en-US" sz="1200" dirty="0">
-                          <a:latin typeface="Ubuntu"/>
-                        </a:rPr>
-                        <a:t>One, with a very long line to demonstrate that the hanging indent for the list is working correctly </a:t>
-                      </a:r>
-                      <a:endParaRPr lang="en-US" sz="1200" dirty="0"/>
-                    </a:p>
+                          <a:latin typeface="Ubuntu"/>
+                        </a:rPr>
+                        <a:t>One </a:t>
+                      </a:r>
+                      <a:endParaRPr lang="en-US" sz="1200" dirty="0"/>
+                    </a:p>
+                  </a:txBody>
+                  <a:tcPr>
+                    <a:lnL w="9525">
+                      <a:solidFill>
+                        <a:srgbClr val="BFBFBF"/>
+                      </a:solidFill>
+                    </a:lnL>
+                    <a:lnR w="9525">
+                      <a:solidFill>
+                        <a:srgbClr val="BFBFBF"/>
+                      </a:solidFill>
+                    </a:lnR>
+                    <a:lnT w="9525">
+                      <a:solidFill>
+                        <a:srgbClr val="BFBFBF"/>
+                      </a:solidFill>
+                    </a:lnT>
+                    <a:lnB w="9525">
+                      <a:solidFill>
+                        <a:srgbClr val="BFBFBF"/>
+                      </a:solidFill>
+                    </a:lnB>
+                  </a:tcPr>
+                </a:tc>
+                <a:tc>
+                  <a:txBody>
+                    <a:bodyPr/>
+                    <a:lstStyle/>
+                    <a:p/>
                   </a:txBody>
                   <a:tcPr>
                     <a:lnL w="9525">
@@ -4832,55 +5715,41 @@
                       </a:pPr>
                       <a:r>
                         <a:rPr lang="en-US" sz="1200" dirty="0">
-                          <a:solidFill>
-                            <a:srgbClr val="000000"/>
-                          </a:solidFill>
-                          <a:latin typeface="Ubuntu"/>
-                        </a:rPr>
-                        <a:t>2</a:t>
-                      </a:r>
-                      <a:endParaRPr lang="en-US" sz="1200" dirty="0"/>
-                    </a:p>
-                  </a:txBody>
-                  <a:tcPr>
-                    <a:lnL w="9525">
-                      <a:solidFill>
-                        <a:srgbClr val="BFBFBF"/>
-                      </a:solidFill>
-                    </a:lnL>
-                    <a:lnR w="9525">
-                      <a:solidFill>
-                        <a:srgbClr val="BFBFBF"/>
-                      </a:solidFill>
-                    </a:lnR>
-                    <a:lnT w="9525">
-                      <a:solidFill>
-                        <a:srgbClr val="BFBFBF"/>
-                      </a:solidFill>
-                    </a:lnT>
-                    <a:lnB w="9525">
-                      <a:solidFill>
-                        <a:srgbClr val="BFBFBF"/>
-                      </a:solidFill>
-                    </a:lnB>
-                  </a:tcPr>
-                </a:tc>
-                <a:tc>
-                  <a:txBody>
-                    <a:bodyPr/>
-                    <a:lstStyle/>
-                    <a:p>
-                      <a:pPr>
-                        <a:buNone/>
-                      </a:pPr>
-                      <a:r>
-                        <a:rPr lang="en-US" sz="1200" dirty="0">
                           <a:latin typeface="Ubuntu"/>
                         </a:rPr>
                         <a:t>Two </a:t>
                       </a:r>
                       <a:endParaRPr lang="en-US" sz="1200" dirty="0"/>
                     </a:p>
+                  </a:txBody>
+                  <a:tcPr>
+                    <a:lnL w="9525">
+                      <a:solidFill>
+                        <a:srgbClr val="BFBFBF"/>
+                      </a:solidFill>
+                    </a:lnL>
+                    <a:lnR w="9525">
+                      <a:solidFill>
+                        <a:srgbClr val="BFBFBF"/>
+                      </a:solidFill>
+                    </a:lnR>
+                    <a:lnT w="9525">
+                      <a:solidFill>
+                        <a:srgbClr val="BFBFBF"/>
+                      </a:solidFill>
+                    </a:lnT>
+                    <a:lnB w="9525">
+                      <a:solidFill>
+                        <a:srgbClr val="BFBFBF"/>
+                      </a:solidFill>
+                    </a:lnB>
+                  </a:tcPr>
+                </a:tc>
+                <a:tc>
+                  <a:txBody>
+                    <a:bodyPr/>
+                    <a:lstStyle/>
+                    <a:p/>
                   </a:txBody>
                   <a:tcPr>
                     <a:lnL w="9525">
@@ -4916,15 +5785,12 @@
                         <a:buNone/>
                       </a:pPr>
                       <a:r>
-                        <a:rPr lang="en-US" sz="1300" b="1" dirty="0">
-                          <a:solidFill>
-                            <a:srgbClr val="4F81BD"/>
-                          </a:solidFill>
-                          <a:latin typeface="Ubuntu"/>
-                        </a:rPr>
-                        <a:t>Multi-level Lists </a:t>
-                      </a:r>
-                      <a:endParaRPr lang="en-US" sz="1300" dirty="0"/>
+                        <a:rPr lang="en-US" sz="1200" dirty="0">
+                          <a:latin typeface="Ubuntu"/>
+                        </a:rPr>
+                        <a:t>This bullet uses an image as the bullet item </a:t>
+                      </a:r>
+                      <a:endParaRPr lang="en-US" sz="1200" dirty="0"/>
                     </a:p>
                   </a:txBody>
                   <a:tcPr>
@@ -4991,55 +5857,41 @@
                       </a:pPr>
                       <a:r>
                         <a:rPr lang="en-US" sz="1200" dirty="0">
-                          <a:solidFill>
-                            <a:srgbClr val="000000"/>
-                          </a:solidFill>
-                          <a:latin typeface="Ubuntu"/>
-                        </a:rPr>
-                        <a:t>1</a:t>
-                      </a:r>
-                      <a:endParaRPr lang="en-US" sz="1200" dirty="0"/>
-                    </a:p>
-                  </a:txBody>
-                  <a:tcPr>
-                    <a:lnL w="9525">
-                      <a:solidFill>
-                        <a:srgbClr val="BFBFBF"/>
-                      </a:solidFill>
-                    </a:lnL>
-                    <a:lnR w="9525">
-                      <a:solidFill>
-                        <a:srgbClr val="BFBFBF"/>
-                      </a:solidFill>
-                    </a:lnR>
-                    <a:lnT w="9525">
-                      <a:solidFill>
-                        <a:srgbClr val="BFBFBF"/>
-                      </a:solidFill>
-                    </a:lnT>
-                    <a:lnB w="9525">
-                      <a:solidFill>
-                        <a:srgbClr val="BFBFBF"/>
-                      </a:solidFill>
-                    </a:lnB>
-                  </a:tcPr>
-                </a:tc>
-                <a:tc>
-                  <a:txBody>
-                    <a:bodyPr/>
-                    <a:lstStyle/>
-                    <a:p>
-                      <a:pPr>
-                        <a:buNone/>
-                      </a:pPr>
-                      <a:r>
-                        <a:rPr lang="en-US" sz="1200" dirty="0">
-                          <a:latin typeface="Ubuntu"/>
-                        </a:rPr>
-                        <a:t>One </a:t>
-                      </a:r>
-                      <a:endParaRPr lang="en-US" sz="1200" dirty="0"/>
-                    </a:p>
+                          <a:latin typeface="Ubuntu"/>
+                        </a:rPr>
+                        <a:t>Four </a:t>
+                      </a:r>
+                      <a:endParaRPr lang="en-US" sz="1200" dirty="0"/>
+                    </a:p>
+                  </a:txBody>
+                  <a:tcPr>
+                    <a:lnL w="9525">
+                      <a:solidFill>
+                        <a:srgbClr val="BFBFBF"/>
+                      </a:solidFill>
+                    </a:lnL>
+                    <a:lnR w="9525">
+                      <a:solidFill>
+                        <a:srgbClr val="BFBFBF"/>
+                      </a:solidFill>
+                    </a:lnR>
+                    <a:lnT w="9525">
+                      <a:solidFill>
+                        <a:srgbClr val="BFBFBF"/>
+                      </a:solidFill>
+                    </a:lnT>
+                    <a:lnB w="9525">
+                      <a:solidFill>
+                        <a:srgbClr val="BFBFBF"/>
+                      </a:solidFill>
+                    </a:lnB>
+                  </a:tcPr>
+                </a:tc>
+                <a:tc>
+                  <a:txBody>
+                    <a:bodyPr/>
+                    <a:lstStyle/>
+                    <a:p/>
                   </a:txBody>
                   <a:tcPr>
                     <a:lnL w="9525">
@@ -5076,55 +5928,41 @@
                       </a:pPr>
                       <a:r>
                         <a:rPr lang="en-US" sz="1200" dirty="0">
-                          <a:solidFill>
-                            <a:srgbClr val="000000"/>
-                          </a:solidFill>
-                          <a:latin typeface="Ubuntu"/>
-                        </a:rPr>
-                        <a:t>1</a:t>
-                      </a:r>
-                      <a:endParaRPr lang="en-US" sz="1200" dirty="0"/>
-                    </a:p>
-                  </a:txBody>
-                  <a:tcPr>
-                    <a:lnL w="9525">
-                      <a:solidFill>
-                        <a:srgbClr val="BFBFBF"/>
-                      </a:solidFill>
-                    </a:lnL>
-                    <a:lnR w="9525">
-                      <a:solidFill>
-                        <a:srgbClr val="BFBFBF"/>
-                      </a:solidFill>
-                    </a:lnR>
-                    <a:lnT w="9525">
-                      <a:solidFill>
-                        <a:srgbClr val="BFBFBF"/>
-                      </a:solidFill>
-                    </a:lnT>
-                    <a:lnB w="9525">
-                      <a:solidFill>
-                        <a:srgbClr val="BFBFBF"/>
-                      </a:solidFill>
-                    </a:lnB>
-                  </a:tcPr>
-                </a:tc>
-                <a:tc>
-                  <a:txBody>
-                    <a:bodyPr/>
-                    <a:lstStyle/>
-                    <a:p>
-                      <a:pPr>
-                        <a:buNone/>
-                      </a:pPr>
-                      <a:r>
-                        <a:rPr lang="en-US" sz="1200" dirty="0">
-                          <a:latin typeface="Ubuntu"/>
-                        </a:rPr>
-                        <a:t>Two </a:t>
-                      </a:r>
-                      <a:endParaRPr lang="en-US" sz="1200" dirty="0"/>
-                    </a:p>
+                          <a:latin typeface="Ubuntu"/>
+                        </a:rPr>
+                        <a:t>Five </a:t>
+                      </a:r>
+                      <a:endParaRPr lang="en-US" sz="1200" dirty="0"/>
+                    </a:p>
+                  </a:txBody>
+                  <a:tcPr>
+                    <a:lnL w="9525">
+                      <a:solidFill>
+                        <a:srgbClr val="BFBFBF"/>
+                      </a:solidFill>
+                    </a:lnL>
+                    <a:lnR w="9525">
+                      <a:solidFill>
+                        <a:srgbClr val="BFBFBF"/>
+                      </a:solidFill>
+                    </a:lnR>
+                    <a:lnT w="9525">
+                      <a:solidFill>
+                        <a:srgbClr val="BFBFBF"/>
+                      </a:solidFill>
+                    </a:lnT>
+                    <a:lnB w="9525">
+                      <a:solidFill>
+                        <a:srgbClr val="BFBFBF"/>
+                      </a:solidFill>
+                    </a:lnB>
+                  </a:tcPr>
+                </a:tc>
+                <a:tc>
+                  <a:txBody>
+                    <a:bodyPr/>
+                    <a:lstStyle/>
+                    <a:p/>
                   </a:txBody>
                   <a:tcPr>
                     <a:lnL w="9525">
@@ -5235,7 +6073,7 @@
                 <a:gridCol w="4114800"/>
                 <a:gridCol w="4114800"/>
               </a:tblGrid>
-              <a:tr h="334818">
+              <a:tr h="526143">
                 <a:tc>
                   <a:txBody>
                     <a:bodyPr/>
@@ -5309,7 +6147,81 @@
                   </a:tcPr>
                 </a:tc>
               </a:tr>
-              <a:tr h="334818">
+              <a:tr h="526143">
+                <a:tc>
+                  <a:txBody>
+                    <a:bodyPr/>
+                    <a:lstStyle/>
+                    <a:p>
+                      <a:pPr>
+                        <a:buNone/>
+                      </a:pPr>
+                      <a:r>
+                        <a:rPr lang="en-US" sz="1300" b="1" dirty="0">
+                          <a:solidFill>
+                            <a:srgbClr val="4F81BD"/>
+                          </a:solidFill>
+                          <a:latin typeface="Ubuntu"/>
+                        </a:rPr>
+                        <a:t>Continued Lists </a:t>
+                      </a:r>
+                      <a:endParaRPr lang="en-US" sz="1300" dirty="0"/>
+                    </a:p>
+                  </a:txBody>
+                  <a:tcPr>
+                    <a:lnL w="9525">
+                      <a:solidFill>
+                        <a:srgbClr val="BFBFBF"/>
+                      </a:solidFill>
+                    </a:lnL>
+                    <a:lnR w="9525">
+                      <a:solidFill>
+                        <a:srgbClr val="BFBFBF"/>
+                      </a:solidFill>
+                    </a:lnR>
+                    <a:lnT w="9525">
+                      <a:solidFill>
+                        <a:srgbClr val="BFBFBF"/>
+                      </a:solidFill>
+                    </a:lnT>
+                    <a:lnB w="9525">
+                      <a:solidFill>
+                        <a:srgbClr val="BFBFBF"/>
+                      </a:solidFill>
+                    </a:lnB>
+                  </a:tcPr>
+                </a:tc>
+                <a:tc>
+                  <a:txBody>
+                    <a:bodyPr/>
+                    <a:lstStyle/>
+                    <a:p/>
+                  </a:txBody>
+                  <a:tcPr>
+                    <a:lnL w="9525">
+                      <a:solidFill>
+                        <a:srgbClr val="BFBFBF"/>
+                      </a:solidFill>
+                    </a:lnL>
+                    <a:lnR w="9525">
+                      <a:solidFill>
+                        <a:srgbClr val="BFBFBF"/>
+                      </a:solidFill>
+                    </a:lnR>
+                    <a:lnT w="9525">
+                      <a:solidFill>
+                        <a:srgbClr val="BFBFBF"/>
+                      </a:solidFill>
+                    </a:lnT>
+                    <a:lnB w="9525">
+                      <a:solidFill>
+                        <a:srgbClr val="BFBFBF"/>
+                      </a:solidFill>
+                    </a:lnB>
+                  </a:tcPr>
+                </a:tc>
+              </a:tr>
+              <a:tr h="526143">
                 <a:tc>
                   <a:txBody>
                     <a:bodyPr/>
@@ -5325,47 +6237,47 @@
                           </a:solidFill>
                           <a:latin typeface="Ubuntu"/>
                         </a:rPr>
-                        <a:t>1</a:t>
-                      </a:r>
-                      <a:endParaRPr lang="en-US" sz="1200" dirty="0"/>
-                    </a:p>
-                  </a:txBody>
-                  <a:tcPr>
-                    <a:lnL w="9525">
-                      <a:solidFill>
-                        <a:srgbClr val="BFBFBF"/>
-                      </a:solidFill>
-                    </a:lnL>
-                    <a:lnR w="9525">
-                      <a:solidFill>
-                        <a:srgbClr val="BFBFBF"/>
-                      </a:solidFill>
-                    </a:lnR>
-                    <a:lnT w="9525">
-                      <a:solidFill>
-                        <a:srgbClr val="BFBFBF"/>
-                      </a:solidFill>
-                    </a:lnT>
-                    <a:lnB w="9525">
-                      <a:solidFill>
-                        <a:srgbClr val="BFBFBF"/>
-                      </a:solidFill>
-                    </a:lnB>
-                  </a:tcPr>
-                </a:tc>
-                <a:tc>
-                  <a:txBody>
-                    <a:bodyPr/>
-                    <a:lstStyle/>
-                    <a:p>
-                      <a:pPr>
-                        <a:buNone/>
-                      </a:pPr>
-                      <a:r>
-                        <a:rPr lang="en-US" sz="1200" dirty="0">
-                          <a:latin typeface="Ubuntu"/>
-                        </a:rPr>
-                        <a:t>Three </a:t>
+                        <a:t>i</a:t>
+                      </a:r>
+                      <a:endParaRPr lang="en-US" sz="1200" dirty="0"/>
+                    </a:p>
+                  </a:txBody>
+                  <a:tcPr>
+                    <a:lnL w="9525">
+                      <a:solidFill>
+                        <a:srgbClr val="BFBFBF"/>
+                      </a:solidFill>
+                    </a:lnL>
+                    <a:lnR w="9525">
+                      <a:solidFill>
+                        <a:srgbClr val="BFBFBF"/>
+                      </a:solidFill>
+                    </a:lnR>
+                    <a:lnT w="9525">
+                      <a:solidFill>
+                        <a:srgbClr val="BFBFBF"/>
+                      </a:solidFill>
+                    </a:lnT>
+                    <a:lnB w="9525">
+                      <a:solidFill>
+                        <a:srgbClr val="BFBFBF"/>
+                      </a:solidFill>
+                    </a:lnB>
+                  </a:tcPr>
+                </a:tc>
+                <a:tc>
+                  <a:txBody>
+                    <a:bodyPr/>
+                    <a:lstStyle/>
+                    <a:p>
+                      <a:pPr>
+                        <a:buNone/>
+                      </a:pPr>
+                      <a:r>
+                        <a:rPr lang="en-US" sz="1200" dirty="0">
+                          <a:latin typeface="Ubuntu"/>
+                        </a:rPr>
+                        <a:t>One </a:t>
                       </a:r>
                       <a:endParaRPr lang="en-US" sz="1200" dirty="0"/>
                     </a:p>
@@ -5394,7 +6306,7 @@
                   </a:tcPr>
                 </a:tc>
               </a:tr>
-              <a:tr h="334818">
+              <a:tr h="526143">
                 <a:tc>
                   <a:txBody>
                     <a:bodyPr/>
@@ -5410,47 +6322,47 @@
                           </a:solidFill>
                           <a:latin typeface="Ubuntu"/>
                         </a:rPr>
-                        <a:t>2</a:t>
-                      </a:r>
-                      <a:endParaRPr lang="en-US" sz="1200" dirty="0"/>
-                    </a:p>
-                  </a:txBody>
-                  <a:tcPr>
-                    <a:lnL w="9525">
-                      <a:solidFill>
-                        <a:srgbClr val="BFBFBF"/>
-                      </a:solidFill>
-                    </a:lnL>
-                    <a:lnR w="9525">
-                      <a:solidFill>
-                        <a:srgbClr val="BFBFBF"/>
-                      </a:solidFill>
-                    </a:lnR>
-                    <a:lnT w="9525">
-                      <a:solidFill>
-                        <a:srgbClr val="BFBFBF"/>
-                      </a:solidFill>
-                    </a:lnT>
-                    <a:lnB w="9525">
-                      <a:solidFill>
-                        <a:srgbClr val="BFBFBF"/>
-                      </a:solidFill>
-                    </a:lnB>
-                  </a:tcPr>
-                </a:tc>
-                <a:tc>
-                  <a:txBody>
-                    <a:bodyPr/>
-                    <a:lstStyle/>
-                    <a:p>
-                      <a:pPr>
-                        <a:buNone/>
-                      </a:pPr>
-                      <a:r>
-                        <a:rPr lang="en-US" sz="1200" dirty="0">
-                          <a:latin typeface="Ubuntu"/>
-                        </a:rPr>
-                        <a:t>Four with a very long line to demonstrate that the hanging indent for the list is working correctly. </a:t>
+                        <a:t>ii</a:t>
+                      </a:r>
+                      <a:endParaRPr lang="en-US" sz="1200" dirty="0"/>
+                    </a:p>
+                  </a:txBody>
+                  <a:tcPr>
+                    <a:lnL w="9525">
+                      <a:solidFill>
+                        <a:srgbClr val="BFBFBF"/>
+                      </a:solidFill>
+                    </a:lnL>
+                    <a:lnR w="9525">
+                      <a:solidFill>
+                        <a:srgbClr val="BFBFBF"/>
+                      </a:solidFill>
+                    </a:lnR>
+                    <a:lnT w="9525">
+                      <a:solidFill>
+                        <a:srgbClr val="BFBFBF"/>
+                      </a:solidFill>
+                    </a:lnT>
+                    <a:lnB w="9525">
+                      <a:solidFill>
+                        <a:srgbClr val="BFBFBF"/>
+                      </a:solidFill>
+                    </a:lnB>
+                  </a:tcPr>
+                </a:tc>
+                <a:tc>
+                  <a:txBody>
+                    <a:bodyPr/>
+                    <a:lstStyle/>
+                    <a:p>
+                      <a:pPr>
+                        <a:buNone/>
+                      </a:pPr>
+                      <a:r>
+                        <a:rPr lang="en-US" sz="1200" dirty="0">
+                          <a:latin typeface="Ubuntu"/>
+                        </a:rPr>
+                        <a:t>Two </a:t>
                       </a:r>
                       <a:endParaRPr lang="en-US" sz="1200" dirty="0"/>
                     </a:p>
@@ -5479,7 +6391,78 @@
                   </a:tcPr>
                 </a:tc>
               </a:tr>
-              <a:tr h="334818">
+              <a:tr h="526143">
+                <a:tc>
+                  <a:txBody>
+                    <a:bodyPr/>
+                    <a:lstStyle/>
+                    <a:p>
+                      <a:pPr>
+                        <a:buNone/>
+                      </a:pPr>
+                      <a:r>
+                        <a:rPr lang="en-US" sz="1200" dirty="0">
+                          <a:latin typeface="Ubuntu"/>
+                        </a:rPr>
+                        <a:t>An interruption in our regularly scheduled listing, for this essential and very relevant public service announcement. </a:t>
+                      </a:r>
+                      <a:endParaRPr lang="en-US" sz="1200" dirty="0"/>
+                    </a:p>
+                  </a:txBody>
+                  <a:tcPr>
+                    <a:lnL w="9525">
+                      <a:solidFill>
+                        <a:srgbClr val="BFBFBF"/>
+                      </a:solidFill>
+                    </a:lnL>
+                    <a:lnR w="9525">
+                      <a:solidFill>
+                        <a:srgbClr val="BFBFBF"/>
+                      </a:solidFill>
+                    </a:lnR>
+                    <a:lnT w="9525">
+                      <a:solidFill>
+                        <a:srgbClr val="BFBFBF"/>
+                      </a:solidFill>
+                    </a:lnT>
+                    <a:lnB w="9525">
+                      <a:solidFill>
+                        <a:srgbClr val="BFBFBF"/>
+                      </a:solidFill>
+                    </a:lnB>
+                  </a:tcPr>
+                </a:tc>
+                <a:tc>
+                  <a:txBody>
+                    <a:bodyPr/>
+                    <a:lstStyle/>
+                    <a:p/>
+                  </a:txBody>
+                  <a:tcPr>
+                    <a:lnL w="9525">
+                      <a:solidFill>
+                        <a:srgbClr val="BFBFBF"/>
+                      </a:solidFill>
+                    </a:lnL>
+                    <a:lnR w="9525">
+                      <a:solidFill>
+                        <a:srgbClr val="BFBFBF"/>
+                      </a:solidFill>
+                    </a:lnR>
+                    <a:lnT w="9525">
+                      <a:solidFill>
+                        <a:srgbClr val="BFBFBF"/>
+                      </a:solidFill>
+                    </a:lnT>
+                    <a:lnB w="9525">
+                      <a:solidFill>
+                        <a:srgbClr val="BFBFBF"/>
+                      </a:solidFill>
+                    </a:lnB>
+                  </a:tcPr>
+                </a:tc>
+              </a:tr>
+              <a:tr h="526143">
                 <a:tc>
                   <a:txBody>
                     <a:bodyPr/>
@@ -5495,47 +6478,47 @@
                           </a:solidFill>
                           <a:latin typeface="Ubuntu"/>
                         </a:rPr>
-                        <a:t>3</a:t>
-                      </a:r>
-                      <a:endParaRPr lang="en-US" sz="1200" dirty="0"/>
-                    </a:p>
-                  </a:txBody>
-                  <a:tcPr>
-                    <a:lnL w="9525">
-                      <a:solidFill>
-                        <a:srgbClr val="BFBFBF"/>
-                      </a:solidFill>
-                    </a:lnL>
-                    <a:lnR w="9525">
-                      <a:solidFill>
-                        <a:srgbClr val="BFBFBF"/>
-                      </a:solidFill>
-                    </a:lnR>
-                    <a:lnT w="9525">
-                      <a:solidFill>
-                        <a:srgbClr val="BFBFBF"/>
-                      </a:solidFill>
-                    </a:lnT>
-                    <a:lnB w="9525">
-                      <a:solidFill>
-                        <a:srgbClr val="BFBFBF"/>
-                      </a:solidFill>
-                    </a:lnB>
-                  </a:tcPr>
-                </a:tc>
-                <a:tc>
-                  <a:txBody>
-                    <a:bodyPr/>
-                    <a:lstStyle/>
-                    <a:p>
-                      <a:pPr>
-                        <a:buNone/>
-                      </a:pPr>
-                      <a:r>
-                        <a:rPr lang="en-US" sz="1200" dirty="0">
-                          <a:latin typeface="Ubuntu"/>
-                        </a:rPr>
-                        <a:t>Five </a:t>
+                        <a:t>iii</a:t>
+                      </a:r>
+                      <a:endParaRPr lang="en-US" sz="1200" dirty="0"/>
+                    </a:p>
+                  </a:txBody>
+                  <a:tcPr>
+                    <a:lnL w="9525">
+                      <a:solidFill>
+                        <a:srgbClr val="BFBFBF"/>
+                      </a:solidFill>
+                    </a:lnL>
+                    <a:lnR w="9525">
+                      <a:solidFill>
+                        <a:srgbClr val="BFBFBF"/>
+                      </a:solidFill>
+                    </a:lnR>
+                    <a:lnT w="9525">
+                      <a:solidFill>
+                        <a:srgbClr val="BFBFBF"/>
+                      </a:solidFill>
+                    </a:lnT>
+                    <a:lnB w="9525">
+                      <a:solidFill>
+                        <a:srgbClr val="BFBFBF"/>
+                      </a:solidFill>
+                    </a:lnB>
+                  </a:tcPr>
+                </a:tc>
+                <a:tc>
+                  <a:txBody>
+                    <a:bodyPr/>
+                    <a:lstStyle/>
+                    <a:p>
+                      <a:pPr>
+                        <a:buNone/>
+                      </a:pPr>
+                      <a:r>
+                        <a:rPr lang="en-US" sz="1200" dirty="0">
+                          <a:latin typeface="Ubuntu"/>
+                        </a:rPr>
+                        <a:t>We now resume our normal programming </a:t>
                       </a:r>
                       <a:endParaRPr lang="en-US" sz="1200" dirty="0"/>
                     </a:p>
@@ -5564,7 +6547,7 @@
                   </a:tcPr>
                 </a:tc>
               </a:tr>
-              <a:tr h="334818">
+              <a:tr h="526143">
                 <a:tc>
                   <a:txBody>
                     <a:bodyPr/>
@@ -5580,360 +6563,34 @@
                           </a:solidFill>
                           <a:latin typeface="Ubuntu"/>
                         </a:rPr>
-                        <a:t>2</a:t>
-                      </a:r>
-                      <a:endParaRPr lang="en-US" sz="1200" dirty="0"/>
-                    </a:p>
-                  </a:txBody>
-                  <a:tcPr>
-                    <a:lnL w="9525">
-                      <a:solidFill>
-                        <a:srgbClr val="BFBFBF"/>
-                      </a:solidFill>
-                    </a:lnL>
-                    <a:lnR w="9525">
-                      <a:solidFill>
-                        <a:srgbClr val="BFBFBF"/>
-                      </a:solidFill>
-                    </a:lnR>
-                    <a:lnT w="9525">
-                      <a:solidFill>
-                        <a:srgbClr val="BFBFBF"/>
-                      </a:solidFill>
-                    </a:lnT>
-                    <a:lnB w="9525">
-                      <a:solidFill>
-                        <a:srgbClr val="BFBFBF"/>
-                      </a:solidFill>
-                    </a:lnB>
-                  </a:tcPr>
-                </a:tc>
-                <a:tc>
-                  <a:txBody>
-                    <a:bodyPr/>
-                    <a:lstStyle/>
-                    <a:p>
-                      <a:pPr>
-                        <a:buNone/>
-                      </a:pPr>
-                      <a:r>
-                        <a:rPr lang="en-US" sz="1200" dirty="0">
-                          <a:latin typeface="Ubuntu"/>
-                        </a:rPr>
-                        <a:t>Six </a:t>
-                      </a:r>
-                      <a:endParaRPr lang="en-US" sz="1200" dirty="0"/>
-                    </a:p>
-                  </a:txBody>
-                  <a:tcPr>
-                    <a:lnL w="9525">
-                      <a:solidFill>
-                        <a:srgbClr val="BFBFBF"/>
-                      </a:solidFill>
-                    </a:lnL>
-                    <a:lnR w="9525">
-                      <a:solidFill>
-                        <a:srgbClr val="BFBFBF"/>
-                      </a:solidFill>
-                    </a:lnR>
-                    <a:lnT w="9525">
-                      <a:solidFill>
-                        <a:srgbClr val="BFBFBF"/>
-                      </a:solidFill>
-                    </a:lnT>
-                    <a:lnB w="9525">
-                      <a:solidFill>
-                        <a:srgbClr val="BFBFBF"/>
-                      </a:solidFill>
-                    </a:lnB>
-                  </a:tcPr>
-                </a:tc>
-              </a:tr>
-              <a:tr h="334818">
-                <a:tc>
-                  <a:txBody>
-                    <a:bodyPr/>
-                    <a:lstStyle/>
-                    <a:p>
-                      <a:pPr>
-                        <a:buNone/>
-                      </a:pPr>
-                      <a:r>
-                        <a:rPr lang="en-US" sz="1200" dirty="0">
-                          <a:latin typeface="Ubuntu"/>
-                        </a:rPr>
-                        <a:t>A Multi-level list with bullets: </a:t>
-                      </a:r>
-                      <a:endParaRPr lang="en-US" sz="1200" dirty="0"/>
-                    </a:p>
-                  </a:txBody>
-                  <a:tcPr>
-                    <a:lnL w="9525">
-                      <a:solidFill>
-                        <a:srgbClr val="BFBFBF"/>
-                      </a:solidFill>
-                    </a:lnL>
-                    <a:lnR w="9525">
-                      <a:solidFill>
-                        <a:srgbClr val="BFBFBF"/>
-                      </a:solidFill>
-                    </a:lnR>
-                    <a:lnT w="9525">
-                      <a:solidFill>
-                        <a:srgbClr val="BFBFBF"/>
-                      </a:solidFill>
-                    </a:lnT>
-                    <a:lnB w="9525">
-                      <a:solidFill>
-                        <a:srgbClr val="BFBFBF"/>
-                      </a:solidFill>
-                    </a:lnB>
-                  </a:tcPr>
-                </a:tc>
-                <a:tc>
-                  <a:txBody>
-                    <a:bodyPr/>
-                    <a:lstStyle/>
-                    <a:p/>
-                  </a:txBody>
-                  <a:tcPr>
-                    <a:lnL w="9525">
-                      <a:solidFill>
-                        <a:srgbClr val="BFBFBF"/>
-                      </a:solidFill>
-                    </a:lnL>
-                    <a:lnR w="9525">
-                      <a:solidFill>
-                        <a:srgbClr val="BFBFBF"/>
-                      </a:solidFill>
-                    </a:lnR>
-                    <a:lnT w="9525">
-                      <a:solidFill>
-                        <a:srgbClr val="BFBFBF"/>
-                      </a:solidFill>
-                    </a:lnT>
-                    <a:lnB w="9525">
-                      <a:solidFill>
-                        <a:srgbClr val="BFBFBF"/>
-                      </a:solidFill>
-                    </a:lnB>
-                  </a:tcPr>
-                </a:tc>
-              </a:tr>
-              <a:tr h="334818">
-                <a:tc>
-                  <a:txBody>
-                    <a:bodyPr/>
-                    <a:lstStyle/>
-                    <a:p>
-                      <a:pPr>
-                        <a:buNone/>
-                      </a:pPr>
-                      <a:r>
-                        <a:rPr lang="en-US" sz="1200" dirty="0">
-                          <a:latin typeface="Ubuntu"/>
-                        </a:rPr>
-                        <a:t>One </a:t>
-                      </a:r>
-                      <a:endParaRPr lang="en-US" sz="1200" dirty="0"/>
-                    </a:p>
-                  </a:txBody>
-                  <a:tcPr>
-                    <a:lnL w="9525">
-                      <a:solidFill>
-                        <a:srgbClr val="BFBFBF"/>
-                      </a:solidFill>
-                    </a:lnL>
-                    <a:lnR w="9525">
-                      <a:solidFill>
-                        <a:srgbClr val="BFBFBF"/>
-                      </a:solidFill>
-                    </a:lnR>
-                    <a:lnT w="9525">
-                      <a:solidFill>
-                        <a:srgbClr val="BFBFBF"/>
-                      </a:solidFill>
-                    </a:lnT>
-                    <a:lnB w="9525">
-                      <a:solidFill>
-                        <a:srgbClr val="BFBFBF"/>
-                      </a:solidFill>
-                    </a:lnB>
-                  </a:tcPr>
-                </a:tc>
-                <a:tc>
-                  <a:txBody>
-                    <a:bodyPr/>
-                    <a:lstStyle/>
-                    <a:p/>
-                  </a:txBody>
-                  <a:tcPr>
-                    <a:lnL w="9525">
-                      <a:solidFill>
-                        <a:srgbClr val="BFBFBF"/>
-                      </a:solidFill>
-                    </a:lnL>
-                    <a:lnR w="9525">
-                      <a:solidFill>
-                        <a:srgbClr val="BFBFBF"/>
-                      </a:solidFill>
-                    </a:lnR>
-                    <a:lnT w="9525">
-                      <a:solidFill>
-                        <a:srgbClr val="BFBFBF"/>
-                      </a:solidFill>
-                    </a:lnT>
-                    <a:lnB w="9525">
-                      <a:solidFill>
-                        <a:srgbClr val="BFBFBF"/>
-                      </a:solidFill>
-                    </a:lnB>
-                  </a:tcPr>
-                </a:tc>
-              </a:tr>
-              <a:tr h="334818">
-                <a:tc>
-                  <a:txBody>
-                    <a:bodyPr/>
-                    <a:lstStyle/>
-                    <a:p>
-                      <a:pPr>
-                        <a:buNone/>
-                      </a:pPr>
-                      <a:r>
-                        <a:rPr lang="en-US" sz="1200" dirty="0">
-                          <a:latin typeface="Ubuntu"/>
-                        </a:rPr>
-                        <a:t>Two </a:t>
-                      </a:r>
-                      <a:endParaRPr lang="en-US" sz="1200" dirty="0"/>
-                    </a:p>
-                  </a:txBody>
-                  <a:tcPr>
-                    <a:lnL w="9525">
-                      <a:solidFill>
-                        <a:srgbClr val="BFBFBF"/>
-                      </a:solidFill>
-                    </a:lnL>
-                    <a:lnR w="9525">
-                      <a:solidFill>
-                        <a:srgbClr val="BFBFBF"/>
-                      </a:solidFill>
-                    </a:lnR>
-                    <a:lnT w="9525">
-                      <a:solidFill>
-                        <a:srgbClr val="BFBFBF"/>
-                      </a:solidFill>
-                    </a:lnT>
-                    <a:lnB w="9525">
-                      <a:solidFill>
-                        <a:srgbClr val="BFBFBF"/>
-                      </a:solidFill>
-                    </a:lnB>
-                  </a:tcPr>
-                </a:tc>
-                <a:tc>
-                  <a:txBody>
-                    <a:bodyPr/>
-                    <a:lstStyle/>
-                    <a:p/>
-                  </a:txBody>
-                  <a:tcPr>
-                    <a:lnL w="9525">
-                      <a:solidFill>
-                        <a:srgbClr val="BFBFBF"/>
-                      </a:solidFill>
-                    </a:lnL>
-                    <a:lnR w="9525">
-                      <a:solidFill>
-                        <a:srgbClr val="BFBFBF"/>
-                      </a:solidFill>
-                    </a:lnR>
-                    <a:lnT w="9525">
-                      <a:solidFill>
-                        <a:srgbClr val="BFBFBF"/>
-                      </a:solidFill>
-                    </a:lnT>
-                    <a:lnB w="9525">
-                      <a:solidFill>
-                        <a:srgbClr val="BFBFBF"/>
-                      </a:solidFill>
-                    </a:lnB>
-                  </a:tcPr>
-                </a:tc>
-              </a:tr>
-              <a:tr h="334818">
-                <a:tc>
-                  <a:txBody>
-                    <a:bodyPr/>
-                    <a:lstStyle/>
-                    <a:p>
-                      <a:pPr>
-                        <a:buNone/>
-                      </a:pPr>
-                      <a:r>
-                        <a:rPr lang="en-US" sz="1200" dirty="0">
-                          <a:latin typeface="Ubuntu"/>
-                        </a:rPr>
-                        <a:t>This bullet uses an image as the bullet item </a:t>
-                      </a:r>
-                      <a:endParaRPr lang="en-US" sz="1200" dirty="0"/>
-                    </a:p>
-                  </a:txBody>
-                  <a:tcPr>
-                    <a:lnL w="9525">
-                      <a:solidFill>
-                        <a:srgbClr val="BFBFBF"/>
-                      </a:solidFill>
-                    </a:lnL>
-                    <a:lnR w="9525">
-                      <a:solidFill>
-                        <a:srgbClr val="BFBFBF"/>
-                      </a:solidFill>
-                    </a:lnR>
-                    <a:lnT w="9525">
-                      <a:solidFill>
-                        <a:srgbClr val="BFBFBF"/>
-                      </a:solidFill>
-                    </a:lnT>
-                    <a:lnB w="9525">
-                      <a:solidFill>
-                        <a:srgbClr val="BFBFBF"/>
-                      </a:solidFill>
-                    </a:lnB>
-                  </a:tcPr>
-                </a:tc>
-                <a:tc>
-                  <a:txBody>
-                    <a:bodyPr/>
-                    <a:lstStyle/>
-                    <a:p/>
-                  </a:txBody>
-                  <a:tcPr>
-                    <a:lnL w="9525">
-                      <a:solidFill>
-                        <a:srgbClr val="BFBFBF"/>
-                      </a:solidFill>
-                    </a:lnL>
-                    <a:lnR w="9525">
-                      <a:solidFill>
-                        <a:srgbClr val="BFBFBF"/>
-                      </a:solidFill>
-                    </a:lnR>
-                    <a:lnT w="9525">
-                      <a:solidFill>
-                        <a:srgbClr val="BFBFBF"/>
-                      </a:solidFill>
-                    </a:lnT>
-                    <a:lnB w="9525">
-                      <a:solidFill>
-                        <a:srgbClr val="BFBFBF"/>
-                      </a:solidFill>
-                    </a:lnB>
-                  </a:tcPr>
-                </a:tc>
-              </a:tr>
-              <a:tr h="334818">
+                        <a:t>iv</a:t>
+                      </a:r>
+                      <a:endParaRPr lang="en-US" sz="1200" dirty="0"/>
+                    </a:p>
+                  </a:txBody>
+                  <a:tcPr>
+                    <a:lnL w="9525">
+                      <a:solidFill>
+                        <a:srgbClr val="BFBFBF"/>
+                      </a:solidFill>
+                    </a:lnL>
+                    <a:lnR w="9525">
+                      <a:solidFill>
+                        <a:srgbClr val="BFBFBF"/>
+                      </a:solidFill>
+                    </a:lnR>
+                    <a:lnT w="9525">
+                      <a:solidFill>
+                        <a:srgbClr val="BFBFBF"/>
+                      </a:solidFill>
+                    </a:lnT>
+                    <a:lnB w="9525">
+                      <a:solidFill>
+                        <a:srgbClr val="BFBFBF"/>
+                      </a:solidFill>
+                    </a:lnB>
+                  </a:tcPr>
+                </a:tc>
                 <a:tc>
                   <a:txBody>
                     <a:bodyPr/>
@@ -5950,106 +6607,6 @@
                       </a:r>
                       <a:endParaRPr lang="en-US" sz="1200" dirty="0"/>
                     </a:p>
-                  </a:txBody>
-                  <a:tcPr>
-                    <a:lnL w="9525">
-                      <a:solidFill>
-                        <a:srgbClr val="BFBFBF"/>
-                      </a:solidFill>
-                    </a:lnL>
-                    <a:lnR w="9525">
-                      <a:solidFill>
-                        <a:srgbClr val="BFBFBF"/>
-                      </a:solidFill>
-                    </a:lnR>
-                    <a:lnT w="9525">
-                      <a:solidFill>
-                        <a:srgbClr val="BFBFBF"/>
-                      </a:solidFill>
-                    </a:lnT>
-                    <a:lnB w="9525">
-                      <a:solidFill>
-                        <a:srgbClr val="BFBFBF"/>
-                      </a:solidFill>
-                    </a:lnB>
-                  </a:tcPr>
-                </a:tc>
-                <a:tc>
-                  <a:txBody>
-                    <a:bodyPr/>
-                    <a:lstStyle/>
-                    <a:p/>
-                  </a:txBody>
-                  <a:tcPr>
-                    <a:lnL w="9525">
-                      <a:solidFill>
-                        <a:srgbClr val="BFBFBF"/>
-                      </a:solidFill>
-                    </a:lnL>
-                    <a:lnR w="9525">
-                      <a:solidFill>
-                        <a:srgbClr val="BFBFBF"/>
-                      </a:solidFill>
-                    </a:lnR>
-                    <a:lnT w="9525">
-                      <a:solidFill>
-                        <a:srgbClr val="BFBFBF"/>
-                      </a:solidFill>
-                    </a:lnT>
-                    <a:lnB w="9525">
-                      <a:solidFill>
-                        <a:srgbClr val="BFBFBF"/>
-                      </a:solidFill>
-                    </a:lnB>
-                  </a:tcPr>
-                </a:tc>
-              </a:tr>
-              <a:tr h="334818">
-                <a:tc>
-                  <a:txBody>
-                    <a:bodyPr/>
-                    <a:lstStyle/>
-                    <a:p>
-                      <a:pPr>
-                        <a:buNone/>
-                      </a:pPr>
-                      <a:r>
-                        <a:rPr lang="en-US" sz="1200" dirty="0">
-                          <a:latin typeface="Ubuntu"/>
-                        </a:rPr>
-                        <a:t>Five </a:t>
-                      </a:r>
-                      <a:endParaRPr lang="en-US" sz="1200" dirty="0"/>
-                    </a:p>
-                  </a:txBody>
-                  <a:tcPr>
-                    <a:lnL w="9525">
-                      <a:solidFill>
-                        <a:srgbClr val="BFBFBF"/>
-                      </a:solidFill>
-                    </a:lnL>
-                    <a:lnR w="9525">
-                      <a:solidFill>
-                        <a:srgbClr val="BFBFBF"/>
-                      </a:solidFill>
-                    </a:lnR>
-                    <a:lnT w="9525">
-                      <a:solidFill>
-                        <a:srgbClr val="BFBFBF"/>
-                      </a:solidFill>
-                    </a:lnT>
-                    <a:lnB w="9525">
-                      <a:solidFill>
-                        <a:srgbClr val="BFBFBF"/>
-                      </a:solidFill>
-                    </a:lnB>
-                  </a:tcPr>
-                </a:tc>
-                <a:tc>
-                  <a:txBody>
-                    <a:bodyPr/>
-                    <a:lstStyle/>
-                    <a:p/>
                   </a:txBody>
                   <a:tcPr>
                     <a:lnL w="9525">
@@ -6088,650 +6645,6 @@
 </file>
 
 <file path=ppt/slides/slide17.xml><?xml version="1.0" encoding="utf-8"?>
-<p:sld xmlns:a="http://schemas.openxmlformats.org/drawingml/2006/main" xmlns:r="http://schemas.openxmlformats.org/officeDocument/2006/relationships" xmlns:p="http://schemas.openxmlformats.org/presentationml/2006/main">
-  <p:cSld>
-    <p:spTree>
-      <p:nvGrpSpPr>
-        <p:cNvPr id="1" name=""/>
-        <p:cNvGrpSpPr/>
-        <p:nvPr/>
-      </p:nvGrpSpPr>
-      <p:grpSpPr>
-        <a:xfrm>
-          <a:off x="0" y="0"/>
-          <a:ext cx="0" cy="0"/>
-          <a:chOff x="0" y="0"/>
-          <a:chExt cx="0" cy="0"/>
-        </a:xfrm>
-      </p:grpSpPr>
-      <p:sp>
-        <p:nvSpPr>
-          <p:cNvPr id="2" name="Title 2"/>
-          <p:cNvSpPr txBox="1"/>
-          <p:nvPr/>
-        </p:nvSpPr>
-        <p:spPr>
-          <a:xfrm>
-            <a:off x="457200" y="279400"/>
-            <a:ext cx="8229600" cy="711200"/>
-          </a:xfrm>
-          <a:prstGeom prst="rect">
-            <a:avLst/>
-          </a:prstGeom>
-          <a:noFill/>
-          <a:ln>
-            <a:noFill/>
-          </a:ln>
-        </p:spPr>
-        <p:txBody>
-          <a:bodyPr wrap="square" anchor="b" rtlCol="0">
-            <a:normAutofit/>
-          </a:bodyPr>
-          <a:lstStyle/>
-          <a:p>
-            <a:pPr>
-              <a:buNone/>
-            </a:pPr>
-            <a:r>
-              <a:rPr lang="en-US" sz="2800" b="1" dirty="0"/>
-              <a:t>Sheet8</a:t>
-            </a:r>
-            <a:endParaRPr lang="en-US" sz="2800" dirty="0"/>
-          </a:p>
-        </p:txBody>
-      </p:sp>
-      <p:graphicFrame>
-        <p:nvGraphicFramePr>
-          <p:cNvPr id="3" name="Table 3"/>
-          <p:cNvGraphicFramePr>
-            <a:graphicFrameLocks noGrp="1"/>
-          </p:cNvGraphicFramePr>
-          <p:nvPr/>
-        </p:nvGraphicFramePr>
-        <p:xfrm>
-          <a:off x="457200" y="1143000"/>
-          <a:ext cx="8229600" cy="3683000"/>
-        </p:xfrm>
-        <a:graphic>
-          <a:graphicData uri="http://schemas.openxmlformats.org/drawingml/2006/table">
-            <a:tbl>
-              <a:tblPr firstRow="1"/>
-              <a:tblGrid>
-                <a:gridCol w="4114800"/>
-                <a:gridCol w="4114800"/>
-              </a:tblGrid>
-              <a:tr h="526143">
-                <a:tc>
-                  <a:txBody>
-                    <a:bodyPr/>
-                    <a:lstStyle/>
-                    <a:p>
-                      <a:pPr>
-                        <a:buNone/>
-                      </a:pPr>
-                      <a:r>
-                        <a:rPr lang="en-US" sz="1400" b="1" dirty="0">
-                          <a:solidFill>
-                            <a:srgbClr val="365F91"/>
-                          </a:solidFill>
-                          <a:latin typeface="Ubuntu"/>
-                        </a:rPr>
-                        <a:t>Lists </a:t>
-                      </a:r>
-                      <a:endParaRPr lang="en-US" sz="1400" dirty="0"/>
-                    </a:p>
-                  </a:txBody>
-                  <a:tcPr>
-                    <a:lnL w="9525">
-                      <a:solidFill>
-                        <a:srgbClr val="BFBFBF"/>
-                      </a:solidFill>
-                    </a:lnL>
-                    <a:lnR w="9525">
-                      <a:solidFill>
-                        <a:srgbClr val="BFBFBF"/>
-                      </a:solidFill>
-                    </a:lnR>
-                    <a:lnT w="9525">
-                      <a:solidFill>
-                        <a:srgbClr val="BFBFBF"/>
-                      </a:solidFill>
-                    </a:lnT>
-                    <a:lnB w="9525">
-                      <a:solidFill>
-                        <a:srgbClr val="BFBFBF"/>
-                      </a:solidFill>
-                    </a:lnB>
-                  </a:tcPr>
-                </a:tc>
-                <a:tc>
-                  <a:txBody>
-                    <a:bodyPr/>
-                    <a:lstStyle/>
-                    <a:p/>
-                  </a:txBody>
-                  <a:tcPr>
-                    <a:lnL w="9525">
-                      <a:solidFill>
-                        <a:srgbClr val="BFBFBF"/>
-                      </a:solidFill>
-                    </a:lnL>
-                    <a:lnR w="9525">
-                      <a:solidFill>
-                        <a:srgbClr val="BFBFBF"/>
-                      </a:solidFill>
-                    </a:lnR>
-                    <a:lnT w="9525">
-                      <a:solidFill>
-                        <a:srgbClr val="BFBFBF"/>
-                      </a:solidFill>
-                    </a:lnT>
-                    <a:lnB w="9525">
-                      <a:solidFill>
-                        <a:srgbClr val="BFBFBF"/>
-                      </a:solidFill>
-                    </a:lnB>
-                  </a:tcPr>
-                </a:tc>
-              </a:tr>
-              <a:tr h="526143">
-                <a:tc>
-                  <a:txBody>
-                    <a:bodyPr/>
-                    <a:lstStyle/>
-                    <a:p>
-                      <a:pPr>
-                        <a:buNone/>
-                      </a:pPr>
-                      <a:r>
-                        <a:rPr lang="en-US" sz="1300" b="1" dirty="0">
-                          <a:solidFill>
-                            <a:srgbClr val="4F81BD"/>
-                          </a:solidFill>
-                          <a:latin typeface="Ubuntu"/>
-                        </a:rPr>
-                        <a:t>Continued Lists </a:t>
-                      </a:r>
-                      <a:endParaRPr lang="en-US" sz="1300" dirty="0"/>
-                    </a:p>
-                  </a:txBody>
-                  <a:tcPr>
-                    <a:lnL w="9525">
-                      <a:solidFill>
-                        <a:srgbClr val="BFBFBF"/>
-                      </a:solidFill>
-                    </a:lnL>
-                    <a:lnR w="9525">
-                      <a:solidFill>
-                        <a:srgbClr val="BFBFBF"/>
-                      </a:solidFill>
-                    </a:lnR>
-                    <a:lnT w="9525">
-                      <a:solidFill>
-                        <a:srgbClr val="BFBFBF"/>
-                      </a:solidFill>
-                    </a:lnT>
-                    <a:lnB w="9525">
-                      <a:solidFill>
-                        <a:srgbClr val="BFBFBF"/>
-                      </a:solidFill>
-                    </a:lnB>
-                  </a:tcPr>
-                </a:tc>
-                <a:tc>
-                  <a:txBody>
-                    <a:bodyPr/>
-                    <a:lstStyle/>
-                    <a:p/>
-                  </a:txBody>
-                  <a:tcPr>
-                    <a:lnL w="9525">
-                      <a:solidFill>
-                        <a:srgbClr val="BFBFBF"/>
-                      </a:solidFill>
-                    </a:lnL>
-                    <a:lnR w="9525">
-                      <a:solidFill>
-                        <a:srgbClr val="BFBFBF"/>
-                      </a:solidFill>
-                    </a:lnR>
-                    <a:lnT w="9525">
-                      <a:solidFill>
-                        <a:srgbClr val="BFBFBF"/>
-                      </a:solidFill>
-                    </a:lnT>
-                    <a:lnB w="9525">
-                      <a:solidFill>
-                        <a:srgbClr val="BFBFBF"/>
-                      </a:solidFill>
-                    </a:lnB>
-                  </a:tcPr>
-                </a:tc>
-              </a:tr>
-              <a:tr h="526143">
-                <a:tc>
-                  <a:txBody>
-                    <a:bodyPr/>
-                    <a:lstStyle/>
-                    <a:p>
-                      <a:pPr>
-                        <a:buNone/>
-                      </a:pPr>
-                      <a:r>
-                        <a:rPr lang="en-US" sz="1200" dirty="0">
-                          <a:solidFill>
-                            <a:srgbClr val="000000"/>
-                          </a:solidFill>
-                          <a:latin typeface="Ubuntu"/>
-                        </a:rPr>
-                        <a:t>i</a:t>
-                      </a:r>
-                      <a:endParaRPr lang="en-US" sz="1200" dirty="0"/>
-                    </a:p>
-                  </a:txBody>
-                  <a:tcPr>
-                    <a:lnL w="9525">
-                      <a:solidFill>
-                        <a:srgbClr val="BFBFBF"/>
-                      </a:solidFill>
-                    </a:lnL>
-                    <a:lnR w="9525">
-                      <a:solidFill>
-                        <a:srgbClr val="BFBFBF"/>
-                      </a:solidFill>
-                    </a:lnR>
-                    <a:lnT w="9525">
-                      <a:solidFill>
-                        <a:srgbClr val="BFBFBF"/>
-                      </a:solidFill>
-                    </a:lnT>
-                    <a:lnB w="9525">
-                      <a:solidFill>
-                        <a:srgbClr val="BFBFBF"/>
-                      </a:solidFill>
-                    </a:lnB>
-                  </a:tcPr>
-                </a:tc>
-                <a:tc>
-                  <a:txBody>
-                    <a:bodyPr/>
-                    <a:lstStyle/>
-                    <a:p>
-                      <a:pPr>
-                        <a:buNone/>
-                      </a:pPr>
-                      <a:r>
-                        <a:rPr lang="en-US" sz="1200" dirty="0">
-                          <a:latin typeface="Ubuntu"/>
-                        </a:rPr>
-                        <a:t>One </a:t>
-                      </a:r>
-                      <a:endParaRPr lang="en-US" sz="1200" dirty="0"/>
-                    </a:p>
-                  </a:txBody>
-                  <a:tcPr>
-                    <a:lnL w="9525">
-                      <a:solidFill>
-                        <a:srgbClr val="BFBFBF"/>
-                      </a:solidFill>
-                    </a:lnL>
-                    <a:lnR w="9525">
-                      <a:solidFill>
-                        <a:srgbClr val="BFBFBF"/>
-                      </a:solidFill>
-                    </a:lnR>
-                    <a:lnT w="9525">
-                      <a:solidFill>
-                        <a:srgbClr val="BFBFBF"/>
-                      </a:solidFill>
-                    </a:lnT>
-                    <a:lnB w="9525">
-                      <a:solidFill>
-                        <a:srgbClr val="BFBFBF"/>
-                      </a:solidFill>
-                    </a:lnB>
-                  </a:tcPr>
-                </a:tc>
-              </a:tr>
-              <a:tr h="526143">
-                <a:tc>
-                  <a:txBody>
-                    <a:bodyPr/>
-                    <a:lstStyle/>
-                    <a:p>
-                      <a:pPr>
-                        <a:buNone/>
-                      </a:pPr>
-                      <a:r>
-                        <a:rPr lang="en-US" sz="1200" dirty="0">
-                          <a:solidFill>
-                            <a:srgbClr val="000000"/>
-                          </a:solidFill>
-                          <a:latin typeface="Ubuntu"/>
-                        </a:rPr>
-                        <a:t>ii</a:t>
-                      </a:r>
-                      <a:endParaRPr lang="en-US" sz="1200" dirty="0"/>
-                    </a:p>
-                  </a:txBody>
-                  <a:tcPr>
-                    <a:lnL w="9525">
-                      <a:solidFill>
-                        <a:srgbClr val="BFBFBF"/>
-                      </a:solidFill>
-                    </a:lnL>
-                    <a:lnR w="9525">
-                      <a:solidFill>
-                        <a:srgbClr val="BFBFBF"/>
-                      </a:solidFill>
-                    </a:lnR>
-                    <a:lnT w="9525">
-                      <a:solidFill>
-                        <a:srgbClr val="BFBFBF"/>
-                      </a:solidFill>
-                    </a:lnT>
-                    <a:lnB w="9525">
-                      <a:solidFill>
-                        <a:srgbClr val="BFBFBF"/>
-                      </a:solidFill>
-                    </a:lnB>
-                  </a:tcPr>
-                </a:tc>
-                <a:tc>
-                  <a:txBody>
-                    <a:bodyPr/>
-                    <a:lstStyle/>
-                    <a:p>
-                      <a:pPr>
-                        <a:buNone/>
-                      </a:pPr>
-                      <a:r>
-                        <a:rPr lang="en-US" sz="1200" dirty="0">
-                          <a:latin typeface="Ubuntu"/>
-                        </a:rPr>
-                        <a:t>Two </a:t>
-                      </a:r>
-                      <a:endParaRPr lang="en-US" sz="1200" dirty="0"/>
-                    </a:p>
-                  </a:txBody>
-                  <a:tcPr>
-                    <a:lnL w="9525">
-                      <a:solidFill>
-                        <a:srgbClr val="BFBFBF"/>
-                      </a:solidFill>
-                    </a:lnL>
-                    <a:lnR w="9525">
-                      <a:solidFill>
-                        <a:srgbClr val="BFBFBF"/>
-                      </a:solidFill>
-                    </a:lnR>
-                    <a:lnT w="9525">
-                      <a:solidFill>
-                        <a:srgbClr val="BFBFBF"/>
-                      </a:solidFill>
-                    </a:lnT>
-                    <a:lnB w="9525">
-                      <a:solidFill>
-                        <a:srgbClr val="BFBFBF"/>
-                      </a:solidFill>
-                    </a:lnB>
-                  </a:tcPr>
-                </a:tc>
-              </a:tr>
-              <a:tr h="526143">
-                <a:tc>
-                  <a:txBody>
-                    <a:bodyPr/>
-                    <a:lstStyle/>
-                    <a:p>
-                      <a:pPr>
-                        <a:buNone/>
-                      </a:pPr>
-                      <a:r>
-                        <a:rPr lang="en-US" sz="1200" dirty="0">
-                          <a:latin typeface="Ubuntu"/>
-                        </a:rPr>
-                        <a:t>An interruption in our regularly scheduled listing, for this essential and very relevant public service announcement. </a:t>
-                      </a:r>
-                      <a:endParaRPr lang="en-US" sz="1200" dirty="0"/>
-                    </a:p>
-                  </a:txBody>
-                  <a:tcPr>
-                    <a:lnL w="9525">
-                      <a:solidFill>
-                        <a:srgbClr val="BFBFBF"/>
-                      </a:solidFill>
-                    </a:lnL>
-                    <a:lnR w="9525">
-                      <a:solidFill>
-                        <a:srgbClr val="BFBFBF"/>
-                      </a:solidFill>
-                    </a:lnR>
-                    <a:lnT w="9525">
-                      <a:solidFill>
-                        <a:srgbClr val="BFBFBF"/>
-                      </a:solidFill>
-                    </a:lnT>
-                    <a:lnB w="9525">
-                      <a:solidFill>
-                        <a:srgbClr val="BFBFBF"/>
-                      </a:solidFill>
-                    </a:lnB>
-                  </a:tcPr>
-                </a:tc>
-                <a:tc>
-                  <a:txBody>
-                    <a:bodyPr/>
-                    <a:lstStyle/>
-                    <a:p/>
-                  </a:txBody>
-                  <a:tcPr>
-                    <a:lnL w="9525">
-                      <a:solidFill>
-                        <a:srgbClr val="BFBFBF"/>
-                      </a:solidFill>
-                    </a:lnL>
-                    <a:lnR w="9525">
-                      <a:solidFill>
-                        <a:srgbClr val="BFBFBF"/>
-                      </a:solidFill>
-                    </a:lnR>
-                    <a:lnT w="9525">
-                      <a:solidFill>
-                        <a:srgbClr val="BFBFBF"/>
-                      </a:solidFill>
-                    </a:lnT>
-                    <a:lnB w="9525">
-                      <a:solidFill>
-                        <a:srgbClr val="BFBFBF"/>
-                      </a:solidFill>
-                    </a:lnB>
-                  </a:tcPr>
-                </a:tc>
-              </a:tr>
-              <a:tr h="526143">
-                <a:tc>
-                  <a:txBody>
-                    <a:bodyPr/>
-                    <a:lstStyle/>
-                    <a:p>
-                      <a:pPr>
-                        <a:buNone/>
-                      </a:pPr>
-                      <a:r>
-                        <a:rPr lang="en-US" sz="1200" dirty="0">
-                          <a:solidFill>
-                            <a:srgbClr val="000000"/>
-                          </a:solidFill>
-                          <a:latin typeface="Ubuntu"/>
-                        </a:rPr>
-                        <a:t>iii</a:t>
-                      </a:r>
-                      <a:endParaRPr lang="en-US" sz="1200" dirty="0"/>
-                    </a:p>
-                  </a:txBody>
-                  <a:tcPr>
-                    <a:lnL w="9525">
-                      <a:solidFill>
-                        <a:srgbClr val="BFBFBF"/>
-                      </a:solidFill>
-                    </a:lnL>
-                    <a:lnR w="9525">
-                      <a:solidFill>
-                        <a:srgbClr val="BFBFBF"/>
-                      </a:solidFill>
-                    </a:lnR>
-                    <a:lnT w="9525">
-                      <a:solidFill>
-                        <a:srgbClr val="BFBFBF"/>
-                      </a:solidFill>
-                    </a:lnT>
-                    <a:lnB w="9525">
-                      <a:solidFill>
-                        <a:srgbClr val="BFBFBF"/>
-                      </a:solidFill>
-                    </a:lnB>
-                  </a:tcPr>
-                </a:tc>
-                <a:tc>
-                  <a:txBody>
-                    <a:bodyPr/>
-                    <a:lstStyle/>
-                    <a:p>
-                      <a:pPr>
-                        <a:buNone/>
-                      </a:pPr>
-                      <a:r>
-                        <a:rPr lang="en-US" sz="1200" dirty="0">
-                          <a:latin typeface="Ubuntu"/>
-                        </a:rPr>
-                        <a:t>We now resume our normal programming </a:t>
-                      </a:r>
-                      <a:endParaRPr lang="en-US" sz="1200" dirty="0"/>
-                    </a:p>
-                  </a:txBody>
-                  <a:tcPr>
-                    <a:lnL w="9525">
-                      <a:solidFill>
-                        <a:srgbClr val="BFBFBF"/>
-                      </a:solidFill>
-                    </a:lnL>
-                    <a:lnR w="9525">
-                      <a:solidFill>
-                        <a:srgbClr val="BFBFBF"/>
-                      </a:solidFill>
-                    </a:lnR>
-                    <a:lnT w="9525">
-                      <a:solidFill>
-                        <a:srgbClr val="BFBFBF"/>
-                      </a:solidFill>
-                    </a:lnT>
-                    <a:lnB w="9525">
-                      <a:solidFill>
-                        <a:srgbClr val="BFBFBF"/>
-                      </a:solidFill>
-                    </a:lnB>
-                  </a:tcPr>
-                </a:tc>
-              </a:tr>
-              <a:tr h="526143">
-                <a:tc>
-                  <a:txBody>
-                    <a:bodyPr/>
-                    <a:lstStyle/>
-                    <a:p>
-                      <a:pPr>
-                        <a:buNone/>
-                      </a:pPr>
-                      <a:r>
-                        <a:rPr lang="en-US" sz="1200" dirty="0">
-                          <a:solidFill>
-                            <a:srgbClr val="000000"/>
-                          </a:solidFill>
-                          <a:latin typeface="Ubuntu"/>
-                        </a:rPr>
-                        <a:t>iv</a:t>
-                      </a:r>
-                      <a:endParaRPr lang="en-US" sz="1200" dirty="0"/>
-                    </a:p>
-                  </a:txBody>
-                  <a:tcPr>
-                    <a:lnL w="9525">
-                      <a:solidFill>
-                        <a:srgbClr val="BFBFBF"/>
-                      </a:solidFill>
-                    </a:lnL>
-                    <a:lnR w="9525">
-                      <a:solidFill>
-                        <a:srgbClr val="BFBFBF"/>
-                      </a:solidFill>
-                    </a:lnR>
-                    <a:lnT w="9525">
-                      <a:solidFill>
-                        <a:srgbClr val="BFBFBF"/>
-                      </a:solidFill>
-                    </a:lnT>
-                    <a:lnB w="9525">
-                      <a:solidFill>
-                        <a:srgbClr val="BFBFBF"/>
-                      </a:solidFill>
-                    </a:lnB>
-                  </a:tcPr>
-                </a:tc>
-                <a:tc>
-                  <a:txBody>
-                    <a:bodyPr/>
-                    <a:lstStyle/>
-                    <a:p>
-                      <a:pPr>
-                        <a:buNone/>
-                      </a:pPr>
-                      <a:r>
-                        <a:rPr lang="en-US" sz="1200" dirty="0">
-                          <a:latin typeface="Ubuntu"/>
-                        </a:rPr>
-                        <a:t>Four </a:t>
-                      </a:r>
-                      <a:endParaRPr lang="en-US" sz="1200" dirty="0"/>
-                    </a:p>
-                  </a:txBody>
-                  <a:tcPr>
-                    <a:lnL w="9525">
-                      <a:solidFill>
-                        <a:srgbClr val="BFBFBF"/>
-                      </a:solidFill>
-                    </a:lnL>
-                    <a:lnR w="9525">
-                      <a:solidFill>
-                        <a:srgbClr val="BFBFBF"/>
-                      </a:solidFill>
-                    </a:lnR>
-                    <a:lnT w="9525">
-                      <a:solidFill>
-                        <a:srgbClr val="BFBFBF"/>
-                      </a:solidFill>
-                    </a:lnT>
-                    <a:lnB w="9525">
-                      <a:solidFill>
-                        <a:srgbClr val="BFBFBF"/>
-                      </a:solidFill>
-                    </a:lnB>
-                  </a:tcPr>
-                </a:tc>
-              </a:tr>
-            </a:tbl>
-          </a:graphicData>
-        </a:graphic>
-      </p:graphicFrame>
-    </p:spTree>
-  </p:cSld>
-  <p:clrMapOvr>
-    <a:masterClrMapping/>
-  </p:clrMapOvr>
-</p:sld>
-</file>
-
-<file path=ppt/slides/slide18.xml><?xml version="1.0" encoding="utf-8"?>
 <p:sld xmlns:a="http://schemas.openxmlformats.org/drawingml/2006/main" xmlns:r="http://schemas.openxmlformats.org/officeDocument/2006/relationships" xmlns:p="http://schemas.openxmlformats.org/presentationml/2006/main">
   <p:cSld>
     <p:spTree>
@@ -8170,7 +8083,7 @@
 </p:sld>
 </file>
 
-<file path=ppt/slides/slide19.xml><?xml version="1.0" encoding="utf-8"?>
+<file path=ppt/slides/slide18.xml><?xml version="1.0" encoding="utf-8"?>
 <p:sld xmlns:a="http://schemas.openxmlformats.org/drawingml/2006/main" xmlns:r="http://schemas.openxmlformats.org/officeDocument/2006/relationships" xmlns:p="http://schemas.openxmlformats.org/presentationml/2006/main">
   <p:cSld>
     <p:spTree>
@@ -9497,859 +9410,6 @@
                           <a:latin typeface="Ubuntu"/>
                         </a:rPr>
                         <a:t>Four </a:t>
-                      </a:r>
-                      <a:endParaRPr lang="en-US" sz="1200" dirty="0"/>
-                    </a:p>
-                  </a:txBody>
-                  <a:tcPr>
-                    <a:lnL w="9525">
-                      <a:solidFill>
-                        <a:srgbClr val="BFBFBF"/>
-                      </a:solidFill>
-                    </a:lnL>
-                    <a:lnR w="9525">
-                      <a:solidFill>
-                        <a:srgbClr val="BFBFBF"/>
-                      </a:solidFill>
-                    </a:lnR>
-                    <a:lnT w="9525">
-                      <a:solidFill>
-                        <a:srgbClr val="BFBFBF"/>
-                      </a:solidFill>
-                    </a:lnT>
-                    <a:lnB w="9525">
-                      <a:solidFill>
-                        <a:srgbClr val="BFBFBF"/>
-                      </a:solidFill>
-                    </a:lnB>
-                  </a:tcPr>
-                </a:tc>
-              </a:tr>
-            </a:tbl>
-          </a:graphicData>
-        </a:graphic>
-      </p:graphicFrame>
-    </p:spTree>
-  </p:cSld>
-  <p:clrMapOvr>
-    <a:masterClrMapping/>
-  </p:clrMapOvr>
-</p:sld>
-</file>
-
-<file path=ppt/slides/slide20.xml><?xml version="1.0" encoding="utf-8"?>
-<p:sld xmlns:a="http://schemas.openxmlformats.org/drawingml/2006/main" xmlns:r="http://schemas.openxmlformats.org/officeDocument/2006/relationships" xmlns:p="http://schemas.openxmlformats.org/presentationml/2006/main">
-  <p:cSld>
-    <p:spTree>
-      <p:nvGrpSpPr>
-        <p:cNvPr id="1" name=""/>
-        <p:cNvGrpSpPr/>
-        <p:nvPr/>
-      </p:nvGrpSpPr>
-      <p:grpSpPr>
-        <a:xfrm>
-          <a:off x="0" y="0"/>
-          <a:ext cx="0" cy="0"/>
-          <a:chOff x="0" y="0"/>
-          <a:chExt cx="0" cy="0"/>
-        </a:xfrm>
-      </p:grpSpPr>
-      <p:sp>
-        <p:nvSpPr>
-          <p:cNvPr id="2" name="Title 2"/>
-          <p:cNvSpPr txBox="1"/>
-          <p:nvPr/>
-        </p:nvSpPr>
-        <p:spPr>
-          <a:xfrm>
-            <a:off x="457200" y="279400"/>
-            <a:ext cx="8229600" cy="711200"/>
-          </a:xfrm>
-          <a:prstGeom prst="rect">
-            <a:avLst/>
-          </a:prstGeom>
-          <a:noFill/>
-          <a:ln>
-            <a:noFill/>
-          </a:ln>
-        </p:spPr>
-        <p:txBody>
-          <a:bodyPr wrap="square" anchor="b" rtlCol="0">
-            <a:normAutofit/>
-          </a:bodyPr>
-          <a:lstStyle/>
-          <a:p>
-            <a:pPr>
-              <a:buNone/>
-            </a:pPr>
-            <a:r>
-              <a:rPr lang="en-US" sz="2800" b="1" dirty="0"/>
-              <a:t>Chart Sheet</a:t>
-            </a:r>
-            <a:endParaRPr lang="en-US" sz="2800" dirty="0"/>
-          </a:p>
-        </p:txBody>
-      </p:sp>
-      <p:graphicFrame>
-        <p:nvGraphicFramePr>
-          <p:cNvPr id="3" name="Table 3"/>
-          <p:cNvGraphicFramePr>
-            <a:graphicFrameLocks noGrp="1"/>
-          </p:cNvGraphicFramePr>
-          <p:nvPr/>
-        </p:nvGraphicFramePr>
-        <p:xfrm>
-          <a:off x="457200" y="1143000"/>
-          <a:ext cx="8229600" cy="3683000"/>
-        </p:xfrm>
-        <a:graphic>
-          <a:graphicData uri="http://schemas.openxmlformats.org/drawingml/2006/table">
-            <a:tbl>
-              <a:tblPr firstRow="1"/>
-              <a:tblGrid>
-                <a:gridCol w="1870364"/>
-                <a:gridCol w="1496291"/>
-                <a:gridCol w="3366655"/>
-                <a:gridCol w="1496291"/>
-              </a:tblGrid>
-              <a:tr h="736600">
-                <a:tc>
-                  <a:txBody>
-                    <a:bodyPr/>
-                    <a:lstStyle/>
-                    <a:p>
-                      <a:pPr>
-                        <a:buNone/>
-                      </a:pPr>
-                      <a:endParaRPr lang="en-US" sz="1200" dirty="0"/>
-                    </a:p>
-                  </a:txBody>
-                  <a:tcPr>
-                    <a:lnL w="9525">
-                      <a:solidFill>
-                        <a:srgbClr val="BFBFBF"/>
-                      </a:solidFill>
-                    </a:lnL>
-                    <a:lnR w="9525">
-                      <a:solidFill>
-                        <a:srgbClr val="BFBFBF"/>
-                      </a:solidFill>
-                    </a:lnR>
-                    <a:lnT w="9525">
-                      <a:solidFill>
-                        <a:srgbClr val="BFBFBF"/>
-                      </a:solidFill>
-                    </a:lnT>
-                    <a:lnB w="9525">
-                      <a:solidFill>
-                        <a:srgbClr val="BFBFBF"/>
-                      </a:solidFill>
-                    </a:lnB>
-                  </a:tcPr>
-                </a:tc>
-                <a:tc>
-                  <a:txBody>
-                    <a:bodyPr/>
-                    <a:lstStyle/>
-                    <a:p>
-                      <a:pPr>
-                        <a:buNone/>
-                      </a:pPr>
-                      <a:r>
-                        <a:rPr lang="en-US" sz="1200" dirty="0"/>
-                        <a:t>Series 1</a:t>
-                      </a:r>
-                      <a:endParaRPr lang="en-US" sz="1200" dirty="0"/>
-                    </a:p>
-                  </a:txBody>
-                  <a:tcPr>
-                    <a:lnL w="9525">
-                      <a:solidFill>
-                        <a:srgbClr val="BFBFBF"/>
-                      </a:solidFill>
-                    </a:lnL>
-                    <a:lnR w="9525">
-                      <a:solidFill>
-                        <a:srgbClr val="BFBFBF"/>
-                      </a:solidFill>
-                    </a:lnR>
-                    <a:lnT w="9525">
-                      <a:solidFill>
-                        <a:srgbClr val="BFBFBF"/>
-                      </a:solidFill>
-                    </a:lnT>
-                    <a:lnB w="9525">
-                      <a:solidFill>
-                        <a:srgbClr val="BFBFBF"/>
-                      </a:solidFill>
-                    </a:lnB>
-                  </a:tcPr>
-                </a:tc>
-                <a:tc>
-                  <a:txBody>
-                    <a:bodyPr/>
-                    <a:lstStyle/>
-                    <a:p>
-                      <a:pPr>
-                        <a:buNone/>
-                      </a:pPr>
-                      <a:r>
-                        <a:rPr lang="en-US" sz="1200" dirty="0"/>
-                        <a:t>Series 2</a:t>
-                      </a:r>
-                      <a:endParaRPr lang="en-US" sz="1200" dirty="0"/>
-                    </a:p>
-                  </a:txBody>
-                  <a:tcPr>
-                    <a:lnL w="9525">
-                      <a:solidFill>
-                        <a:srgbClr val="BFBFBF"/>
-                      </a:solidFill>
-                    </a:lnL>
-                    <a:lnR w="9525">
-                      <a:solidFill>
-                        <a:srgbClr val="BFBFBF"/>
-                      </a:solidFill>
-                    </a:lnR>
-                    <a:lnT w="9525">
-                      <a:solidFill>
-                        <a:srgbClr val="BFBFBF"/>
-                      </a:solidFill>
-                    </a:lnT>
-                    <a:lnB w="9525">
-                      <a:solidFill>
-                        <a:srgbClr val="BFBFBF"/>
-                      </a:solidFill>
-                    </a:lnB>
-                  </a:tcPr>
-                </a:tc>
-                <a:tc>
-                  <a:txBody>
-                    <a:bodyPr/>
-                    <a:lstStyle/>
-                    <a:p>
-                      <a:pPr>
-                        <a:buNone/>
-                      </a:pPr>
-                      <a:r>
-                        <a:rPr lang="en-US" sz="1200" dirty="0"/>
-                        <a:t>Series 3</a:t>
-                      </a:r>
-                      <a:endParaRPr lang="en-US" sz="1200" dirty="0"/>
-                    </a:p>
-                  </a:txBody>
-                  <a:tcPr>
-                    <a:lnL w="9525">
-                      <a:solidFill>
-                        <a:srgbClr val="BFBFBF"/>
-                      </a:solidFill>
-                    </a:lnL>
-                    <a:lnR w="9525">
-                      <a:solidFill>
-                        <a:srgbClr val="BFBFBF"/>
-                      </a:solidFill>
-                    </a:lnR>
-                    <a:lnT w="9525">
-                      <a:solidFill>
-                        <a:srgbClr val="BFBFBF"/>
-                      </a:solidFill>
-                    </a:lnT>
-                    <a:lnB w="9525">
-                      <a:solidFill>
-                        <a:srgbClr val="BFBFBF"/>
-                      </a:solidFill>
-                    </a:lnB>
-                  </a:tcPr>
-                </a:tc>
-              </a:tr>
-              <a:tr h="736600">
-                <a:tc>
-                  <a:txBody>
-                    <a:bodyPr/>
-                    <a:lstStyle/>
-                    <a:p>
-                      <a:pPr>
-                        <a:buNone/>
-                      </a:pPr>
-                      <a:r>
-                        <a:rPr lang="en-US" sz="1200" dirty="0"/>
-                        <a:t>Category 1</a:t>
-                      </a:r>
-                      <a:endParaRPr lang="en-US" sz="1200" dirty="0"/>
-                    </a:p>
-                  </a:txBody>
-                  <a:tcPr>
-                    <a:lnL w="9525">
-                      <a:solidFill>
-                        <a:srgbClr val="BFBFBF"/>
-                      </a:solidFill>
-                    </a:lnL>
-                    <a:lnR w="9525">
-                      <a:solidFill>
-                        <a:srgbClr val="BFBFBF"/>
-                      </a:solidFill>
-                    </a:lnR>
-                    <a:lnT w="9525">
-                      <a:solidFill>
-                        <a:srgbClr val="BFBFBF"/>
-                      </a:solidFill>
-                    </a:lnT>
-                    <a:lnB w="9525">
-                      <a:solidFill>
-                        <a:srgbClr val="BFBFBF"/>
-                      </a:solidFill>
-                    </a:lnB>
-                  </a:tcPr>
-                </a:tc>
-                <a:tc>
-                  <a:txBody>
-                    <a:bodyPr/>
-                    <a:lstStyle/>
-                    <a:p>
-                      <a:pPr>
-                        <a:buNone/>
-                      </a:pPr>
-                      <a:r>
-                        <a:rPr lang="en-US" sz="1200" dirty="0"/>
-                        <a:t>4.3</a:t>
-                      </a:r>
-                      <a:endParaRPr lang="en-US" sz="1200" dirty="0"/>
-                    </a:p>
-                  </a:txBody>
-                  <a:tcPr>
-                    <a:lnL w="9525">
-                      <a:solidFill>
-                        <a:srgbClr val="BFBFBF"/>
-                      </a:solidFill>
-                    </a:lnL>
-                    <a:lnR w="9525">
-                      <a:solidFill>
-                        <a:srgbClr val="BFBFBF"/>
-                      </a:solidFill>
-                    </a:lnR>
-                    <a:lnT w="9525">
-                      <a:solidFill>
-                        <a:srgbClr val="BFBFBF"/>
-                      </a:solidFill>
-                    </a:lnT>
-                    <a:lnB w="9525">
-                      <a:solidFill>
-                        <a:srgbClr val="BFBFBF"/>
-                      </a:solidFill>
-                    </a:lnB>
-                  </a:tcPr>
-                </a:tc>
-                <a:tc>
-                  <a:txBody>
-                    <a:bodyPr/>
-                    <a:lstStyle/>
-                    <a:p>
-                      <a:pPr>
-                        <a:buNone/>
-                      </a:pPr>
-                      <a:r>
-                        <a:rPr lang="en-US" sz="1200" dirty="0"/>
-                        <a:t>2.4</a:t>
-                      </a:r>
-                      <a:endParaRPr lang="en-US" sz="1200" dirty="0"/>
-                    </a:p>
-                  </a:txBody>
-                  <a:tcPr>
-                    <a:lnL w="9525">
-                      <a:solidFill>
-                        <a:srgbClr val="BFBFBF"/>
-                      </a:solidFill>
-                    </a:lnL>
-                    <a:lnR w="9525">
-                      <a:solidFill>
-                        <a:srgbClr val="BFBFBF"/>
-                      </a:solidFill>
-                    </a:lnR>
-                    <a:lnT w="9525">
-                      <a:solidFill>
-                        <a:srgbClr val="BFBFBF"/>
-                      </a:solidFill>
-                    </a:lnT>
-                    <a:lnB w="9525">
-                      <a:solidFill>
-                        <a:srgbClr val="BFBFBF"/>
-                      </a:solidFill>
-                    </a:lnB>
-                  </a:tcPr>
-                </a:tc>
-                <a:tc>
-                  <a:txBody>
-                    <a:bodyPr/>
-                    <a:lstStyle/>
-                    <a:p>
-                      <a:pPr>
-                        <a:buNone/>
-                      </a:pPr>
-                      <a:r>
-                        <a:rPr lang="en-US" sz="1200" dirty="0"/>
-                        <a:t>2</a:t>
-                      </a:r>
-                      <a:endParaRPr lang="en-US" sz="1200" dirty="0"/>
-                    </a:p>
-                  </a:txBody>
-                  <a:tcPr>
-                    <a:lnL w="9525">
-                      <a:solidFill>
-                        <a:srgbClr val="BFBFBF"/>
-                      </a:solidFill>
-                    </a:lnL>
-                    <a:lnR w="9525">
-                      <a:solidFill>
-                        <a:srgbClr val="BFBFBF"/>
-                      </a:solidFill>
-                    </a:lnR>
-                    <a:lnT w="9525">
-                      <a:solidFill>
-                        <a:srgbClr val="BFBFBF"/>
-                      </a:solidFill>
-                    </a:lnT>
-                    <a:lnB w="9525">
-                      <a:solidFill>
-                        <a:srgbClr val="BFBFBF"/>
-                      </a:solidFill>
-                    </a:lnB>
-                  </a:tcPr>
-                </a:tc>
-              </a:tr>
-              <a:tr h="736600">
-                <a:tc>
-                  <a:txBody>
-                    <a:bodyPr/>
-                    <a:lstStyle/>
-                    <a:p>
-                      <a:pPr>
-                        <a:buNone/>
-                      </a:pPr>
-                      <a:r>
-                        <a:rPr lang="en-US" sz="1200" dirty="0"/>
-                        <a:t>Category 2</a:t>
-                      </a:r>
-                      <a:endParaRPr lang="en-US" sz="1200" dirty="0"/>
-                    </a:p>
-                  </a:txBody>
-                  <a:tcPr>
-                    <a:lnL w="9525">
-                      <a:solidFill>
-                        <a:srgbClr val="BFBFBF"/>
-                      </a:solidFill>
-                    </a:lnL>
-                    <a:lnR w="9525">
-                      <a:solidFill>
-                        <a:srgbClr val="BFBFBF"/>
-                      </a:solidFill>
-                    </a:lnR>
-                    <a:lnT w="9525">
-                      <a:solidFill>
-                        <a:srgbClr val="BFBFBF"/>
-                      </a:solidFill>
-                    </a:lnT>
-                    <a:lnB w="9525">
-                      <a:solidFill>
-                        <a:srgbClr val="BFBFBF"/>
-                      </a:solidFill>
-                    </a:lnB>
-                  </a:tcPr>
-                </a:tc>
-                <a:tc>
-                  <a:txBody>
-                    <a:bodyPr/>
-                    <a:lstStyle/>
-                    <a:p>
-                      <a:pPr>
-                        <a:buNone/>
-                      </a:pPr>
-                      <a:r>
-                        <a:rPr lang="en-US" sz="1200" dirty="0"/>
-                        <a:t>2.5</a:t>
-                      </a:r>
-                      <a:endParaRPr lang="en-US" sz="1200" dirty="0"/>
-                    </a:p>
-                  </a:txBody>
-                  <a:tcPr>
-                    <a:lnL w="9525">
-                      <a:solidFill>
-                        <a:srgbClr val="BFBFBF"/>
-                      </a:solidFill>
-                    </a:lnL>
-                    <a:lnR w="9525">
-                      <a:solidFill>
-                        <a:srgbClr val="BFBFBF"/>
-                      </a:solidFill>
-                    </a:lnR>
-                    <a:lnT w="9525">
-                      <a:solidFill>
-                        <a:srgbClr val="BFBFBF"/>
-                      </a:solidFill>
-                    </a:lnT>
-                    <a:lnB w="9525">
-                      <a:solidFill>
-                        <a:srgbClr val="BFBFBF"/>
-                      </a:solidFill>
-                    </a:lnB>
-                  </a:tcPr>
-                </a:tc>
-                <a:tc>
-                  <a:txBody>
-                    <a:bodyPr/>
-                    <a:lstStyle/>
-                    <a:p>
-                      <a:pPr>
-                        <a:buNone/>
-                      </a:pPr>
-                      <a:r>
-                        <a:rPr lang="en-US" sz="1200" dirty="0"/>
-                        <a:t>4.4000000000000004</a:t>
-                      </a:r>
-                      <a:endParaRPr lang="en-US" sz="1200" dirty="0"/>
-                    </a:p>
-                  </a:txBody>
-                  <a:tcPr>
-                    <a:lnL w="9525">
-                      <a:solidFill>
-                        <a:srgbClr val="BFBFBF"/>
-                      </a:solidFill>
-                    </a:lnL>
-                    <a:lnR w="9525">
-                      <a:solidFill>
-                        <a:srgbClr val="BFBFBF"/>
-                      </a:solidFill>
-                    </a:lnR>
-                    <a:lnT w="9525">
-                      <a:solidFill>
-                        <a:srgbClr val="BFBFBF"/>
-                      </a:solidFill>
-                    </a:lnT>
-                    <a:lnB w="9525">
-                      <a:solidFill>
-                        <a:srgbClr val="BFBFBF"/>
-                      </a:solidFill>
-                    </a:lnB>
-                  </a:tcPr>
-                </a:tc>
-                <a:tc>
-                  <a:txBody>
-                    <a:bodyPr/>
-                    <a:lstStyle/>
-                    <a:p>
-                      <a:pPr>
-                        <a:buNone/>
-                      </a:pPr>
-                      <a:r>
-                        <a:rPr lang="en-US" sz="1200" dirty="0"/>
-                        <a:t>2</a:t>
-                      </a:r>
-                      <a:endParaRPr lang="en-US" sz="1200" dirty="0"/>
-                    </a:p>
-                  </a:txBody>
-                  <a:tcPr>
-                    <a:lnL w="9525">
-                      <a:solidFill>
-                        <a:srgbClr val="BFBFBF"/>
-                      </a:solidFill>
-                    </a:lnL>
-                    <a:lnR w="9525">
-                      <a:solidFill>
-                        <a:srgbClr val="BFBFBF"/>
-                      </a:solidFill>
-                    </a:lnR>
-                    <a:lnT w="9525">
-                      <a:solidFill>
-                        <a:srgbClr val="BFBFBF"/>
-                      </a:solidFill>
-                    </a:lnT>
-                    <a:lnB w="9525">
-                      <a:solidFill>
-                        <a:srgbClr val="BFBFBF"/>
-                      </a:solidFill>
-                    </a:lnB>
-                  </a:tcPr>
-                </a:tc>
-              </a:tr>
-              <a:tr h="736600">
-                <a:tc>
-                  <a:txBody>
-                    <a:bodyPr/>
-                    <a:lstStyle/>
-                    <a:p>
-                      <a:pPr>
-                        <a:buNone/>
-                      </a:pPr>
-                      <a:r>
-                        <a:rPr lang="en-US" sz="1200" dirty="0"/>
-                        <a:t>Category 3</a:t>
-                      </a:r>
-                      <a:endParaRPr lang="en-US" sz="1200" dirty="0"/>
-                    </a:p>
-                  </a:txBody>
-                  <a:tcPr>
-                    <a:lnL w="9525">
-                      <a:solidFill>
-                        <a:srgbClr val="BFBFBF"/>
-                      </a:solidFill>
-                    </a:lnL>
-                    <a:lnR w="9525">
-                      <a:solidFill>
-                        <a:srgbClr val="BFBFBF"/>
-                      </a:solidFill>
-                    </a:lnR>
-                    <a:lnT w="9525">
-                      <a:solidFill>
-                        <a:srgbClr val="BFBFBF"/>
-                      </a:solidFill>
-                    </a:lnT>
-                    <a:lnB w="9525">
-                      <a:solidFill>
-                        <a:srgbClr val="BFBFBF"/>
-                      </a:solidFill>
-                    </a:lnB>
-                  </a:tcPr>
-                </a:tc>
-                <a:tc>
-                  <a:txBody>
-                    <a:bodyPr/>
-                    <a:lstStyle/>
-                    <a:p>
-                      <a:pPr>
-                        <a:buNone/>
-                      </a:pPr>
-                      <a:r>
-                        <a:rPr lang="en-US" sz="1200" dirty="0"/>
-                        <a:t>3.5</a:t>
-                      </a:r>
-                      <a:endParaRPr lang="en-US" sz="1200" dirty="0"/>
-                    </a:p>
-                  </a:txBody>
-                  <a:tcPr>
-                    <a:lnL w="9525">
-                      <a:solidFill>
-                        <a:srgbClr val="BFBFBF"/>
-                      </a:solidFill>
-                    </a:lnL>
-                    <a:lnR w="9525">
-                      <a:solidFill>
-                        <a:srgbClr val="BFBFBF"/>
-                      </a:solidFill>
-                    </a:lnR>
-                    <a:lnT w="9525">
-                      <a:solidFill>
-                        <a:srgbClr val="BFBFBF"/>
-                      </a:solidFill>
-                    </a:lnT>
-                    <a:lnB w="9525">
-                      <a:solidFill>
-                        <a:srgbClr val="BFBFBF"/>
-                      </a:solidFill>
-                    </a:lnB>
-                  </a:tcPr>
-                </a:tc>
-                <a:tc>
-                  <a:txBody>
-                    <a:bodyPr/>
-                    <a:lstStyle/>
-                    <a:p>
-                      <a:pPr>
-                        <a:buNone/>
-                      </a:pPr>
-                      <a:r>
-                        <a:rPr lang="en-US" sz="1200" dirty="0"/>
-                        <a:t>1.8</a:t>
-                      </a:r>
-                      <a:endParaRPr lang="en-US" sz="1200" dirty="0"/>
-                    </a:p>
-                  </a:txBody>
-                  <a:tcPr>
-                    <a:lnL w="9525">
-                      <a:solidFill>
-                        <a:srgbClr val="BFBFBF"/>
-                      </a:solidFill>
-                    </a:lnL>
-                    <a:lnR w="9525">
-                      <a:solidFill>
-                        <a:srgbClr val="BFBFBF"/>
-                      </a:solidFill>
-                    </a:lnR>
-                    <a:lnT w="9525">
-                      <a:solidFill>
-                        <a:srgbClr val="BFBFBF"/>
-                      </a:solidFill>
-                    </a:lnT>
-                    <a:lnB w="9525">
-                      <a:solidFill>
-                        <a:srgbClr val="BFBFBF"/>
-                      </a:solidFill>
-                    </a:lnB>
-                  </a:tcPr>
-                </a:tc>
-                <a:tc>
-                  <a:txBody>
-                    <a:bodyPr/>
-                    <a:lstStyle/>
-                    <a:p>
-                      <a:pPr>
-                        <a:buNone/>
-                      </a:pPr>
-                      <a:r>
-                        <a:rPr lang="en-US" sz="1200" dirty="0"/>
-                        <a:t>3</a:t>
-                      </a:r>
-                      <a:endParaRPr lang="en-US" sz="1200" dirty="0"/>
-                    </a:p>
-                  </a:txBody>
-                  <a:tcPr>
-                    <a:lnL w="9525">
-                      <a:solidFill>
-                        <a:srgbClr val="BFBFBF"/>
-                      </a:solidFill>
-                    </a:lnL>
-                    <a:lnR w="9525">
-                      <a:solidFill>
-                        <a:srgbClr val="BFBFBF"/>
-                      </a:solidFill>
-                    </a:lnR>
-                    <a:lnT w="9525">
-                      <a:solidFill>
-                        <a:srgbClr val="BFBFBF"/>
-                      </a:solidFill>
-                    </a:lnT>
-                    <a:lnB w="9525">
-                      <a:solidFill>
-                        <a:srgbClr val="BFBFBF"/>
-                      </a:solidFill>
-                    </a:lnB>
-                  </a:tcPr>
-                </a:tc>
-              </a:tr>
-              <a:tr h="736600">
-                <a:tc>
-                  <a:txBody>
-                    <a:bodyPr/>
-                    <a:lstStyle/>
-                    <a:p>
-                      <a:pPr>
-                        <a:buNone/>
-                      </a:pPr>
-                      <a:r>
-                        <a:rPr lang="en-US" sz="1200" dirty="0"/>
-                        <a:t>Category 4</a:t>
-                      </a:r>
-                      <a:endParaRPr lang="en-US" sz="1200" dirty="0"/>
-                    </a:p>
-                  </a:txBody>
-                  <a:tcPr>
-                    <a:lnL w="9525">
-                      <a:solidFill>
-                        <a:srgbClr val="BFBFBF"/>
-                      </a:solidFill>
-                    </a:lnL>
-                    <a:lnR w="9525">
-                      <a:solidFill>
-                        <a:srgbClr val="BFBFBF"/>
-                      </a:solidFill>
-                    </a:lnR>
-                    <a:lnT w="9525">
-                      <a:solidFill>
-                        <a:srgbClr val="BFBFBF"/>
-                      </a:solidFill>
-                    </a:lnT>
-                    <a:lnB w="9525">
-                      <a:solidFill>
-                        <a:srgbClr val="BFBFBF"/>
-                      </a:solidFill>
-                    </a:lnB>
-                  </a:tcPr>
-                </a:tc>
-                <a:tc>
-                  <a:txBody>
-                    <a:bodyPr/>
-                    <a:lstStyle/>
-                    <a:p>
-                      <a:pPr>
-                        <a:buNone/>
-                      </a:pPr>
-                      <a:r>
-                        <a:rPr lang="en-US" sz="1200" dirty="0"/>
-                        <a:t>4.5</a:t>
-                      </a:r>
-                      <a:endParaRPr lang="en-US" sz="1200" dirty="0"/>
-                    </a:p>
-                  </a:txBody>
-                  <a:tcPr>
-                    <a:lnL w="9525">
-                      <a:solidFill>
-                        <a:srgbClr val="BFBFBF"/>
-                      </a:solidFill>
-                    </a:lnL>
-                    <a:lnR w="9525">
-                      <a:solidFill>
-                        <a:srgbClr val="BFBFBF"/>
-                      </a:solidFill>
-                    </a:lnR>
-                    <a:lnT w="9525">
-                      <a:solidFill>
-                        <a:srgbClr val="BFBFBF"/>
-                      </a:solidFill>
-                    </a:lnT>
-                    <a:lnB w="9525">
-                      <a:solidFill>
-                        <a:srgbClr val="BFBFBF"/>
-                      </a:solidFill>
-                    </a:lnB>
-                  </a:tcPr>
-                </a:tc>
-                <a:tc>
-                  <a:txBody>
-                    <a:bodyPr/>
-                    <a:lstStyle/>
-                    <a:p>
-                      <a:pPr>
-                        <a:buNone/>
-                      </a:pPr>
-                      <a:r>
-                        <a:rPr lang="en-US" sz="1200" dirty="0"/>
-                        <a:t>2.8</a:t>
-                      </a:r>
-                      <a:endParaRPr lang="en-US" sz="1200" dirty="0"/>
-                    </a:p>
-                  </a:txBody>
-                  <a:tcPr>
-                    <a:lnL w="9525">
-                      <a:solidFill>
-                        <a:srgbClr val="BFBFBF"/>
-                      </a:solidFill>
-                    </a:lnL>
-                    <a:lnR w="9525">
-                      <a:solidFill>
-                        <a:srgbClr val="BFBFBF"/>
-                      </a:solidFill>
-                    </a:lnR>
-                    <a:lnT w="9525">
-                      <a:solidFill>
-                        <a:srgbClr val="BFBFBF"/>
-                      </a:solidFill>
-                    </a:lnT>
-                    <a:lnB w="9525">
-                      <a:solidFill>
-                        <a:srgbClr val="BFBFBF"/>
-                      </a:solidFill>
-                    </a:lnB>
-                  </a:tcPr>
-                </a:tc>
-                <a:tc>
-                  <a:txBody>
-                    <a:bodyPr/>
-                    <a:lstStyle/>
-                    <a:p>
-                      <a:pPr>
-                        <a:buNone/>
-                      </a:pPr>
-                      <a:r>
-                        <a:rPr lang="en-US" sz="1200" dirty="0"/>
-                        <a:t>5</a:t>
                       </a:r>
                       <a:endParaRPr lang="en-US" sz="1200" dirty="0"/>
                     </a:p>

--- a/test/generator/baseline/gen.xlsx.to.pptx.pptx
+++ b/test/generator/baseline/gen.xlsx.to.pptx.pptx
@@ -8158,7 +8158,134 @@
                 <a:gridCol w="3366655"/>
                 <a:gridCol w="1496291"/>
               </a:tblGrid>
-              <a:tr h="736600">
+              <a:tr h="613833">
+                <a:tc gridSpan="4">
+                  <a:txBody>
+                    <a:bodyPr/>
+                    <a:lstStyle/>
+                    <a:p>
+                      <a:pPr>
+                        <a:buNone/>
+                      </a:pPr>
+                      <a:r>
+                        <a:rPr lang="en-US" sz="1200" b="1" dirty="0"/>
+                        <a:t>Chart Title</a:t>
+                      </a:r>
+                      <a:endParaRPr lang="en-US" sz="1200" dirty="0"/>
+                    </a:p>
+                  </a:txBody>
+                  <a:tcPr>
+                    <a:lnL w="9525">
+                      <a:solidFill>
+                        <a:srgbClr val="BFBFBF"/>
+                      </a:solidFill>
+                    </a:lnL>
+                    <a:lnR w="9525">
+                      <a:solidFill>
+                        <a:srgbClr val="BFBFBF"/>
+                      </a:solidFill>
+                    </a:lnR>
+                    <a:lnT w="9525">
+                      <a:solidFill>
+                        <a:srgbClr val="BFBFBF"/>
+                      </a:solidFill>
+                    </a:lnT>
+                    <a:lnB w="9525">
+                      <a:solidFill>
+                        <a:srgbClr val="BFBFBF"/>
+                      </a:solidFill>
+                    </a:lnB>
+                  </a:tcPr>
+                </a:tc>
+                <a:tc hMerge="1">
+                  <a:txBody>
+                    <a:bodyPr/>
+                    <a:lstStyle/>
+                    <a:p/>
+                  </a:txBody>
+                  <a:tcPr>
+                    <a:lnL w="9525">
+                      <a:solidFill>
+                        <a:srgbClr val="BFBFBF"/>
+                      </a:solidFill>
+                    </a:lnL>
+                    <a:lnR w="9525">
+                      <a:solidFill>
+                        <a:srgbClr val="BFBFBF"/>
+                      </a:solidFill>
+                    </a:lnR>
+                    <a:lnT w="9525">
+                      <a:solidFill>
+                        <a:srgbClr val="BFBFBF"/>
+                      </a:solidFill>
+                    </a:lnT>
+                    <a:lnB w="9525">
+                      <a:solidFill>
+                        <a:srgbClr val="BFBFBF"/>
+                      </a:solidFill>
+                    </a:lnB>
+                  </a:tcPr>
+                </a:tc>
+                <a:tc hMerge="1">
+                  <a:txBody>
+                    <a:bodyPr/>
+                    <a:lstStyle/>
+                    <a:p/>
+                  </a:txBody>
+                  <a:tcPr>
+                    <a:lnL w="9525">
+                      <a:solidFill>
+                        <a:srgbClr val="BFBFBF"/>
+                      </a:solidFill>
+                    </a:lnL>
+                    <a:lnR w="9525">
+                      <a:solidFill>
+                        <a:srgbClr val="BFBFBF"/>
+                      </a:solidFill>
+                    </a:lnR>
+                    <a:lnT w="9525">
+                      <a:solidFill>
+                        <a:srgbClr val="BFBFBF"/>
+                      </a:solidFill>
+                    </a:lnT>
+                    <a:lnB w="9525">
+                      <a:solidFill>
+                        <a:srgbClr val="BFBFBF"/>
+                      </a:solidFill>
+                    </a:lnB>
+                  </a:tcPr>
+                </a:tc>
+                <a:tc hMerge="1">
+                  <a:txBody>
+                    <a:bodyPr/>
+                    <a:lstStyle/>
+                    <a:p/>
+                  </a:txBody>
+                  <a:tcPr>
+                    <a:lnL w="9525">
+                      <a:solidFill>
+                        <a:srgbClr val="BFBFBF"/>
+                      </a:solidFill>
+                    </a:lnL>
+                    <a:lnR w="9525">
+                      <a:solidFill>
+                        <a:srgbClr val="BFBFBF"/>
+                      </a:solidFill>
+                    </a:lnR>
+                    <a:lnT w="9525">
+                      <a:solidFill>
+                        <a:srgbClr val="BFBFBF"/>
+                      </a:solidFill>
+                    </a:lnT>
+                    <a:lnB w="9525">
+                      <a:solidFill>
+                        <a:srgbClr val="BFBFBF"/>
+                      </a:solidFill>
+                    </a:lnB>
+                  </a:tcPr>
+                </a:tc>
+              </a:tr>
+              <a:tr h="613833">
                 <a:tc>
                   <a:txBody>
                     <a:bodyPr/>
@@ -8308,7 +8435,7 @@
                   </a:tcPr>
                 </a:tc>
               </a:tr>
-              <a:tr h="736600">
+              <a:tr h="613833">
                 <a:tc>
                   <a:txBody>
                     <a:bodyPr/>
@@ -8462,7 +8589,7 @@
                   </a:tcPr>
                 </a:tc>
               </a:tr>
-              <a:tr h="736600">
+              <a:tr h="613833">
                 <a:tc>
                   <a:txBody>
                     <a:bodyPr/>
@@ -8616,7 +8743,7 @@
                   </a:tcPr>
                 </a:tc>
               </a:tr>
-              <a:tr h="736600">
+              <a:tr h="613833">
                 <a:tc>
                   <a:txBody>
                     <a:bodyPr/>
@@ -8770,7 +8897,7 @@
                   </a:tcPr>
                 </a:tc>
               </a:tr>
-              <a:tr h="736600">
+              <a:tr h="613833">
                 <a:tc>
                   <a:txBody>
                     <a:bodyPr/>
